--- a/artifacts/release-check/mdpr-skill-release-check.pptx
+++ b/artifacts/release-check/mdpr-skill-release-check.pptx
@@ -1920,9 +1920,7 @@
           <a:ln/>
         </p:spPr>
         <p:txBody>
-          <a:bodyPr wrap="square" lIns="0" tIns="0" rIns="0" bIns="0" rtlCol="0" anchor="ctr">
-            <a:normAutofit/>
-          </a:bodyPr>
+          <a:bodyPr wrap="square" lIns="0" tIns="0" rIns="0" bIns="0" rtlCol="0" anchor="ctr"/>
           <a:lstStyle/>
           <a:p>
             <a:pPr algn="ctr" indent="0" marL="0">
@@ -2131,9 +2129,7 @@
           <a:ln/>
         </p:spPr>
         <p:txBody>
-          <a:bodyPr wrap="square" lIns="0" tIns="0" rIns="0" bIns="0" rtlCol="0" anchor="ctr">
-            <a:normAutofit/>
-          </a:bodyPr>
+          <a:bodyPr wrap="square" lIns="0" tIns="0" rIns="0" bIns="0" rtlCol="0" anchor="ctr"/>
           <a:lstStyle/>
           <a:p>
             <a:pPr algn="ctr" indent="0" marL="0">
@@ -2175,9 +2171,7 @@
           <a:ln/>
         </p:spPr>
         <p:txBody>
-          <a:bodyPr wrap="square" lIns="0" tIns="25400" rIns="25400" bIns="0" rtlCol="0" anchor="t">
-            <a:normAutofit/>
-          </a:bodyPr>
+          <a:bodyPr wrap="square" lIns="0" tIns="25400" rIns="25400" bIns="0" rtlCol="0" anchor="t"/>
           <a:lstStyle/>
           <a:p>
             <a:pPr algn="l" indent="0" marL="0">
@@ -2195,7 +2189,7 @@
                 <a:ea typeface="Pretendard" pitchFamily="34" charset="-122"/>
                 <a:cs typeface="Pretendard" pitchFamily="34" charset="-120"/>
               </a:rPr>
-              <a:t>- PPT BIZCAM recursive report</a:t>
+              <a:t>- Reference object rules</a:t>
             </a:r>
             <a:pPr algn="l" indent="0" marL="0">
               <a:lnSpc>
@@ -2212,7 +2206,7 @@
                 <a:ea typeface="Pretendard" pitchFamily="34" charset="-122"/>
                 <a:cs typeface="Pretendard" pitchFamily="34" charset="-120"/>
               </a:rPr>
-              <a:t>  artifacts/pptbizcam-analysis/pptbizcam-recursive-object-rules.json</a:t>
+              <a:t>  artifacts/reference-pattern-analysis/derived-object-rules.json</a:t>
             </a:r>
             <a:endParaRPr lang="en-US" sz="2200" dirty="0"/>
           </a:p>
@@ -2236,9 +2230,7 @@
           <a:ln/>
         </p:spPr>
         <p:txBody>
-          <a:bodyPr wrap="square" lIns="0" tIns="25400" rIns="25400" bIns="0" rtlCol="0" anchor="t">
-            <a:normAutofit/>
-          </a:bodyPr>
+          <a:bodyPr wrap="square" lIns="0" tIns="25400" rIns="25400" bIns="0" rtlCol="0" anchor="t"/>
           <a:lstStyle/>
           <a:p>
             <a:pPr algn="l" indent="0" marL="0">
@@ -2400,8 +2392,37 @@
         </p:nvSpPr>
         <p:spPr>
           <a:xfrm>
-            <a:off x="914400" y="1417320"/>
-            <a:ext cx="73152" cy="868680"/>
+            <a:off x="786384" y="1956816"/>
+            <a:ext cx="32004" cy="3483864"/>
+          </a:xfrm>
+          <a:prstGeom prst="rect">
+            <a:avLst/>
+          </a:prstGeom>
+          <a:solidFill>
+            <a:srgbClr val="FCD34D">
+              <a:alpha val="80000"/>
+            </a:srgbClr>
+          </a:solidFill>
+          <a:ln w="12700">
+            <a:solidFill>
+              <a:srgbClr val="FCD34D">
+                <a:alpha val="0"/>
+              </a:srgbClr>
+            </a:solidFill>
+            <a:prstDash val="solid"/>
+          </a:ln>
+        </p:spPr>
+      </p:sp>
+      <p:sp>
+        <p:nvSpPr>
+          <p:cNvPr id="6" name="Shape 4"/>
+          <p:cNvSpPr/>
+          <p:nvPr/>
+        </p:nvSpPr>
+        <p:spPr>
+          <a:xfrm>
+            <a:off x="914400" y="1865376"/>
+            <a:ext cx="73152" cy="1024128"/>
           </a:xfrm>
           <a:prstGeom prst="rect">
             <a:avLst/>
@@ -2421,14 +2442,14 @@
       </p:sp>
       <p:sp>
         <p:nvSpPr>
-          <p:cNvPr id="6" name="Shape 4"/>
-          <p:cNvSpPr/>
-          <p:nvPr/>
-        </p:nvSpPr>
-        <p:spPr>
-          <a:xfrm>
-            <a:off x="914400" y="2560320"/>
-            <a:ext cx="73152" cy="868680"/>
+          <p:cNvPr id="7" name="Shape 5"/>
+          <p:cNvSpPr/>
+          <p:nvPr/>
+        </p:nvSpPr>
+        <p:spPr>
+          <a:xfrm>
+            <a:off x="914400" y="3191256"/>
+            <a:ext cx="73152" cy="1024128"/>
           </a:xfrm>
           <a:prstGeom prst="rect">
             <a:avLst/>
@@ -2448,14 +2469,14 @@
       </p:sp>
       <p:sp>
         <p:nvSpPr>
-          <p:cNvPr id="7" name="Shape 5"/>
-          <p:cNvSpPr/>
-          <p:nvPr/>
-        </p:nvSpPr>
-        <p:spPr>
-          <a:xfrm>
-            <a:off x="914400" y="3703320"/>
-            <a:ext cx="73152" cy="868680"/>
+          <p:cNvPr id="8" name="Shape 6"/>
+          <p:cNvSpPr/>
+          <p:nvPr/>
+        </p:nvSpPr>
+        <p:spPr>
+          <a:xfrm>
+            <a:off x="914400" y="4507992"/>
+            <a:ext cx="73152" cy="1024128"/>
           </a:xfrm>
           <a:prstGeom prst="rect">
             <a:avLst/>
@@ -2473,96 +2494,207 @@
           </a:ln>
         </p:spPr>
       </p:sp>
-      <p:sp>
-        <p:nvSpPr>
-          <p:cNvPr id="8" name="Shape 6"/>
-          <p:cNvSpPr/>
-          <p:nvPr/>
-        </p:nvSpPr>
-        <p:spPr>
-          <a:xfrm>
-            <a:off x="914400" y="1417320"/>
-            <a:ext cx="10241280" cy="868680"/>
-          </a:xfrm>
-          <a:prstGeom prst="roundRect">
-            <a:avLst>
-              <a:gd name="adj" fmla="val 6316"/>
-            </a:avLst>
-          </a:prstGeom>
-          <a:solidFill>
-            <a:srgbClr val="FFFBF5"/>
+      <p:pic>
+        <p:nvPicPr>
+          <p:cNvPr id="9" name="Image 0" descr="preencoded.png">    </p:cNvPr>
+          <p:cNvPicPr>
+            <a:picLocks noChangeAspect="1"/>
+          </p:cNvPicPr>
+          <p:nvPr/>
+        </p:nvPicPr>
+        <p:blipFill>
+          <a:blip r:embed="rId1">
+            <a:extLst>
+              <a:ext uri="{96DAC541-7B7A-43D3-8B79-37D633B846F1}">
+                <asvg:svgBlip xmlns:asvg="http://schemas.microsoft.com/office/drawing/2016/SVG/main" r:embed="rId2"/>
+              </a:ext>
+            </a:extLst>
+          </a:blip>
+          <a:stretch>
+            <a:fillRect/>
+          </a:stretch>
+        </p:blipFill>
+        <p:spPr>
+          <a:xfrm>
+            <a:off x="914400" y="1865376"/>
+            <a:ext cx="10241280" cy="1024128"/>
+          </a:xfrm>
+          <a:prstGeom prst="rect">
+            <a:avLst/>
+          </a:prstGeom>
+        </p:spPr>
+      </p:pic>
+      <p:sp>
+        <p:nvSpPr>
+          <p:cNvPr id="10" name="Shape 7"/>
+          <p:cNvSpPr/>
+          <p:nvPr/>
+        </p:nvSpPr>
+        <p:spPr>
+          <a:xfrm>
+            <a:off x="914400" y="1865376"/>
+            <a:ext cx="10241280" cy="1024128"/>
+          </a:xfrm>
+          <a:prstGeom prst="rect">
+            <a:avLst/>
+          </a:prstGeom>
+          <a:solidFill>
+            <a:srgbClr val="FFFBF5">
+              <a:alpha val="0"/>
+            </a:srgbClr>
           </a:solidFill>
           <a:ln w="12700">
             <a:solidFill>
               <a:srgbClr val="E7D8C9">
-                <a:alpha val="90000"/>
-              </a:srgbClr>
-            </a:solidFill>
-            <a:prstDash val="solid"/>
-          </a:ln>
-        </p:spPr>
-      </p:sp>
-      <p:sp>
-        <p:nvSpPr>
-          <p:cNvPr id="9" name="Shape 7"/>
-          <p:cNvSpPr/>
-          <p:nvPr/>
-        </p:nvSpPr>
-        <p:spPr>
-          <a:xfrm>
-            <a:off x="914400" y="2560320"/>
-            <a:ext cx="10241280" cy="868680"/>
-          </a:xfrm>
-          <a:prstGeom prst="roundRect">
-            <a:avLst>
-              <a:gd name="adj" fmla="val 6316"/>
-            </a:avLst>
-          </a:prstGeom>
-          <a:solidFill>
-            <a:srgbClr val="FFFBF5"/>
+                <a:alpha val="0"/>
+              </a:srgbClr>
+            </a:solidFill>
+            <a:prstDash val="solid"/>
+          </a:ln>
+          <a:effectLst>
+            <a:outerShdw sx="100000" sy="100000" kx="0" ky="0" algn="bl" rotWithShape="0" blurRad="12700" dist="50800" dir="2700000">
+              <a:srgbClr val="000000">
+                <a:alpha val="8000"/>
+              </a:srgbClr>
+            </a:outerShdw>
+          </a:effectLst>
+        </p:spPr>
+      </p:sp>
+      <p:pic>
+        <p:nvPicPr>
+          <p:cNvPr id="11" name="Image 1" descr="preencoded.png">    </p:cNvPr>
+          <p:cNvPicPr>
+            <a:picLocks noChangeAspect="1"/>
+          </p:cNvPicPr>
+          <p:nvPr/>
+        </p:nvPicPr>
+        <p:blipFill>
+          <a:blip r:embed="rId3">
+            <a:extLst>
+              <a:ext uri="{96DAC541-7B7A-43D3-8B79-37D633B846F1}">
+                <asvg:svgBlip xmlns:asvg="http://schemas.microsoft.com/office/drawing/2016/SVG/main" r:embed="rId4"/>
+              </a:ext>
+            </a:extLst>
+          </a:blip>
+          <a:stretch>
+            <a:fillRect/>
+          </a:stretch>
+        </p:blipFill>
+        <p:spPr>
+          <a:xfrm>
+            <a:off x="914400" y="3191256"/>
+            <a:ext cx="10241280" cy="1024128"/>
+          </a:xfrm>
+          <a:prstGeom prst="rect">
+            <a:avLst/>
+          </a:prstGeom>
+        </p:spPr>
+      </p:pic>
+      <p:sp>
+        <p:nvSpPr>
+          <p:cNvPr id="12" name="Shape 8"/>
+          <p:cNvSpPr/>
+          <p:nvPr/>
+        </p:nvSpPr>
+        <p:spPr>
+          <a:xfrm>
+            <a:off x="914400" y="3191256"/>
+            <a:ext cx="10241280" cy="1024128"/>
+          </a:xfrm>
+          <a:prstGeom prst="rect">
+            <a:avLst/>
+          </a:prstGeom>
+          <a:solidFill>
+            <a:srgbClr val="FFFBF5">
+              <a:alpha val="0"/>
+            </a:srgbClr>
           </a:solidFill>
           <a:ln w="12700">
             <a:solidFill>
               <a:srgbClr val="E7D8C9">
-                <a:alpha val="90000"/>
-              </a:srgbClr>
-            </a:solidFill>
-            <a:prstDash val="solid"/>
-          </a:ln>
-        </p:spPr>
-      </p:sp>
-      <p:sp>
-        <p:nvSpPr>
-          <p:cNvPr id="10" name="Shape 8"/>
-          <p:cNvSpPr/>
-          <p:nvPr/>
-        </p:nvSpPr>
-        <p:spPr>
-          <a:xfrm>
-            <a:off x="914400" y="3703320"/>
-            <a:ext cx="10241280" cy="868680"/>
-          </a:xfrm>
-          <a:prstGeom prst="roundRect">
-            <a:avLst>
-              <a:gd name="adj" fmla="val 6316"/>
-            </a:avLst>
-          </a:prstGeom>
-          <a:solidFill>
-            <a:srgbClr val="FFFBF5"/>
+                <a:alpha val="0"/>
+              </a:srgbClr>
+            </a:solidFill>
+            <a:prstDash val="solid"/>
+          </a:ln>
+          <a:effectLst>
+            <a:outerShdw sx="100000" sy="100000" kx="0" ky="0" algn="bl" rotWithShape="0" blurRad="12700" dist="50800" dir="2700000">
+              <a:srgbClr val="000000">
+                <a:alpha val="8000"/>
+              </a:srgbClr>
+            </a:outerShdw>
+          </a:effectLst>
+        </p:spPr>
+      </p:sp>
+      <p:pic>
+        <p:nvPicPr>
+          <p:cNvPr id="13" name="Image 2" descr="preencoded.png">    </p:cNvPr>
+          <p:cNvPicPr>
+            <a:picLocks noChangeAspect="1"/>
+          </p:cNvPicPr>
+          <p:nvPr/>
+        </p:nvPicPr>
+        <p:blipFill>
+          <a:blip r:embed="rId5">
+            <a:extLst>
+              <a:ext uri="{96DAC541-7B7A-43D3-8B79-37D633B846F1}">
+                <asvg:svgBlip xmlns:asvg="http://schemas.microsoft.com/office/drawing/2016/SVG/main" r:embed="rId6"/>
+              </a:ext>
+            </a:extLst>
+          </a:blip>
+          <a:stretch>
+            <a:fillRect/>
+          </a:stretch>
+        </p:blipFill>
+        <p:spPr>
+          <a:xfrm>
+            <a:off x="914400" y="4507992"/>
+            <a:ext cx="10241280" cy="1024128"/>
+          </a:xfrm>
+          <a:prstGeom prst="rect">
+            <a:avLst/>
+          </a:prstGeom>
+        </p:spPr>
+      </p:pic>
+      <p:sp>
+        <p:nvSpPr>
+          <p:cNvPr id="14" name="Shape 9"/>
+          <p:cNvSpPr/>
+          <p:nvPr/>
+        </p:nvSpPr>
+        <p:spPr>
+          <a:xfrm>
+            <a:off x="914400" y="4507992"/>
+            <a:ext cx="10241280" cy="1024128"/>
+          </a:xfrm>
+          <a:prstGeom prst="rect">
+            <a:avLst/>
+          </a:prstGeom>
+          <a:solidFill>
+            <a:srgbClr val="FFFBF5">
+              <a:alpha val="0"/>
+            </a:srgbClr>
           </a:solidFill>
           <a:ln w="12700">
             <a:solidFill>
               <a:srgbClr val="E7D8C9">
-                <a:alpha val="90000"/>
-              </a:srgbClr>
-            </a:solidFill>
-            <a:prstDash val="solid"/>
-          </a:ln>
-        </p:spPr>
-      </p:sp>
-      <p:sp>
-        <p:nvSpPr>
-          <p:cNvPr id="11" name="Text 9"/>
+                <a:alpha val="0"/>
+              </a:srgbClr>
+            </a:solidFill>
+            <a:prstDash val="solid"/>
+          </a:ln>
+          <a:effectLst>
+            <a:outerShdw sx="100000" sy="100000" kx="0" ky="0" algn="bl" rotWithShape="0" blurRad="12700" dist="50800" dir="2700000">
+              <a:srgbClr val="000000">
+                <a:alpha val="8000"/>
+              </a:srgbClr>
+            </a:outerShdw>
+          </a:effectLst>
+        </p:spPr>
+      </p:sp>
+      <p:sp>
+        <p:nvSpPr>
+          <p:cNvPr id="15" name="Text 10"/>
           <p:cNvSpPr txBox="1"/>
           <p:nvPr/>
         </p:nvSpPr>
@@ -2578,9 +2710,7 @@
           <a:ln/>
         </p:spPr>
         <p:txBody>
-          <a:bodyPr wrap="square" lIns="0" tIns="0" rIns="0" bIns="0" rtlCol="0" anchor="ctr">
-            <a:normAutofit/>
-          </a:bodyPr>
+          <a:bodyPr wrap="square" lIns="0" tIns="0" rIns="0" bIns="0" rtlCol="0" anchor="ctr"/>
           <a:lstStyle/>
           <a:p>
             <a:pPr algn="ctr" indent="0" marL="0">
@@ -2606,18 +2736,18 @@
       </p:sp>
       <p:sp>
         <p:nvSpPr>
-          <p:cNvPr id="12" name="Shape 10"/>
-          <p:cNvSpPr/>
-          <p:nvPr/>
-        </p:nvSpPr>
-        <p:spPr>
-          <a:xfrm>
-            <a:off x="1097280" y="1623060"/>
-            <a:ext cx="457200" cy="457200"/>
+          <p:cNvPr id="16" name="Shape 11"/>
+          <p:cNvSpPr/>
+          <p:nvPr/>
+        </p:nvSpPr>
+        <p:spPr>
+          <a:xfrm>
+            <a:off x="1097280" y="2140428"/>
+            <a:ext cx="474025" cy="474025"/>
           </a:xfrm>
           <a:prstGeom prst="roundRect">
             <a:avLst>
-              <a:gd name="adj" fmla="val 8000"/>
+              <a:gd name="adj" fmla="val 7716"/>
             </a:avLst>
           </a:prstGeom>
           <a:solidFill>
@@ -2631,151 +2761,46 @@
           </a:ln>
         </p:spPr>
       </p:sp>
-      <p:sp>
-        <p:nvSpPr>
-          <p:cNvPr id="13" name="Shape 11"/>
-          <p:cNvSpPr/>
-          <p:nvPr/>
-        </p:nvSpPr>
-        <p:spPr>
-          <a:xfrm>
-            <a:off x="1213957" y="1820322"/>
-            <a:ext cx="44769" cy="44769"/>
-          </a:xfrm>
-          <a:prstGeom prst="ellipse">
-            <a:avLst/>
-          </a:prstGeom>
-          <a:solidFill>
-            <a:srgbClr val="1F2937"/>
-          </a:solidFill>
-          <a:ln w="12700">
-            <a:solidFill>
-              <a:srgbClr val="1F2937">
-                <a:alpha val="0"/>
-              </a:srgbClr>
-            </a:solidFill>
-            <a:prstDash val="solid"/>
-          </a:ln>
-        </p:spPr>
-      </p:sp>
-      <p:sp>
-        <p:nvSpPr>
-          <p:cNvPr id="14" name="Shape 12"/>
-          <p:cNvSpPr/>
-          <p:nvPr/>
-        </p:nvSpPr>
-        <p:spPr>
-          <a:xfrm>
-            <a:off x="1299019" y="1820322"/>
-            <a:ext cx="44769" cy="44769"/>
-          </a:xfrm>
-          <a:prstGeom prst="ellipse">
-            <a:avLst/>
-          </a:prstGeom>
-          <a:solidFill>
-            <a:srgbClr val="1F2937"/>
-          </a:solidFill>
-          <a:ln w="12700">
-            <a:solidFill>
-              <a:srgbClr val="1F2937">
-                <a:alpha val="0"/>
-              </a:srgbClr>
-            </a:solidFill>
-            <a:prstDash val="solid"/>
-          </a:ln>
-        </p:spPr>
-      </p:sp>
-      <p:sp>
-        <p:nvSpPr>
-          <p:cNvPr id="15" name="Shape 13"/>
-          <p:cNvSpPr/>
-          <p:nvPr/>
-        </p:nvSpPr>
-        <p:spPr>
-          <a:xfrm>
-            <a:off x="1384080" y="1820322"/>
-            <a:ext cx="44769" cy="44769"/>
-          </a:xfrm>
-          <a:prstGeom prst="ellipse">
-            <a:avLst/>
-          </a:prstGeom>
-          <a:solidFill>
-            <a:srgbClr val="1F2937"/>
-          </a:solidFill>
-          <a:ln w="12700">
-            <a:solidFill>
-              <a:srgbClr val="1F2937">
-                <a:alpha val="0"/>
-              </a:srgbClr>
-            </a:solidFill>
-            <a:prstDash val="solid"/>
-          </a:ln>
-        </p:spPr>
-      </p:sp>
-      <p:sp>
-        <p:nvSpPr>
-          <p:cNvPr id="16" name="Shape 14"/>
-          <p:cNvSpPr/>
-          <p:nvPr/>
-        </p:nvSpPr>
-        <p:spPr>
-          <a:xfrm>
-            <a:off x="1258726" y="1840468"/>
-            <a:ext cx="49246" cy="10073"/>
-          </a:xfrm>
-          <a:prstGeom prst="rect">
-            <a:avLst/>
-          </a:prstGeom>
-          <a:solidFill>
-            <a:srgbClr val="1F2937"/>
-          </a:solidFill>
-          <a:ln w="12700">
-            <a:solidFill>
-              <a:srgbClr val="1F2937">
-                <a:alpha val="0"/>
-              </a:srgbClr>
-            </a:solidFill>
-            <a:prstDash val="solid"/>
-          </a:ln>
-        </p:spPr>
-      </p:sp>
-      <p:sp>
-        <p:nvSpPr>
-          <p:cNvPr id="17" name="Shape 15"/>
-          <p:cNvSpPr/>
-          <p:nvPr/>
-        </p:nvSpPr>
-        <p:spPr>
-          <a:xfrm>
-            <a:off x="1343788" y="1840468"/>
-            <a:ext cx="49246" cy="10073"/>
-          </a:xfrm>
-          <a:prstGeom prst="rect">
-            <a:avLst/>
-          </a:prstGeom>
-          <a:solidFill>
-            <a:srgbClr val="1F2937"/>
-          </a:solidFill>
-          <a:ln w="12700">
-            <a:solidFill>
-              <a:srgbClr val="1F2937">
-                <a:alpha val="0"/>
-              </a:srgbClr>
-            </a:solidFill>
-            <a:prstDash val="solid"/>
-          </a:ln>
-        </p:spPr>
-      </p:sp>
-      <p:sp>
-        <p:nvSpPr>
-          <p:cNvPr id="18" name="Text 16"/>
+      <p:pic>
+        <p:nvPicPr>
+          <p:cNvPr id="17" name="Image 3" descr="verified icon from tabler-icons (MIT)">    </p:cNvPr>
+          <p:cNvPicPr>
+            <a:picLocks noChangeAspect="1"/>
+          </p:cNvPicPr>
+          <p:nvPr/>
+        </p:nvPicPr>
+        <p:blipFill>
+          <a:blip r:embed="rId7">
+            <a:extLst>
+              <a:ext uri="{96DAC541-7B7A-43D3-8B79-37D633B846F1}">
+                <asvg:svgBlip xmlns:asvg="http://schemas.microsoft.com/office/drawing/2016/SVG/main" r:embed="rId8"/>
+              </a:ext>
+            </a:extLst>
+          </a:blip>
+          <a:stretch>
+            <a:fillRect/>
+          </a:stretch>
+        </p:blipFill>
+        <p:spPr>
+          <a:xfrm>
+            <a:off x="1170432" y="2213580"/>
+            <a:ext cx="327721" cy="327721"/>
+          </a:xfrm>
+          <a:prstGeom prst="rect">
+            <a:avLst/>
+          </a:prstGeom>
+        </p:spPr>
+      </p:pic>
+      <p:sp>
+        <p:nvSpPr>
+          <p:cNvPr id="18" name="Text 12"/>
           <p:cNvSpPr txBox="1"/>
           <p:nvPr/>
         </p:nvSpPr>
         <p:spPr>
           <a:xfrm>
-            <a:off x="1682496" y="1638300"/>
-            <a:ext cx="9272016" cy="426720"/>
+            <a:off x="1699321" y="2164080"/>
+            <a:ext cx="9255191" cy="426720"/>
           </a:xfrm>
           <a:prstGeom prst="rect">
             <a:avLst/>
@@ -2787,7 +2812,7 @@
           <a:bodyPr wrap="square" lIns="0" tIns="25400" rIns="25400" bIns="0" rtlCol="0" anchor="ctr"/>
           <a:lstStyle/>
           <a:p>
-            <a:pPr algn="l" indent="0" marL="0">
+            <a:pPr algn="ctr" indent="0" marL="0">
               <a:lnSpc>
                 <a:spcPct val="120000"/>
               </a:lnSpc>
@@ -2810,18 +2835,18 @@
       </p:sp>
       <p:sp>
         <p:nvSpPr>
-          <p:cNvPr id="19" name="Shape 17"/>
-          <p:cNvSpPr/>
-          <p:nvPr/>
-        </p:nvSpPr>
-        <p:spPr>
-          <a:xfrm>
-            <a:off x="1097280" y="2766060"/>
-            <a:ext cx="457200" cy="457200"/>
+          <p:cNvPr id="19" name="Shape 13"/>
+          <p:cNvSpPr/>
+          <p:nvPr/>
+        </p:nvSpPr>
+        <p:spPr>
+          <a:xfrm>
+            <a:off x="1097280" y="3466308"/>
+            <a:ext cx="474025" cy="474025"/>
           </a:xfrm>
           <a:prstGeom prst="roundRect">
             <a:avLst>
-              <a:gd name="adj" fmla="val 8000"/>
+              <a:gd name="adj" fmla="val 7716"/>
             </a:avLst>
           </a:prstGeom>
           <a:solidFill>
@@ -2835,70 +2860,46 @@
           </a:ln>
         </p:spPr>
       </p:sp>
-      <p:sp>
-        <p:nvSpPr>
-          <p:cNvPr id="20" name="Shape 18"/>
-          <p:cNvSpPr/>
-          <p:nvPr/>
-        </p:nvSpPr>
-        <p:spPr>
-          <a:xfrm rot="10800000">
-            <a:off x="1240819" y="2896168"/>
-            <a:ext cx="170122" cy="188030"/>
-          </a:xfrm>
-          <a:prstGeom prst="pentagon">
-            <a:avLst/>
-          </a:prstGeom>
-          <a:solidFill>
-            <a:srgbClr val="1F2937"/>
-          </a:solidFill>
-          <a:ln w="12700">
-            <a:solidFill>
-              <a:srgbClr val="1F2937">
-                <a:alpha val="0"/>
-              </a:srgbClr>
-            </a:solidFill>
-            <a:prstDash val="solid"/>
-          </a:ln>
-        </p:spPr>
-      </p:sp>
-      <p:sp>
-        <p:nvSpPr>
-          <p:cNvPr id="21" name="Shape 19"/>
-          <p:cNvSpPr/>
-          <p:nvPr/>
-        </p:nvSpPr>
-        <p:spPr>
-          <a:xfrm rot="2100000">
-            <a:off x="1314688" y="2945414"/>
-            <a:ext cx="24623" cy="85061"/>
-          </a:xfrm>
-          <a:prstGeom prst="rect">
-            <a:avLst/>
-          </a:prstGeom>
-          <a:solidFill>
-            <a:srgbClr val="F7F3EF"/>
-          </a:solidFill>
-          <a:ln w="12700">
-            <a:solidFill>
-              <a:srgbClr val="F7F3EF">
-                <a:alpha val="0"/>
-              </a:srgbClr>
-            </a:solidFill>
-            <a:prstDash val="solid"/>
-          </a:ln>
-        </p:spPr>
-      </p:sp>
-      <p:sp>
-        <p:nvSpPr>
-          <p:cNvPr id="22" name="Text 20"/>
+      <p:pic>
+        <p:nvPicPr>
+          <p:cNvPr id="20" name="Image 4" descr="article icon from tabler-icons (MIT)">    </p:cNvPr>
+          <p:cNvPicPr>
+            <a:picLocks noChangeAspect="1"/>
+          </p:cNvPicPr>
+          <p:nvPr/>
+        </p:nvPicPr>
+        <p:blipFill>
+          <a:blip r:embed="rId9">
+            <a:extLst>
+              <a:ext uri="{96DAC541-7B7A-43D3-8B79-37D633B846F1}">
+                <asvg:svgBlip xmlns:asvg="http://schemas.microsoft.com/office/drawing/2016/SVG/main" r:embed="rId10"/>
+              </a:ext>
+            </a:extLst>
+          </a:blip>
+          <a:stretch>
+            <a:fillRect/>
+          </a:stretch>
+        </p:blipFill>
+        <p:spPr>
+          <a:xfrm>
+            <a:off x="1170432" y="3539460"/>
+            <a:ext cx="327721" cy="327721"/>
+          </a:xfrm>
+          <a:prstGeom prst="rect">
+            <a:avLst/>
+          </a:prstGeom>
+        </p:spPr>
+      </p:pic>
+      <p:sp>
+        <p:nvSpPr>
+          <p:cNvPr id="21" name="Text 14"/>
           <p:cNvSpPr txBox="1"/>
           <p:nvPr/>
         </p:nvSpPr>
         <p:spPr>
           <a:xfrm>
-            <a:off x="1682496" y="2651760"/>
-            <a:ext cx="9272016" cy="762000"/>
+            <a:off x="1699321" y="3322320"/>
+            <a:ext cx="9255191" cy="762000"/>
           </a:xfrm>
           <a:prstGeom prst="rect">
             <a:avLst/>
@@ -2907,12 +2908,10 @@
           <a:ln/>
         </p:spPr>
         <p:txBody>
-          <a:bodyPr wrap="square" lIns="0" tIns="25400" rIns="25400" bIns="0" rtlCol="0" anchor="ctr">
-            <a:normAutofit/>
-          </a:bodyPr>
+          <a:bodyPr wrap="square" lIns="0" tIns="25400" rIns="25400" bIns="0" rtlCol="0" anchor="ctr"/>
           <a:lstStyle/>
           <a:p>
-            <a:pPr algn="l" indent="0" marL="0">
+            <a:pPr algn="ctr" indent="0" marL="0">
               <a:lnSpc>
                 <a:spcPct val="120000"/>
               </a:lnSpc>
@@ -2935,18 +2934,18 @@
       </p:sp>
       <p:sp>
         <p:nvSpPr>
-          <p:cNvPr id="23" name="Shape 21"/>
-          <p:cNvSpPr/>
-          <p:nvPr/>
-        </p:nvSpPr>
-        <p:spPr>
-          <a:xfrm>
-            <a:off x="1097280" y="3909060"/>
-            <a:ext cx="457200" cy="457200"/>
+          <p:cNvPr id="22" name="Shape 15"/>
+          <p:cNvSpPr/>
+          <p:nvPr/>
+        </p:nvSpPr>
+        <p:spPr>
+          <a:xfrm>
+            <a:off x="1097280" y="4783044"/>
+            <a:ext cx="474025" cy="474025"/>
           </a:xfrm>
           <a:prstGeom prst="roundRect">
             <a:avLst>
-              <a:gd name="adj" fmla="val 8000"/>
+              <a:gd name="adj" fmla="val 7716"/>
             </a:avLst>
           </a:prstGeom>
           <a:solidFill>
@@ -2960,97 +2959,46 @@
           </a:ln>
         </p:spPr>
       </p:sp>
-      <p:sp>
-        <p:nvSpPr>
-          <p:cNvPr id="24" name="Shape 22"/>
-          <p:cNvSpPr/>
-          <p:nvPr/>
-        </p:nvSpPr>
-        <p:spPr>
-          <a:xfrm>
-            <a:off x="1276634" y="4025737"/>
-            <a:ext cx="71630" cy="71630"/>
-          </a:xfrm>
-          <a:prstGeom prst="diamond">
-            <a:avLst/>
-          </a:prstGeom>
-          <a:solidFill>
-            <a:srgbClr val="1F2937"/>
-          </a:solidFill>
-          <a:ln w="12700">
-            <a:solidFill>
-              <a:srgbClr val="1F2937">
-                <a:alpha val="0"/>
-              </a:srgbClr>
-            </a:solidFill>
-            <a:prstDash val="solid"/>
-          </a:ln>
-        </p:spPr>
-      </p:sp>
-      <p:sp>
-        <p:nvSpPr>
-          <p:cNvPr id="25" name="Shape 23"/>
-          <p:cNvSpPr/>
-          <p:nvPr/>
-        </p:nvSpPr>
-        <p:spPr>
-          <a:xfrm>
-            <a:off x="1225150" y="4126468"/>
-            <a:ext cx="44769" cy="44769"/>
-          </a:xfrm>
-          <a:prstGeom prst="diamond">
-            <a:avLst/>
-          </a:prstGeom>
-          <a:solidFill>
-            <a:srgbClr val="1F2937"/>
-          </a:solidFill>
-          <a:ln w="12700">
-            <a:solidFill>
-              <a:srgbClr val="1F2937">
-                <a:alpha val="0"/>
-              </a:srgbClr>
-            </a:solidFill>
-            <a:prstDash val="solid"/>
-          </a:ln>
-        </p:spPr>
-      </p:sp>
-      <p:sp>
-        <p:nvSpPr>
-          <p:cNvPr id="26" name="Shape 24"/>
-          <p:cNvSpPr/>
-          <p:nvPr/>
-        </p:nvSpPr>
-        <p:spPr>
-          <a:xfrm>
-            <a:off x="1352741" y="4148852"/>
-            <a:ext cx="49246" cy="49246"/>
-          </a:xfrm>
-          <a:prstGeom prst="diamond">
-            <a:avLst/>
-          </a:prstGeom>
-          <a:solidFill>
-            <a:srgbClr val="1F2937"/>
-          </a:solidFill>
-          <a:ln w="12700">
-            <a:solidFill>
-              <a:srgbClr val="1F2937">
-                <a:alpha val="0"/>
-              </a:srgbClr>
-            </a:solidFill>
-            <a:prstDash val="solid"/>
-          </a:ln>
-        </p:spPr>
-      </p:sp>
-      <p:sp>
-        <p:nvSpPr>
-          <p:cNvPr id="27" name="Text 25"/>
+      <p:pic>
+        <p:nvPicPr>
+          <p:cNvPr id="23" name="Image 5" descr="verified icon from tabler-icons (MIT)">    </p:cNvPr>
+          <p:cNvPicPr>
+            <a:picLocks noChangeAspect="1"/>
+          </p:cNvPicPr>
+          <p:nvPr/>
+        </p:nvPicPr>
+        <p:blipFill>
+          <a:blip r:embed="rId11">
+            <a:extLst>
+              <a:ext uri="{96DAC541-7B7A-43D3-8B79-37D633B846F1}">
+                <asvg:svgBlip xmlns:asvg="http://schemas.microsoft.com/office/drawing/2016/SVG/main" r:embed="rId12"/>
+              </a:ext>
+            </a:extLst>
+          </a:blip>
+          <a:stretch>
+            <a:fillRect/>
+          </a:stretch>
+        </p:blipFill>
+        <p:spPr>
+          <a:xfrm>
+            <a:off x="1170432" y="4856196"/>
+            <a:ext cx="327721" cy="327721"/>
+          </a:xfrm>
+          <a:prstGeom prst="rect">
+            <a:avLst/>
+          </a:prstGeom>
+        </p:spPr>
+      </p:pic>
+      <p:sp>
+        <p:nvSpPr>
+          <p:cNvPr id="24" name="Text 16"/>
           <p:cNvSpPr txBox="1"/>
           <p:nvPr/>
         </p:nvSpPr>
         <p:spPr>
           <a:xfrm>
-            <a:off x="1682496" y="3924300"/>
-            <a:ext cx="9272016" cy="426720"/>
+            <a:off x="1699321" y="4806696"/>
+            <a:ext cx="9255191" cy="426720"/>
           </a:xfrm>
           <a:prstGeom prst="rect">
             <a:avLst/>
@@ -3062,7 +3010,7 @@
           <a:bodyPr wrap="square" lIns="0" tIns="25400" rIns="25400" bIns="0" rtlCol="0" anchor="ctr"/>
           <a:lstStyle/>
           <a:p>
-            <a:pPr algn="l" indent="0" marL="0">
+            <a:pPr algn="ctr" indent="0" marL="0">
               <a:lnSpc>
                 <a:spcPct val="120000"/>
               </a:lnSpc>
@@ -3204,8 +3152,8 @@
         </p:nvSpPr>
         <p:spPr>
           <a:xfrm>
-            <a:off x="914400" y="1463040"/>
-            <a:ext cx="10241280" cy="73152"/>
+            <a:off x="822960" y="1536192"/>
+            <a:ext cx="10515600" cy="45720"/>
           </a:xfrm>
           <a:prstGeom prst="rect">
             <a:avLst/>
@@ -3225,7 +3173,142 @@
       </p:sp>
       <p:sp>
         <p:nvSpPr>
-          <p:cNvPr id="6" name="Text 4"/>
+          <p:cNvPr id="6" name="Shape 4"/>
+          <p:cNvSpPr/>
+          <p:nvPr/>
+        </p:nvSpPr>
+        <p:spPr>
+          <a:xfrm>
+            <a:off x="822960" y="5852160"/>
+            <a:ext cx="2011680" cy="45720"/>
+          </a:xfrm>
+          <a:prstGeom prst="rect">
+            <a:avLst/>
+          </a:prstGeom>
+          <a:solidFill>
+            <a:srgbClr val="FCD34D"/>
+          </a:solidFill>
+          <a:ln w="12700">
+            <a:solidFill>
+              <a:srgbClr val="FCD34D">
+                <a:alpha val="0"/>
+              </a:srgbClr>
+            </a:solidFill>
+            <a:prstDash val="solid"/>
+          </a:ln>
+        </p:spPr>
+      </p:sp>
+      <p:sp>
+        <p:nvSpPr>
+          <p:cNvPr id="7" name="Shape 5"/>
+          <p:cNvSpPr/>
+          <p:nvPr/>
+        </p:nvSpPr>
+        <p:spPr>
+          <a:xfrm>
+            <a:off x="822960" y="1737360"/>
+            <a:ext cx="73152" cy="841248"/>
+          </a:xfrm>
+          <a:prstGeom prst="rect">
+            <a:avLst/>
+          </a:prstGeom>
+          <a:solidFill>
+            <a:srgbClr val="B45309"/>
+          </a:solidFill>
+          <a:ln w="12700">
+            <a:solidFill>
+              <a:srgbClr val="B45309">
+                <a:alpha val="0"/>
+              </a:srgbClr>
+            </a:solidFill>
+            <a:prstDash val="solid"/>
+          </a:ln>
+        </p:spPr>
+      </p:sp>
+      <p:sp>
+        <p:nvSpPr>
+          <p:cNvPr id="8" name="Shape 6"/>
+          <p:cNvSpPr/>
+          <p:nvPr/>
+        </p:nvSpPr>
+        <p:spPr>
+          <a:xfrm>
+            <a:off x="822960" y="2779776"/>
+            <a:ext cx="73152" cy="841248"/>
+          </a:xfrm>
+          <a:prstGeom prst="rect">
+            <a:avLst/>
+          </a:prstGeom>
+          <a:solidFill>
+            <a:srgbClr val="FCD34D"/>
+          </a:solidFill>
+          <a:ln w="12700">
+            <a:solidFill>
+              <a:srgbClr val="FCD34D">
+                <a:alpha val="0"/>
+              </a:srgbClr>
+            </a:solidFill>
+            <a:prstDash val="solid"/>
+          </a:ln>
+        </p:spPr>
+      </p:sp>
+      <p:sp>
+        <p:nvSpPr>
+          <p:cNvPr id="9" name="Shape 7"/>
+          <p:cNvSpPr/>
+          <p:nvPr/>
+        </p:nvSpPr>
+        <p:spPr>
+          <a:xfrm>
+            <a:off x="822960" y="3822192"/>
+            <a:ext cx="73152" cy="841248"/>
+          </a:xfrm>
+          <a:prstGeom prst="rect">
+            <a:avLst/>
+          </a:prstGeom>
+          <a:solidFill>
+            <a:srgbClr val="B45309"/>
+          </a:solidFill>
+          <a:ln w="12700">
+            <a:solidFill>
+              <a:srgbClr val="B45309">
+                <a:alpha val="0"/>
+              </a:srgbClr>
+            </a:solidFill>
+            <a:prstDash val="solid"/>
+          </a:ln>
+        </p:spPr>
+      </p:sp>
+      <p:sp>
+        <p:nvSpPr>
+          <p:cNvPr id="10" name="Shape 8"/>
+          <p:cNvSpPr/>
+          <p:nvPr/>
+        </p:nvSpPr>
+        <p:spPr>
+          <a:xfrm>
+            <a:off x="822960" y="4864608"/>
+            <a:ext cx="73152" cy="841248"/>
+          </a:xfrm>
+          <a:prstGeom prst="rect">
+            <a:avLst/>
+          </a:prstGeom>
+          <a:solidFill>
+            <a:srgbClr val="FCD34D"/>
+          </a:solidFill>
+          <a:ln w="12700">
+            <a:solidFill>
+              <a:srgbClr val="FCD34D">
+                <a:alpha val="0"/>
+              </a:srgbClr>
+            </a:solidFill>
+            <a:prstDash val="solid"/>
+          </a:ln>
+        </p:spPr>
+      </p:sp>
+      <p:sp>
+        <p:nvSpPr>
+          <p:cNvPr id="11" name="Text 9"/>
           <p:cNvSpPr txBox="1"/>
           <p:nvPr/>
         </p:nvSpPr>
@@ -3241,9 +3324,7 @@
           <a:ln/>
         </p:spPr>
         <p:txBody>
-          <a:bodyPr wrap="square" lIns="0" tIns="0" rIns="0" bIns="0" rtlCol="0" anchor="ctr">
-            <a:normAutofit/>
-          </a:bodyPr>
+          <a:bodyPr wrap="square" lIns="0" tIns="0" rIns="0" bIns="0" rtlCol="0" anchor="ctr"/>
           <a:lstStyle/>
           <a:p>
             <a:pPr algn="ctr" indent="0" marL="0">
@@ -3269,14 +3350,14 @@
       </p:sp>
       <p:sp>
         <p:nvSpPr>
-          <p:cNvPr id="7" name="Text 5"/>
+          <p:cNvPr id="12" name="Text 10"/>
           <p:cNvSpPr txBox="1"/>
           <p:nvPr/>
         </p:nvSpPr>
         <p:spPr>
           <a:xfrm>
-            <a:off x="987552" y="2849880"/>
-            <a:ext cx="10094976" cy="426720"/>
+            <a:off x="1042416" y="1828800"/>
+            <a:ext cx="10094976" cy="658368"/>
           </a:xfrm>
           <a:prstGeom prst="rect">
             <a:avLst/>
@@ -3288,7 +3369,7 @@
           <a:bodyPr wrap="square" lIns="0" tIns="25400" rIns="25400" bIns="0" rtlCol="0" anchor="ctr"/>
           <a:lstStyle/>
           <a:p>
-            <a:pPr algn="l" indent="0" marL="0">
+            <a:pPr algn="ctr" indent="0" marL="0">
               <a:lnSpc>
                 <a:spcPct val="120000"/>
               </a:lnSpc>
@@ -3303,7 +3384,7 @@
                 <a:ea typeface="Pretendard" pitchFamily="34" charset="-122"/>
                 <a:cs typeface="Pretendard" pitchFamily="34" charset="-120"/>
               </a:rPr>
-              <a:t>Scope</a:t>
+              <a:t>01  Scope</a:t>
             </a:r>
             <a:endParaRPr lang="en-US" sz="2200" dirty="0"/>
           </a:p>
@@ -3311,14 +3392,14 @@
       </p:sp>
       <p:sp>
         <p:nvSpPr>
-          <p:cNvPr id="8" name="Text 6"/>
+          <p:cNvPr id="13" name="Text 11"/>
           <p:cNvSpPr txBox="1"/>
           <p:nvPr/>
         </p:nvSpPr>
         <p:spPr>
           <a:xfrm>
-            <a:off x="987552" y="3276600"/>
-            <a:ext cx="10094976" cy="426720"/>
+            <a:off x="1042416" y="2871216"/>
+            <a:ext cx="10094976" cy="658368"/>
           </a:xfrm>
           <a:prstGeom prst="rect">
             <a:avLst/>
@@ -3330,7 +3411,7 @@
           <a:bodyPr wrap="square" lIns="0" tIns="25400" rIns="25400" bIns="0" rtlCol="0" anchor="ctr"/>
           <a:lstStyle/>
           <a:p>
-            <a:pPr algn="l" indent="0" marL="0">
+            <a:pPr algn="ctr" indent="0" marL="0">
               <a:lnSpc>
                 <a:spcPct val="120000"/>
               </a:lnSpc>
@@ -3345,7 +3426,7 @@
                 <a:ea typeface="Pretendard" pitchFamily="34" charset="-122"/>
                 <a:cs typeface="Pretendard" pitchFamily="34" charset="-120"/>
               </a:rPr>
-              <a:t>Verified Conditions</a:t>
+              <a:t>02  Verified Conditions</a:t>
             </a:r>
             <a:endParaRPr lang="en-US" sz="2200" dirty="0"/>
           </a:p>
@@ -3353,14 +3434,14 @@
       </p:sp>
       <p:sp>
         <p:nvSpPr>
-          <p:cNvPr id="9" name="Text 7"/>
+          <p:cNvPr id="14" name="Text 12"/>
           <p:cNvSpPr txBox="1"/>
           <p:nvPr/>
         </p:nvSpPr>
         <p:spPr>
           <a:xfrm>
-            <a:off x="987552" y="3703320"/>
-            <a:ext cx="10094976" cy="426720"/>
+            <a:off x="1042416" y="3913632"/>
+            <a:ext cx="10094976" cy="658368"/>
           </a:xfrm>
           <a:prstGeom prst="rect">
             <a:avLst/>
@@ -3372,7 +3453,7 @@
           <a:bodyPr wrap="square" lIns="0" tIns="25400" rIns="25400" bIns="0" rtlCol="0" anchor="ctr"/>
           <a:lstStyle/>
           <a:p>
-            <a:pPr algn="l" indent="0" marL="0">
+            <a:pPr algn="ctr" indent="0" marL="0">
               <a:lnSpc>
                 <a:spcPct val="120000"/>
               </a:lnSpc>
@@ -3387,7 +3468,7 @@
                 <a:ea typeface="Pretendard" pitchFamily="34" charset="-122"/>
                 <a:cs typeface="Pretendard" pitchFamily="34" charset="-120"/>
               </a:rPr>
-              <a:t>Generated Evidence</a:t>
+              <a:t>03  Generated Evidence</a:t>
             </a:r>
             <a:endParaRPr lang="en-US" sz="2200" dirty="0"/>
           </a:p>
@@ -3395,14 +3476,14 @@
       </p:sp>
       <p:sp>
         <p:nvSpPr>
-          <p:cNvPr id="10" name="Text 8"/>
+          <p:cNvPr id="15" name="Text 13"/>
           <p:cNvSpPr txBox="1"/>
           <p:nvPr/>
         </p:nvSpPr>
         <p:spPr>
           <a:xfrm>
-            <a:off x="987552" y="4130040"/>
-            <a:ext cx="10094976" cy="426720"/>
+            <a:off x="1042416" y="4956048"/>
+            <a:ext cx="10094976" cy="658368"/>
           </a:xfrm>
           <a:prstGeom prst="rect">
             <a:avLst/>
@@ -3414,7 +3495,7 @@
           <a:bodyPr wrap="square" lIns="0" tIns="25400" rIns="25400" bIns="0" rtlCol="0" anchor="ctr"/>
           <a:lstStyle/>
           <a:p>
-            <a:pPr algn="l" indent="0" marL="0">
+            <a:pPr algn="ctr" indent="0" marL="0">
               <a:lnSpc>
                 <a:spcPct val="120000"/>
               </a:lnSpc>
@@ -3429,7 +3510,7 @@
                 <a:ea typeface="Pretendard" pitchFamily="34" charset="-122"/>
                 <a:cs typeface="Pretendard" pitchFamily="34" charset="-120"/>
               </a:rPr>
-              <a:t>Result</a:t>
+              <a:t>04  Result</a:t>
             </a:r>
             <a:endParaRPr lang="en-US" sz="2200" dirty="0"/>
           </a:p>
@@ -3656,125 +3737,273 @@
           </a:ln>
         </p:spPr>
       </p:sp>
-      <p:sp>
-        <p:nvSpPr>
-          <p:cNvPr id="9" name="Shape 7"/>
-          <p:cNvSpPr/>
-          <p:nvPr/>
-        </p:nvSpPr>
+      <p:pic>
+        <p:nvPicPr>
+          <p:cNvPr id="9" name="Image 0" descr="preencoded.png">    </p:cNvPr>
+          <p:cNvPicPr>
+            <a:picLocks noChangeAspect="1"/>
+          </p:cNvPicPr>
+          <p:nvPr/>
+        </p:nvPicPr>
+        <p:blipFill>
+          <a:blip r:embed="rId1">
+            <a:extLst>
+              <a:ext uri="{96DAC541-7B7A-43D3-8B79-37D633B846F1}">
+                <asvg:svgBlip xmlns:asvg="http://schemas.microsoft.com/office/drawing/2016/SVG/main" r:embed="rId2"/>
+              </a:ext>
+            </a:extLst>
+          </a:blip>
+          <a:stretch>
+            <a:fillRect/>
+          </a:stretch>
+        </p:blipFill>
         <p:spPr>
           <a:xfrm>
             <a:off x="822960" y="1463040"/>
             <a:ext cx="5029200" cy="1920240"/>
           </a:xfrm>
-          <a:prstGeom prst="roundRect">
-            <a:avLst>
-              <a:gd name="adj" fmla="val 2857"/>
-            </a:avLst>
-          </a:prstGeom>
-          <a:solidFill>
-            <a:srgbClr val="FFFBF5"/>
+          <a:prstGeom prst="rect">
+            <a:avLst/>
+          </a:prstGeom>
+        </p:spPr>
+      </p:pic>
+      <p:sp>
+        <p:nvSpPr>
+          <p:cNvPr id="10" name="Shape 7"/>
+          <p:cNvSpPr/>
+          <p:nvPr/>
+        </p:nvSpPr>
+        <p:spPr>
+          <a:xfrm>
+            <a:off x="822960" y="1463040"/>
+            <a:ext cx="5029200" cy="1920240"/>
+          </a:xfrm>
+          <a:prstGeom prst="rect">
+            <a:avLst/>
+          </a:prstGeom>
+          <a:solidFill>
+            <a:srgbClr val="FFFBF5">
+              <a:alpha val="0"/>
+            </a:srgbClr>
           </a:solidFill>
           <a:ln w="12700">
             <a:solidFill>
               <a:srgbClr val="E7D8C9">
-                <a:alpha val="90000"/>
-              </a:srgbClr>
-            </a:solidFill>
-            <a:prstDash val="solid"/>
-          </a:ln>
-        </p:spPr>
-      </p:sp>
-      <p:sp>
-        <p:nvSpPr>
-          <p:cNvPr id="10" name="Shape 8"/>
-          <p:cNvSpPr/>
-          <p:nvPr/>
-        </p:nvSpPr>
+                <a:alpha val="0"/>
+              </a:srgbClr>
+            </a:solidFill>
+            <a:prstDash val="solid"/>
+          </a:ln>
+          <a:effectLst>
+            <a:outerShdw sx="100000" sy="100000" kx="0" ky="0" algn="bl" rotWithShape="0" blurRad="12700" dist="50800" dir="2700000">
+              <a:srgbClr val="000000">
+                <a:alpha val="8000"/>
+              </a:srgbClr>
+            </a:outerShdw>
+          </a:effectLst>
+        </p:spPr>
+      </p:sp>
+      <p:pic>
+        <p:nvPicPr>
+          <p:cNvPr id="11" name="Image 1" descr="preencoded.png">    </p:cNvPr>
+          <p:cNvPicPr>
+            <a:picLocks noChangeAspect="1"/>
+          </p:cNvPicPr>
+          <p:nvPr/>
+        </p:nvPicPr>
+        <p:blipFill>
+          <a:blip r:embed="rId3">
+            <a:extLst>
+              <a:ext uri="{96DAC541-7B7A-43D3-8B79-37D633B846F1}">
+                <asvg:svgBlip xmlns:asvg="http://schemas.microsoft.com/office/drawing/2016/SVG/main" r:embed="rId4"/>
+              </a:ext>
+            </a:extLst>
+          </a:blip>
+          <a:stretch>
+            <a:fillRect/>
+          </a:stretch>
+        </p:blipFill>
         <p:spPr>
           <a:xfrm>
             <a:off x="6309360" y="1463040"/>
             <a:ext cx="5029200" cy="1920240"/>
           </a:xfrm>
-          <a:prstGeom prst="roundRect">
-            <a:avLst>
-              <a:gd name="adj" fmla="val 2857"/>
-            </a:avLst>
-          </a:prstGeom>
-          <a:solidFill>
-            <a:srgbClr val="FFFBF5"/>
+          <a:prstGeom prst="rect">
+            <a:avLst/>
+          </a:prstGeom>
+        </p:spPr>
+      </p:pic>
+      <p:sp>
+        <p:nvSpPr>
+          <p:cNvPr id="12" name="Shape 8"/>
+          <p:cNvSpPr/>
+          <p:nvPr/>
+        </p:nvSpPr>
+        <p:spPr>
+          <a:xfrm>
+            <a:off x="6309360" y="1463040"/>
+            <a:ext cx="5029200" cy="1920240"/>
+          </a:xfrm>
+          <a:prstGeom prst="rect">
+            <a:avLst/>
+          </a:prstGeom>
+          <a:solidFill>
+            <a:srgbClr val="FFFBF5">
+              <a:alpha val="0"/>
+            </a:srgbClr>
           </a:solidFill>
           <a:ln w="12700">
             <a:solidFill>
               <a:srgbClr val="E7D8C9">
-                <a:alpha val="90000"/>
-              </a:srgbClr>
-            </a:solidFill>
-            <a:prstDash val="solid"/>
-          </a:ln>
-        </p:spPr>
-      </p:sp>
-      <p:sp>
-        <p:nvSpPr>
-          <p:cNvPr id="11" name="Shape 9"/>
-          <p:cNvSpPr/>
-          <p:nvPr/>
-        </p:nvSpPr>
+                <a:alpha val="0"/>
+              </a:srgbClr>
+            </a:solidFill>
+            <a:prstDash val="solid"/>
+          </a:ln>
+          <a:effectLst>
+            <a:outerShdw sx="100000" sy="100000" kx="0" ky="0" algn="bl" rotWithShape="0" blurRad="12700" dist="50800" dir="2700000">
+              <a:srgbClr val="000000">
+                <a:alpha val="8000"/>
+              </a:srgbClr>
+            </a:outerShdw>
+          </a:effectLst>
+        </p:spPr>
+      </p:sp>
+      <p:pic>
+        <p:nvPicPr>
+          <p:cNvPr id="13" name="Image 2" descr="preencoded.png">    </p:cNvPr>
+          <p:cNvPicPr>
+            <a:picLocks noChangeAspect="1"/>
+          </p:cNvPicPr>
+          <p:nvPr/>
+        </p:nvPicPr>
+        <p:blipFill>
+          <a:blip r:embed="rId5">
+            <a:extLst>
+              <a:ext uri="{96DAC541-7B7A-43D3-8B79-37D633B846F1}">
+                <asvg:svgBlip xmlns:asvg="http://schemas.microsoft.com/office/drawing/2016/SVG/main" r:embed="rId6"/>
+              </a:ext>
+            </a:extLst>
+          </a:blip>
+          <a:stretch>
+            <a:fillRect/>
+          </a:stretch>
+        </p:blipFill>
         <p:spPr>
           <a:xfrm>
             <a:off x="822960" y="3749040"/>
             <a:ext cx="5029200" cy="1920240"/>
           </a:xfrm>
-          <a:prstGeom prst="roundRect">
-            <a:avLst>
-              <a:gd name="adj" fmla="val 2857"/>
-            </a:avLst>
-          </a:prstGeom>
-          <a:solidFill>
-            <a:srgbClr val="FFFBF5"/>
+          <a:prstGeom prst="rect">
+            <a:avLst/>
+          </a:prstGeom>
+        </p:spPr>
+      </p:pic>
+      <p:sp>
+        <p:nvSpPr>
+          <p:cNvPr id="14" name="Shape 9"/>
+          <p:cNvSpPr/>
+          <p:nvPr/>
+        </p:nvSpPr>
+        <p:spPr>
+          <a:xfrm>
+            <a:off x="822960" y="3749040"/>
+            <a:ext cx="5029200" cy="1920240"/>
+          </a:xfrm>
+          <a:prstGeom prst="rect">
+            <a:avLst/>
+          </a:prstGeom>
+          <a:solidFill>
+            <a:srgbClr val="FFFBF5">
+              <a:alpha val="0"/>
+            </a:srgbClr>
           </a:solidFill>
           <a:ln w="12700">
             <a:solidFill>
               <a:srgbClr val="E7D8C9">
-                <a:alpha val="90000"/>
-              </a:srgbClr>
-            </a:solidFill>
-            <a:prstDash val="solid"/>
-          </a:ln>
-        </p:spPr>
-      </p:sp>
-      <p:sp>
-        <p:nvSpPr>
-          <p:cNvPr id="12" name="Shape 10"/>
-          <p:cNvSpPr/>
-          <p:nvPr/>
-        </p:nvSpPr>
+                <a:alpha val="0"/>
+              </a:srgbClr>
+            </a:solidFill>
+            <a:prstDash val="solid"/>
+          </a:ln>
+          <a:effectLst>
+            <a:outerShdw sx="100000" sy="100000" kx="0" ky="0" algn="bl" rotWithShape="0" blurRad="12700" dist="50800" dir="2700000">
+              <a:srgbClr val="000000">
+                <a:alpha val="8000"/>
+              </a:srgbClr>
+            </a:outerShdw>
+          </a:effectLst>
+        </p:spPr>
+      </p:sp>
+      <p:pic>
+        <p:nvPicPr>
+          <p:cNvPr id="15" name="Image 3" descr="preencoded.png">    </p:cNvPr>
+          <p:cNvPicPr>
+            <a:picLocks noChangeAspect="1"/>
+          </p:cNvPicPr>
+          <p:nvPr/>
+        </p:nvPicPr>
+        <p:blipFill>
+          <a:blip r:embed="rId7">
+            <a:extLst>
+              <a:ext uri="{96DAC541-7B7A-43D3-8B79-37D633B846F1}">
+                <asvg:svgBlip xmlns:asvg="http://schemas.microsoft.com/office/drawing/2016/SVG/main" r:embed="rId8"/>
+              </a:ext>
+            </a:extLst>
+          </a:blip>
+          <a:stretch>
+            <a:fillRect/>
+          </a:stretch>
+        </p:blipFill>
         <p:spPr>
           <a:xfrm>
             <a:off x="6309360" y="3749040"/>
             <a:ext cx="5029200" cy="1920240"/>
           </a:xfrm>
-          <a:prstGeom prst="roundRect">
-            <a:avLst>
-              <a:gd name="adj" fmla="val 2857"/>
-            </a:avLst>
-          </a:prstGeom>
-          <a:solidFill>
-            <a:srgbClr val="FFFBF5"/>
+          <a:prstGeom prst="rect">
+            <a:avLst/>
+          </a:prstGeom>
+        </p:spPr>
+      </p:pic>
+      <p:sp>
+        <p:nvSpPr>
+          <p:cNvPr id="16" name="Shape 10"/>
+          <p:cNvSpPr/>
+          <p:nvPr/>
+        </p:nvSpPr>
+        <p:spPr>
+          <a:xfrm>
+            <a:off x="6309360" y="3749040"/>
+            <a:ext cx="5029200" cy="1920240"/>
+          </a:xfrm>
+          <a:prstGeom prst="rect">
+            <a:avLst/>
+          </a:prstGeom>
+          <a:solidFill>
+            <a:srgbClr val="FFFBF5">
+              <a:alpha val="0"/>
+            </a:srgbClr>
           </a:solidFill>
           <a:ln w="12700">
             <a:solidFill>
               <a:srgbClr val="E7D8C9">
-                <a:alpha val="90000"/>
-              </a:srgbClr>
-            </a:solidFill>
-            <a:prstDash val="solid"/>
-          </a:ln>
-        </p:spPr>
-      </p:sp>
-      <p:sp>
-        <p:nvSpPr>
-          <p:cNvPr id="13" name="Text 11"/>
+                <a:alpha val="0"/>
+              </a:srgbClr>
+            </a:solidFill>
+            <a:prstDash val="solid"/>
+          </a:ln>
+          <a:effectLst>
+            <a:outerShdw sx="100000" sy="100000" kx="0" ky="0" algn="bl" rotWithShape="0" blurRad="12700" dist="50800" dir="2700000">
+              <a:srgbClr val="000000">
+                <a:alpha val="8000"/>
+              </a:srgbClr>
+            </a:outerShdw>
+          </a:effectLst>
+        </p:spPr>
+      </p:sp>
+      <p:sp>
+        <p:nvSpPr>
+          <p:cNvPr id="17" name="Text 11"/>
           <p:cNvSpPr txBox="1"/>
           <p:nvPr/>
         </p:nvSpPr>
@@ -3790,9 +4019,7 @@
           <a:ln/>
         </p:spPr>
         <p:txBody>
-          <a:bodyPr wrap="square" lIns="0" tIns="0" rIns="0" bIns="0" rtlCol="0" anchor="ctr">
-            <a:normAutofit/>
-          </a:bodyPr>
+          <a:bodyPr wrap="square" lIns="0" tIns="0" rIns="0" bIns="0" rtlCol="0" anchor="ctr"/>
           <a:lstStyle/>
           <a:p>
             <a:pPr algn="ctr" indent="0" marL="0">
@@ -3818,7 +4045,7 @@
       </p:sp>
       <p:sp>
         <p:nvSpPr>
-          <p:cNvPr id="14" name="Shape 12"/>
+          <p:cNvPr id="18" name="Shape 12"/>
           <p:cNvSpPr/>
           <p:nvPr/>
         </p:nvSpPr>
@@ -3843,144 +4070,39 @@
           </a:ln>
         </p:spPr>
       </p:sp>
-      <p:sp>
-        <p:nvSpPr>
-          <p:cNvPr id="15" name="Shape 13"/>
-          <p:cNvSpPr/>
-          <p:nvPr/>
-        </p:nvSpPr>
-        <p:spPr>
-          <a:xfrm>
-            <a:off x="1110722" y="2378918"/>
-            <a:ext cx="63203" cy="63203"/>
-          </a:xfrm>
-          <a:prstGeom prst="ellipse">
-            <a:avLst/>
-          </a:prstGeom>
-          <a:solidFill>
-            <a:srgbClr val="1F2937"/>
-          </a:solidFill>
-          <a:ln w="12700">
-            <a:solidFill>
-              <a:srgbClr val="1F2937">
-                <a:alpha val="0"/>
-              </a:srgbClr>
-            </a:solidFill>
-            <a:prstDash val="solid"/>
-          </a:ln>
-        </p:spPr>
-      </p:sp>
-      <p:sp>
-        <p:nvSpPr>
-          <p:cNvPr id="16" name="Shape 14"/>
-          <p:cNvSpPr/>
-          <p:nvPr/>
-        </p:nvSpPr>
-        <p:spPr>
-          <a:xfrm>
-            <a:off x="1230808" y="2378918"/>
-            <a:ext cx="63203" cy="63203"/>
-          </a:xfrm>
-          <a:prstGeom prst="ellipse">
-            <a:avLst/>
-          </a:prstGeom>
-          <a:solidFill>
-            <a:srgbClr val="1F2937"/>
-          </a:solidFill>
-          <a:ln w="12700">
-            <a:solidFill>
-              <a:srgbClr val="1F2937">
-                <a:alpha val="0"/>
-              </a:srgbClr>
-            </a:solidFill>
-            <a:prstDash val="solid"/>
-          </a:ln>
-        </p:spPr>
-      </p:sp>
-      <p:sp>
-        <p:nvSpPr>
-          <p:cNvPr id="17" name="Shape 15"/>
-          <p:cNvSpPr/>
-          <p:nvPr/>
-        </p:nvSpPr>
-        <p:spPr>
-          <a:xfrm>
-            <a:off x="1350894" y="2378918"/>
-            <a:ext cx="63203" cy="63203"/>
-          </a:xfrm>
-          <a:prstGeom prst="ellipse">
-            <a:avLst/>
-          </a:prstGeom>
-          <a:solidFill>
-            <a:srgbClr val="1F2937"/>
-          </a:solidFill>
-          <a:ln w="12700">
-            <a:solidFill>
-              <a:srgbClr val="1F2937">
-                <a:alpha val="0"/>
-              </a:srgbClr>
-            </a:solidFill>
-            <a:prstDash val="solid"/>
-          </a:ln>
-        </p:spPr>
-      </p:sp>
-      <p:sp>
-        <p:nvSpPr>
-          <p:cNvPr id="18" name="Shape 16"/>
-          <p:cNvSpPr/>
-          <p:nvPr/>
-        </p:nvSpPr>
-        <p:spPr>
-          <a:xfrm>
-            <a:off x="1173925" y="2407359"/>
-            <a:ext cx="69524" cy="14221"/>
-          </a:xfrm>
-          <a:prstGeom prst="rect">
-            <a:avLst/>
-          </a:prstGeom>
-          <a:solidFill>
-            <a:srgbClr val="1F2937"/>
-          </a:solidFill>
-          <a:ln w="12700">
-            <a:solidFill>
-              <a:srgbClr val="1F2937">
-                <a:alpha val="0"/>
-              </a:srgbClr>
-            </a:solidFill>
-            <a:prstDash val="solid"/>
-          </a:ln>
-        </p:spPr>
-      </p:sp>
-      <p:sp>
-        <p:nvSpPr>
-          <p:cNvPr id="19" name="Shape 17"/>
-          <p:cNvSpPr/>
-          <p:nvPr/>
-        </p:nvSpPr>
-        <p:spPr>
-          <a:xfrm>
-            <a:off x="1294011" y="2407359"/>
-            <a:ext cx="69524" cy="14221"/>
-          </a:xfrm>
-          <a:prstGeom prst="rect">
-            <a:avLst/>
-          </a:prstGeom>
-          <a:solidFill>
-            <a:srgbClr val="1F2937"/>
-          </a:solidFill>
-          <a:ln w="12700">
-            <a:solidFill>
-              <a:srgbClr val="1F2937">
-                <a:alpha val="0"/>
-              </a:srgbClr>
-            </a:solidFill>
-            <a:prstDash val="solid"/>
-          </a:ln>
-        </p:spPr>
-      </p:sp>
-      <p:sp>
-        <p:nvSpPr>
-          <p:cNvPr id="20" name="Text 18"/>
+      <p:pic>
+        <p:nvPicPr>
+          <p:cNvPr id="19" name="Image 4" descr="server icon from svgrepo (open-license catalog pattern)">    </p:cNvPr>
+          <p:cNvPicPr>
+            <a:picLocks noChangeAspect="1"/>
+          </p:cNvPicPr>
+          <p:nvPr/>
+        </p:nvPicPr>
+        <p:blipFill>
+          <a:blip r:embed="rId9">
+            <a:extLst>
+              <a:ext uri="{96DAC541-7B7A-43D3-8B79-37D633B846F1}">
+                <asvg:svgBlip xmlns:asvg="http://schemas.microsoft.com/office/drawing/2016/SVG/main" r:embed="rId10"/>
+              </a:ext>
+            </a:extLst>
+          </a:blip>
+          <a:stretch>
+            <a:fillRect/>
+          </a:stretch>
+        </p:blipFill>
+        <p:spPr>
+          <a:xfrm>
+            <a:off x="1049274" y="2203704"/>
+            <a:ext cx="438912" cy="438912"/>
+          </a:xfrm>
+          <a:prstGeom prst="rect">
+            <a:avLst/>
+          </a:prstGeom>
+        </p:spPr>
+      </p:pic>
+      <p:sp>
+        <p:nvSpPr>
+          <p:cNvPr id="20" name="Text 13"/>
           <p:cNvSpPr txBox="1"/>
           <p:nvPr/>
         </p:nvSpPr>
@@ -3999,7 +4121,7 @@
           <a:bodyPr wrap="square" lIns="0" tIns="25400" rIns="25400" bIns="0" rtlCol="0" anchor="ctr"/>
           <a:lstStyle/>
           <a:p>
-            <a:pPr algn="l" indent="0" marL="0">
+            <a:pPr algn="ctr" indent="0" marL="0">
               <a:lnSpc>
                 <a:spcPct val="120000"/>
               </a:lnSpc>
@@ -4022,7 +4144,7 @@
       </p:sp>
       <p:sp>
         <p:nvSpPr>
-          <p:cNvPr id="21" name="Shape 19"/>
+          <p:cNvPr id="21" name="Shape 14"/>
           <p:cNvSpPr/>
           <p:nvPr/>
         </p:nvSpPr>
@@ -4047,63 +4169,39 @@
           </a:ln>
         </p:spPr>
       </p:sp>
-      <p:sp>
-        <p:nvSpPr>
-          <p:cNvPr id="22" name="Shape 20"/>
-          <p:cNvSpPr/>
-          <p:nvPr/>
-        </p:nvSpPr>
-        <p:spPr>
-          <a:xfrm rot="10800000">
-            <a:off x="6635044" y="2284113"/>
-            <a:ext cx="240173" cy="265454"/>
-          </a:xfrm>
-          <a:prstGeom prst="pentagon">
-            <a:avLst/>
-          </a:prstGeom>
-          <a:solidFill>
-            <a:srgbClr val="1F2937"/>
-          </a:solidFill>
-          <a:ln w="12700">
-            <a:solidFill>
-              <a:srgbClr val="1F2937">
-                <a:alpha val="0"/>
-              </a:srgbClr>
-            </a:solidFill>
-            <a:prstDash val="solid"/>
-          </a:ln>
-        </p:spPr>
-      </p:sp>
-      <p:sp>
-        <p:nvSpPr>
-          <p:cNvPr id="23" name="Shape 21"/>
-          <p:cNvSpPr/>
-          <p:nvPr/>
-        </p:nvSpPr>
-        <p:spPr>
-          <a:xfrm rot="2100000">
-            <a:off x="6739329" y="2353636"/>
-            <a:ext cx="34762" cy="120086"/>
-          </a:xfrm>
-          <a:prstGeom prst="rect">
-            <a:avLst/>
-          </a:prstGeom>
-          <a:solidFill>
-            <a:srgbClr val="F7F3EF"/>
-          </a:solidFill>
-          <a:ln w="12700">
-            <a:solidFill>
-              <a:srgbClr val="F7F3EF">
-                <a:alpha val="0"/>
-              </a:srgbClr>
-            </a:solidFill>
-            <a:prstDash val="solid"/>
-          </a:ln>
-        </p:spPr>
-      </p:sp>
-      <p:sp>
-        <p:nvSpPr>
-          <p:cNvPr id="24" name="Text 22"/>
+      <p:pic>
+        <p:nvPicPr>
+          <p:cNvPr id="22" name="Image 5" descr="code icon from tabler-icons (MIT)">    </p:cNvPr>
+          <p:cNvPicPr>
+            <a:picLocks noChangeAspect="1"/>
+          </p:cNvPicPr>
+          <p:nvPr/>
+        </p:nvPicPr>
+        <p:blipFill>
+          <a:blip r:embed="rId11">
+            <a:extLst>
+              <a:ext uri="{96DAC541-7B7A-43D3-8B79-37D633B846F1}">
+                <asvg:svgBlip xmlns:asvg="http://schemas.microsoft.com/office/drawing/2016/SVG/main" r:embed="rId12"/>
+              </a:ext>
+            </a:extLst>
+          </a:blip>
+          <a:stretch>
+            <a:fillRect/>
+          </a:stretch>
+        </p:blipFill>
+        <p:spPr>
+          <a:xfrm>
+            <a:off x="6535674" y="2203704"/>
+            <a:ext cx="438912" cy="438912"/>
+          </a:xfrm>
+          <a:prstGeom prst="rect">
+            <a:avLst/>
+          </a:prstGeom>
+        </p:spPr>
+      </p:pic>
+      <p:sp>
+        <p:nvSpPr>
+          <p:cNvPr id="23" name="Text 15"/>
           <p:cNvSpPr txBox="1"/>
           <p:nvPr/>
         </p:nvSpPr>
@@ -4122,7 +4220,7 @@
           <a:bodyPr wrap="square" lIns="0" tIns="25400" rIns="25400" bIns="0" rtlCol="0" anchor="ctr"/>
           <a:lstStyle/>
           <a:p>
-            <a:pPr algn="l" indent="0" marL="0">
+            <a:pPr algn="ctr" indent="0" marL="0">
               <a:lnSpc>
                 <a:spcPct val="120000"/>
               </a:lnSpc>
@@ -4145,7 +4243,7 @@
       </p:sp>
       <p:sp>
         <p:nvSpPr>
-          <p:cNvPr id="25" name="Shape 23"/>
+          <p:cNvPr id="24" name="Shape 16"/>
           <p:cNvSpPr/>
           <p:nvPr/>
         </p:nvSpPr>
@@ -4170,90 +4268,39 @@
           </a:ln>
         </p:spPr>
       </p:sp>
-      <p:sp>
-        <p:nvSpPr>
-          <p:cNvPr id="26" name="Shape 24"/>
-          <p:cNvSpPr/>
-          <p:nvPr/>
-        </p:nvSpPr>
-        <p:spPr>
-          <a:xfrm>
-            <a:off x="1199206" y="4551152"/>
-            <a:ext cx="101125" cy="101125"/>
-          </a:xfrm>
-          <a:prstGeom prst="diamond">
-            <a:avLst/>
-          </a:prstGeom>
-          <a:solidFill>
-            <a:srgbClr val="1F2937"/>
-          </a:solidFill>
-          <a:ln w="12700">
-            <a:solidFill>
-              <a:srgbClr val="1F2937">
-                <a:alpha val="0"/>
-              </a:srgbClr>
-            </a:solidFill>
-            <a:prstDash val="solid"/>
-          </a:ln>
-        </p:spPr>
-      </p:sp>
-      <p:sp>
-        <p:nvSpPr>
-          <p:cNvPr id="27" name="Shape 25"/>
-          <p:cNvSpPr/>
-          <p:nvPr/>
-        </p:nvSpPr>
-        <p:spPr>
-          <a:xfrm>
-            <a:off x="1126523" y="4693359"/>
-            <a:ext cx="63203" cy="63203"/>
-          </a:xfrm>
-          <a:prstGeom prst="diamond">
-            <a:avLst/>
-          </a:prstGeom>
-          <a:solidFill>
-            <a:srgbClr val="1F2937"/>
-          </a:solidFill>
-          <a:ln w="12700">
-            <a:solidFill>
-              <a:srgbClr val="1F2937">
-                <a:alpha val="0"/>
-              </a:srgbClr>
-            </a:solidFill>
-            <a:prstDash val="solid"/>
-          </a:ln>
-        </p:spPr>
-      </p:sp>
-      <p:sp>
-        <p:nvSpPr>
-          <p:cNvPr id="28" name="Shape 26"/>
-          <p:cNvSpPr/>
-          <p:nvPr/>
-        </p:nvSpPr>
-        <p:spPr>
-          <a:xfrm>
-            <a:off x="1306652" y="4724961"/>
-            <a:ext cx="69524" cy="69524"/>
-          </a:xfrm>
-          <a:prstGeom prst="diamond">
-            <a:avLst/>
-          </a:prstGeom>
-          <a:solidFill>
-            <a:srgbClr val="1F2937"/>
-          </a:solidFill>
-          <a:ln w="12700">
-            <a:solidFill>
-              <a:srgbClr val="1F2937">
-                <a:alpha val="0"/>
-              </a:srgbClr>
-            </a:solidFill>
-            <a:prstDash val="solid"/>
-          </a:ln>
-        </p:spPr>
-      </p:sp>
-      <p:sp>
-        <p:nvSpPr>
-          <p:cNvPr id="29" name="Text 27"/>
+      <p:pic>
+        <p:nvPicPr>
+          <p:cNvPr id="25" name="Image 6" descr="spark icon from tabler-icons (MIT)">    </p:cNvPr>
+          <p:cNvPicPr>
+            <a:picLocks noChangeAspect="1"/>
+          </p:cNvPicPr>
+          <p:nvPr/>
+        </p:nvPicPr>
+        <p:blipFill>
+          <a:blip r:embed="rId13">
+            <a:extLst>
+              <a:ext uri="{96DAC541-7B7A-43D3-8B79-37D633B846F1}">
+                <asvg:svgBlip xmlns:asvg="http://schemas.microsoft.com/office/drawing/2016/SVG/main" r:embed="rId14"/>
+              </a:ext>
+            </a:extLst>
+          </a:blip>
+          <a:stretch>
+            <a:fillRect/>
+          </a:stretch>
+        </p:blipFill>
+        <p:spPr>
+          <a:xfrm>
+            <a:off x="1049274" y="4489704"/>
+            <a:ext cx="438912" cy="438912"/>
+          </a:xfrm>
+          <a:prstGeom prst="rect">
+            <a:avLst/>
+          </a:prstGeom>
+        </p:spPr>
+      </p:pic>
+      <p:sp>
+        <p:nvSpPr>
+          <p:cNvPr id="26" name="Text 17"/>
           <p:cNvSpPr txBox="1"/>
           <p:nvPr/>
         </p:nvSpPr>
@@ -4272,7 +4319,7 @@
           <a:bodyPr wrap="square" lIns="0" tIns="25400" rIns="25400" bIns="0" rtlCol="0" anchor="ctr"/>
           <a:lstStyle/>
           <a:p>
-            <a:pPr algn="l" indent="0" marL="0">
+            <a:pPr algn="ctr" indent="0" marL="0">
               <a:lnSpc>
                 <a:spcPct val="120000"/>
               </a:lnSpc>
@@ -4295,7 +4342,7 @@
       </p:sp>
       <p:sp>
         <p:nvSpPr>
-          <p:cNvPr id="30" name="Shape 28"/>
+          <p:cNvPr id="27" name="Shape 18"/>
           <p:cNvSpPr/>
           <p:nvPr/>
         </p:nvSpPr>
@@ -4320,90 +4367,39 @@
           </a:ln>
         </p:spPr>
       </p:sp>
-      <p:sp>
-        <p:nvSpPr>
-          <p:cNvPr id="31" name="Shape 29"/>
-          <p:cNvSpPr/>
-          <p:nvPr/>
-        </p:nvSpPr>
-        <p:spPr>
-          <a:xfrm>
-            <a:off x="6647684" y="4687039"/>
-            <a:ext cx="41082" cy="110606"/>
-          </a:xfrm>
-          <a:prstGeom prst="rect">
-            <a:avLst/>
-          </a:prstGeom>
-          <a:solidFill>
-            <a:srgbClr val="1F2937"/>
-          </a:solidFill>
-          <a:ln w="12700">
-            <a:solidFill>
-              <a:srgbClr val="1F2937">
-                <a:alpha val="0"/>
-              </a:srgbClr>
-            </a:solidFill>
-            <a:prstDash val="solid"/>
-          </a:ln>
-        </p:spPr>
-      </p:sp>
-      <p:sp>
-        <p:nvSpPr>
-          <p:cNvPr id="32" name="Shape 30"/>
-          <p:cNvSpPr/>
-          <p:nvPr/>
-        </p:nvSpPr>
-        <p:spPr>
-          <a:xfrm>
-            <a:off x="6726689" y="4601714"/>
-            <a:ext cx="41082" cy="195930"/>
-          </a:xfrm>
-          <a:prstGeom prst="rect">
-            <a:avLst/>
-          </a:prstGeom>
-          <a:solidFill>
-            <a:srgbClr val="1F2937"/>
-          </a:solidFill>
-          <a:ln w="12700">
-            <a:solidFill>
-              <a:srgbClr val="1F2937">
-                <a:alpha val="0"/>
-              </a:srgbClr>
-            </a:solidFill>
-            <a:prstDash val="solid"/>
-          </a:ln>
-        </p:spPr>
-      </p:sp>
-      <p:sp>
-        <p:nvSpPr>
-          <p:cNvPr id="33" name="Shape 31"/>
-          <p:cNvSpPr/>
-          <p:nvPr/>
-        </p:nvSpPr>
-        <p:spPr>
-          <a:xfrm>
-            <a:off x="6805693" y="4645957"/>
-            <a:ext cx="41082" cy="151688"/>
-          </a:xfrm>
-          <a:prstGeom prst="rect">
-            <a:avLst/>
-          </a:prstGeom>
-          <a:solidFill>
-            <a:srgbClr val="1F2937"/>
-          </a:solidFill>
-          <a:ln w="12700">
-            <a:solidFill>
-              <a:srgbClr val="1F2937">
-                <a:alpha val="0"/>
-              </a:srgbClr>
-            </a:solidFill>
-            <a:prstDash val="solid"/>
-          </a:ln>
-        </p:spPr>
-      </p:sp>
-      <p:sp>
-        <p:nvSpPr>
-          <p:cNvPr id="34" name="Text 32"/>
+      <p:pic>
+        <p:nvPicPr>
+          <p:cNvPr id="28" name="Image 7" descr="chart icon from tabler-icons (MIT)">    </p:cNvPr>
+          <p:cNvPicPr>
+            <a:picLocks noChangeAspect="1"/>
+          </p:cNvPicPr>
+          <p:nvPr/>
+        </p:nvPicPr>
+        <p:blipFill>
+          <a:blip r:embed="rId15">
+            <a:extLst>
+              <a:ext uri="{96DAC541-7B7A-43D3-8B79-37D633B846F1}">
+                <asvg:svgBlip xmlns:asvg="http://schemas.microsoft.com/office/drawing/2016/SVG/main" r:embed="rId16"/>
+              </a:ext>
+            </a:extLst>
+          </a:blip>
+          <a:stretch>
+            <a:fillRect/>
+          </a:stretch>
+        </p:blipFill>
+        <p:spPr>
+          <a:xfrm>
+            <a:off x="6535674" y="4489704"/>
+            <a:ext cx="438912" cy="438912"/>
+          </a:xfrm>
+          <a:prstGeom prst="rect">
+            <a:avLst/>
+          </a:prstGeom>
+        </p:spPr>
+      </p:pic>
+      <p:sp>
+        <p:nvSpPr>
+          <p:cNvPr id="29" name="Text 19"/>
           <p:cNvSpPr txBox="1"/>
           <p:nvPr/>
         </p:nvSpPr>
@@ -4422,7 +4418,7 @@
           <a:bodyPr wrap="square" lIns="0" tIns="25400" rIns="25400" bIns="0" rtlCol="0" anchor="ctr"/>
           <a:lstStyle/>
           <a:p>
-            <a:pPr algn="l" indent="0" marL="0">
+            <a:pPr algn="ctr" indent="0" marL="0">
               <a:lnSpc>
                 <a:spcPct val="120000"/>
               </a:lnSpc>
@@ -4664,125 +4660,273 @@
           </a:ln>
         </p:spPr>
       </p:sp>
-      <p:sp>
-        <p:nvSpPr>
-          <p:cNvPr id="9" name="Shape 7"/>
-          <p:cNvSpPr/>
-          <p:nvPr/>
-        </p:nvSpPr>
+      <p:pic>
+        <p:nvPicPr>
+          <p:cNvPr id="9" name="Image 0" descr="preencoded.png">    </p:cNvPr>
+          <p:cNvPicPr>
+            <a:picLocks noChangeAspect="1"/>
+          </p:cNvPicPr>
+          <p:nvPr/>
+        </p:nvPicPr>
+        <p:blipFill>
+          <a:blip r:embed="rId1">
+            <a:extLst>
+              <a:ext uri="{96DAC541-7B7A-43D3-8B79-37D633B846F1}">
+                <asvg:svgBlip xmlns:asvg="http://schemas.microsoft.com/office/drawing/2016/SVG/main" r:embed="rId2"/>
+              </a:ext>
+            </a:extLst>
+          </a:blip>
+          <a:stretch>
+            <a:fillRect/>
+          </a:stretch>
+        </p:blipFill>
         <p:spPr>
           <a:xfrm>
             <a:off x="822960" y="1463040"/>
             <a:ext cx="5029200" cy="1920240"/>
           </a:xfrm>
-          <a:prstGeom prst="roundRect">
-            <a:avLst>
-              <a:gd name="adj" fmla="val 2857"/>
-            </a:avLst>
-          </a:prstGeom>
-          <a:solidFill>
-            <a:srgbClr val="FFFBF5"/>
+          <a:prstGeom prst="rect">
+            <a:avLst/>
+          </a:prstGeom>
+        </p:spPr>
+      </p:pic>
+      <p:sp>
+        <p:nvSpPr>
+          <p:cNvPr id="10" name="Shape 7"/>
+          <p:cNvSpPr/>
+          <p:nvPr/>
+        </p:nvSpPr>
+        <p:spPr>
+          <a:xfrm>
+            <a:off x="822960" y="1463040"/>
+            <a:ext cx="5029200" cy="1920240"/>
+          </a:xfrm>
+          <a:prstGeom prst="rect">
+            <a:avLst/>
+          </a:prstGeom>
+          <a:solidFill>
+            <a:srgbClr val="FFFBF5">
+              <a:alpha val="0"/>
+            </a:srgbClr>
           </a:solidFill>
           <a:ln w="12700">
             <a:solidFill>
               <a:srgbClr val="E7D8C9">
-                <a:alpha val="90000"/>
-              </a:srgbClr>
-            </a:solidFill>
-            <a:prstDash val="solid"/>
-          </a:ln>
-        </p:spPr>
-      </p:sp>
-      <p:sp>
-        <p:nvSpPr>
-          <p:cNvPr id="10" name="Shape 8"/>
-          <p:cNvSpPr/>
-          <p:nvPr/>
-        </p:nvSpPr>
+                <a:alpha val="0"/>
+              </a:srgbClr>
+            </a:solidFill>
+            <a:prstDash val="solid"/>
+          </a:ln>
+          <a:effectLst>
+            <a:outerShdw sx="100000" sy="100000" kx="0" ky="0" algn="bl" rotWithShape="0" blurRad="12700" dist="50800" dir="2700000">
+              <a:srgbClr val="000000">
+                <a:alpha val="8000"/>
+              </a:srgbClr>
+            </a:outerShdw>
+          </a:effectLst>
+        </p:spPr>
+      </p:sp>
+      <p:pic>
+        <p:nvPicPr>
+          <p:cNvPr id="11" name="Image 1" descr="preencoded.png">    </p:cNvPr>
+          <p:cNvPicPr>
+            <a:picLocks noChangeAspect="1"/>
+          </p:cNvPicPr>
+          <p:nvPr/>
+        </p:nvPicPr>
+        <p:blipFill>
+          <a:blip r:embed="rId3">
+            <a:extLst>
+              <a:ext uri="{96DAC541-7B7A-43D3-8B79-37D633B846F1}">
+                <asvg:svgBlip xmlns:asvg="http://schemas.microsoft.com/office/drawing/2016/SVG/main" r:embed="rId4"/>
+              </a:ext>
+            </a:extLst>
+          </a:blip>
+          <a:stretch>
+            <a:fillRect/>
+          </a:stretch>
+        </p:blipFill>
         <p:spPr>
           <a:xfrm>
             <a:off x="6309360" y="1463040"/>
             <a:ext cx="5029200" cy="1920240"/>
           </a:xfrm>
-          <a:prstGeom prst="roundRect">
-            <a:avLst>
-              <a:gd name="adj" fmla="val 2857"/>
-            </a:avLst>
-          </a:prstGeom>
-          <a:solidFill>
-            <a:srgbClr val="FFFBF5"/>
+          <a:prstGeom prst="rect">
+            <a:avLst/>
+          </a:prstGeom>
+        </p:spPr>
+      </p:pic>
+      <p:sp>
+        <p:nvSpPr>
+          <p:cNvPr id="12" name="Shape 8"/>
+          <p:cNvSpPr/>
+          <p:nvPr/>
+        </p:nvSpPr>
+        <p:spPr>
+          <a:xfrm>
+            <a:off x="6309360" y="1463040"/>
+            <a:ext cx="5029200" cy="1920240"/>
+          </a:xfrm>
+          <a:prstGeom prst="rect">
+            <a:avLst/>
+          </a:prstGeom>
+          <a:solidFill>
+            <a:srgbClr val="FFFBF5">
+              <a:alpha val="0"/>
+            </a:srgbClr>
           </a:solidFill>
           <a:ln w="12700">
             <a:solidFill>
               <a:srgbClr val="E7D8C9">
-                <a:alpha val="90000"/>
-              </a:srgbClr>
-            </a:solidFill>
-            <a:prstDash val="solid"/>
-          </a:ln>
-        </p:spPr>
-      </p:sp>
-      <p:sp>
-        <p:nvSpPr>
-          <p:cNvPr id="11" name="Shape 9"/>
-          <p:cNvSpPr/>
-          <p:nvPr/>
-        </p:nvSpPr>
+                <a:alpha val="0"/>
+              </a:srgbClr>
+            </a:solidFill>
+            <a:prstDash val="solid"/>
+          </a:ln>
+          <a:effectLst>
+            <a:outerShdw sx="100000" sy="100000" kx="0" ky="0" algn="bl" rotWithShape="0" blurRad="12700" dist="50800" dir="2700000">
+              <a:srgbClr val="000000">
+                <a:alpha val="8000"/>
+              </a:srgbClr>
+            </a:outerShdw>
+          </a:effectLst>
+        </p:spPr>
+      </p:sp>
+      <p:pic>
+        <p:nvPicPr>
+          <p:cNvPr id="13" name="Image 2" descr="preencoded.png">    </p:cNvPr>
+          <p:cNvPicPr>
+            <a:picLocks noChangeAspect="1"/>
+          </p:cNvPicPr>
+          <p:nvPr/>
+        </p:nvPicPr>
+        <p:blipFill>
+          <a:blip r:embed="rId5">
+            <a:extLst>
+              <a:ext uri="{96DAC541-7B7A-43D3-8B79-37D633B846F1}">
+                <asvg:svgBlip xmlns:asvg="http://schemas.microsoft.com/office/drawing/2016/SVG/main" r:embed="rId6"/>
+              </a:ext>
+            </a:extLst>
+          </a:blip>
+          <a:stretch>
+            <a:fillRect/>
+          </a:stretch>
+        </p:blipFill>
         <p:spPr>
           <a:xfrm>
             <a:off x="822960" y="3749040"/>
             <a:ext cx="5029200" cy="1920240"/>
           </a:xfrm>
-          <a:prstGeom prst="roundRect">
-            <a:avLst>
-              <a:gd name="adj" fmla="val 2857"/>
-            </a:avLst>
-          </a:prstGeom>
-          <a:solidFill>
-            <a:srgbClr val="FFFBF5"/>
+          <a:prstGeom prst="rect">
+            <a:avLst/>
+          </a:prstGeom>
+        </p:spPr>
+      </p:pic>
+      <p:sp>
+        <p:nvSpPr>
+          <p:cNvPr id="14" name="Shape 9"/>
+          <p:cNvSpPr/>
+          <p:nvPr/>
+        </p:nvSpPr>
+        <p:spPr>
+          <a:xfrm>
+            <a:off x="822960" y="3749040"/>
+            <a:ext cx="5029200" cy="1920240"/>
+          </a:xfrm>
+          <a:prstGeom prst="rect">
+            <a:avLst/>
+          </a:prstGeom>
+          <a:solidFill>
+            <a:srgbClr val="FFFBF5">
+              <a:alpha val="0"/>
+            </a:srgbClr>
           </a:solidFill>
           <a:ln w="12700">
             <a:solidFill>
               <a:srgbClr val="E7D8C9">
-                <a:alpha val="90000"/>
-              </a:srgbClr>
-            </a:solidFill>
-            <a:prstDash val="solid"/>
-          </a:ln>
-        </p:spPr>
-      </p:sp>
-      <p:sp>
-        <p:nvSpPr>
-          <p:cNvPr id="12" name="Shape 10"/>
-          <p:cNvSpPr/>
-          <p:nvPr/>
-        </p:nvSpPr>
+                <a:alpha val="0"/>
+              </a:srgbClr>
+            </a:solidFill>
+            <a:prstDash val="solid"/>
+          </a:ln>
+          <a:effectLst>
+            <a:outerShdw sx="100000" sy="100000" kx="0" ky="0" algn="bl" rotWithShape="0" blurRad="12700" dist="50800" dir="2700000">
+              <a:srgbClr val="000000">
+                <a:alpha val="8000"/>
+              </a:srgbClr>
+            </a:outerShdw>
+          </a:effectLst>
+        </p:spPr>
+      </p:sp>
+      <p:pic>
+        <p:nvPicPr>
+          <p:cNvPr id="15" name="Image 3" descr="preencoded.png">    </p:cNvPr>
+          <p:cNvPicPr>
+            <a:picLocks noChangeAspect="1"/>
+          </p:cNvPicPr>
+          <p:nvPr/>
+        </p:nvPicPr>
+        <p:blipFill>
+          <a:blip r:embed="rId7">
+            <a:extLst>
+              <a:ext uri="{96DAC541-7B7A-43D3-8B79-37D633B846F1}">
+                <asvg:svgBlip xmlns:asvg="http://schemas.microsoft.com/office/drawing/2016/SVG/main" r:embed="rId8"/>
+              </a:ext>
+            </a:extLst>
+          </a:blip>
+          <a:stretch>
+            <a:fillRect/>
+          </a:stretch>
+        </p:blipFill>
         <p:spPr>
           <a:xfrm>
             <a:off x="6309360" y="3749040"/>
             <a:ext cx="5029200" cy="1920240"/>
           </a:xfrm>
-          <a:prstGeom prst="roundRect">
-            <a:avLst>
-              <a:gd name="adj" fmla="val 2857"/>
-            </a:avLst>
-          </a:prstGeom>
-          <a:solidFill>
-            <a:srgbClr val="FFFBF5"/>
+          <a:prstGeom prst="rect">
+            <a:avLst/>
+          </a:prstGeom>
+        </p:spPr>
+      </p:pic>
+      <p:sp>
+        <p:nvSpPr>
+          <p:cNvPr id="16" name="Shape 10"/>
+          <p:cNvSpPr/>
+          <p:nvPr/>
+        </p:nvSpPr>
+        <p:spPr>
+          <a:xfrm>
+            <a:off x="6309360" y="3749040"/>
+            <a:ext cx="5029200" cy="1920240"/>
+          </a:xfrm>
+          <a:prstGeom prst="rect">
+            <a:avLst/>
+          </a:prstGeom>
+          <a:solidFill>
+            <a:srgbClr val="FFFBF5">
+              <a:alpha val="0"/>
+            </a:srgbClr>
           </a:solidFill>
           <a:ln w="12700">
             <a:solidFill>
               <a:srgbClr val="E7D8C9">
-                <a:alpha val="90000"/>
-              </a:srgbClr>
-            </a:solidFill>
-            <a:prstDash val="solid"/>
-          </a:ln>
-        </p:spPr>
-      </p:sp>
-      <p:sp>
-        <p:nvSpPr>
-          <p:cNvPr id="13" name="Text 11"/>
+                <a:alpha val="0"/>
+              </a:srgbClr>
+            </a:solidFill>
+            <a:prstDash val="solid"/>
+          </a:ln>
+          <a:effectLst>
+            <a:outerShdw sx="100000" sy="100000" kx="0" ky="0" algn="bl" rotWithShape="0" blurRad="12700" dist="50800" dir="2700000">
+              <a:srgbClr val="000000">
+                <a:alpha val="8000"/>
+              </a:srgbClr>
+            </a:outerShdw>
+          </a:effectLst>
+        </p:spPr>
+      </p:sp>
+      <p:sp>
+        <p:nvSpPr>
+          <p:cNvPr id="17" name="Text 11"/>
           <p:cNvSpPr txBox="1"/>
           <p:nvPr/>
         </p:nvSpPr>
@@ -4798,9 +4942,7 @@
           <a:ln/>
         </p:spPr>
         <p:txBody>
-          <a:bodyPr wrap="square" lIns="0" tIns="0" rIns="0" bIns="0" rtlCol="0" anchor="ctr">
-            <a:normAutofit/>
-          </a:bodyPr>
+          <a:bodyPr wrap="square" lIns="0" tIns="0" rIns="0" bIns="0" rtlCol="0" anchor="ctr"/>
           <a:lstStyle/>
           <a:p>
             <a:pPr algn="ctr" indent="0" marL="0">
@@ -4826,7 +4968,7 @@
       </p:sp>
       <p:sp>
         <p:nvSpPr>
-          <p:cNvPr id="14" name="Shape 12"/>
+          <p:cNvPr id="18" name="Shape 12"/>
           <p:cNvSpPr/>
           <p:nvPr/>
         </p:nvSpPr>
@@ -4851,144 +4993,39 @@
           </a:ln>
         </p:spPr>
       </p:sp>
-      <p:sp>
-        <p:nvSpPr>
-          <p:cNvPr id="15" name="Shape 13"/>
-          <p:cNvSpPr/>
-          <p:nvPr/>
-        </p:nvSpPr>
-        <p:spPr>
-          <a:xfrm>
-            <a:off x="1110722" y="2378918"/>
-            <a:ext cx="63203" cy="63203"/>
-          </a:xfrm>
-          <a:prstGeom prst="ellipse">
-            <a:avLst/>
-          </a:prstGeom>
-          <a:solidFill>
-            <a:srgbClr val="1F2937"/>
-          </a:solidFill>
-          <a:ln w="12700">
-            <a:solidFill>
-              <a:srgbClr val="1F2937">
-                <a:alpha val="0"/>
-              </a:srgbClr>
-            </a:solidFill>
-            <a:prstDash val="solid"/>
-          </a:ln>
-        </p:spPr>
-      </p:sp>
-      <p:sp>
-        <p:nvSpPr>
-          <p:cNvPr id="16" name="Shape 14"/>
-          <p:cNvSpPr/>
-          <p:nvPr/>
-        </p:nvSpPr>
-        <p:spPr>
-          <a:xfrm>
-            <a:off x="1230808" y="2378918"/>
-            <a:ext cx="63203" cy="63203"/>
-          </a:xfrm>
-          <a:prstGeom prst="ellipse">
-            <a:avLst/>
-          </a:prstGeom>
-          <a:solidFill>
-            <a:srgbClr val="1F2937"/>
-          </a:solidFill>
-          <a:ln w="12700">
-            <a:solidFill>
-              <a:srgbClr val="1F2937">
-                <a:alpha val="0"/>
-              </a:srgbClr>
-            </a:solidFill>
-            <a:prstDash val="solid"/>
-          </a:ln>
-        </p:spPr>
-      </p:sp>
-      <p:sp>
-        <p:nvSpPr>
-          <p:cNvPr id="17" name="Shape 15"/>
-          <p:cNvSpPr/>
-          <p:nvPr/>
-        </p:nvSpPr>
-        <p:spPr>
-          <a:xfrm>
-            <a:off x="1350894" y="2378918"/>
-            <a:ext cx="63203" cy="63203"/>
-          </a:xfrm>
-          <a:prstGeom prst="ellipse">
-            <a:avLst/>
-          </a:prstGeom>
-          <a:solidFill>
-            <a:srgbClr val="1F2937"/>
-          </a:solidFill>
-          <a:ln w="12700">
-            <a:solidFill>
-              <a:srgbClr val="1F2937">
-                <a:alpha val="0"/>
-              </a:srgbClr>
-            </a:solidFill>
-            <a:prstDash val="solid"/>
-          </a:ln>
-        </p:spPr>
-      </p:sp>
-      <p:sp>
-        <p:nvSpPr>
-          <p:cNvPr id="18" name="Shape 16"/>
-          <p:cNvSpPr/>
-          <p:nvPr/>
-        </p:nvSpPr>
-        <p:spPr>
-          <a:xfrm>
-            <a:off x="1173925" y="2407359"/>
-            <a:ext cx="69524" cy="14221"/>
-          </a:xfrm>
-          <a:prstGeom prst="rect">
-            <a:avLst/>
-          </a:prstGeom>
-          <a:solidFill>
-            <a:srgbClr val="1F2937"/>
-          </a:solidFill>
-          <a:ln w="12700">
-            <a:solidFill>
-              <a:srgbClr val="1F2937">
-                <a:alpha val="0"/>
-              </a:srgbClr>
-            </a:solidFill>
-            <a:prstDash val="solid"/>
-          </a:ln>
-        </p:spPr>
-      </p:sp>
-      <p:sp>
-        <p:nvSpPr>
-          <p:cNvPr id="19" name="Shape 17"/>
-          <p:cNvSpPr/>
-          <p:nvPr/>
-        </p:nvSpPr>
-        <p:spPr>
-          <a:xfrm>
-            <a:off x="1294011" y="2407359"/>
-            <a:ext cx="69524" cy="14221"/>
-          </a:xfrm>
-          <a:prstGeom prst="rect">
-            <a:avLst/>
-          </a:prstGeom>
-          <a:solidFill>
-            <a:srgbClr val="1F2937"/>
-          </a:solidFill>
-          <a:ln w="12700">
-            <a:solidFill>
-              <a:srgbClr val="1F2937">
-                <a:alpha val="0"/>
-              </a:srgbClr>
-            </a:solidFill>
-            <a:prstDash val="solid"/>
-          </a:ln>
-        </p:spPr>
-      </p:sp>
-      <p:sp>
-        <p:nvSpPr>
-          <p:cNvPr id="20" name="Text 18"/>
+      <p:pic>
+        <p:nvPicPr>
+          <p:cNvPr id="19" name="Image 4" descr="chart icon from tabler-icons (MIT)">    </p:cNvPr>
+          <p:cNvPicPr>
+            <a:picLocks noChangeAspect="1"/>
+          </p:cNvPicPr>
+          <p:nvPr/>
+        </p:nvPicPr>
+        <p:blipFill>
+          <a:blip r:embed="rId9">
+            <a:extLst>
+              <a:ext uri="{96DAC541-7B7A-43D3-8B79-37D633B846F1}">
+                <asvg:svgBlip xmlns:asvg="http://schemas.microsoft.com/office/drawing/2016/SVG/main" r:embed="rId10"/>
+              </a:ext>
+            </a:extLst>
+          </a:blip>
+          <a:stretch>
+            <a:fillRect/>
+          </a:stretch>
+        </p:blipFill>
+        <p:spPr>
+          <a:xfrm>
+            <a:off x="1049274" y="2203704"/>
+            <a:ext cx="438912" cy="438912"/>
+          </a:xfrm>
+          <a:prstGeom prst="rect">
+            <a:avLst/>
+          </a:prstGeom>
+        </p:spPr>
+      </p:pic>
+      <p:sp>
+        <p:nvSpPr>
+          <p:cNvPr id="20" name="Text 13"/>
           <p:cNvSpPr txBox="1"/>
           <p:nvPr/>
         </p:nvSpPr>
@@ -5007,7 +5044,7 @@
           <a:bodyPr wrap="square" lIns="0" tIns="25400" rIns="25400" bIns="0" rtlCol="0" anchor="ctr"/>
           <a:lstStyle/>
           <a:p>
-            <a:pPr algn="l" indent="0" marL="0">
+            <a:pPr algn="ctr" indent="0" marL="0">
               <a:lnSpc>
                 <a:spcPct val="120000"/>
               </a:lnSpc>
@@ -5030,7 +5067,7 @@
       </p:sp>
       <p:sp>
         <p:nvSpPr>
-          <p:cNvPr id="21" name="Shape 19"/>
+          <p:cNvPr id="21" name="Shape 14"/>
           <p:cNvSpPr/>
           <p:nvPr/>
         </p:nvSpPr>
@@ -5055,70 +5092,46 @@
           </a:ln>
         </p:spPr>
       </p:sp>
-      <p:sp>
-        <p:nvSpPr>
-          <p:cNvPr id="22" name="Shape 20"/>
-          <p:cNvSpPr/>
-          <p:nvPr/>
-        </p:nvSpPr>
-        <p:spPr>
-          <a:xfrm rot="10800000">
-            <a:off x="6635044" y="2284113"/>
-            <a:ext cx="240173" cy="265454"/>
-          </a:xfrm>
-          <a:prstGeom prst="pentagon">
-            <a:avLst/>
-          </a:prstGeom>
-          <a:solidFill>
-            <a:srgbClr val="1F2937"/>
-          </a:solidFill>
-          <a:ln w="12700">
-            <a:solidFill>
-              <a:srgbClr val="1F2937">
-                <a:alpha val="0"/>
-              </a:srgbClr>
-            </a:solidFill>
-            <a:prstDash val="solid"/>
-          </a:ln>
-        </p:spPr>
-      </p:sp>
-      <p:sp>
-        <p:nvSpPr>
-          <p:cNvPr id="23" name="Shape 21"/>
-          <p:cNvSpPr/>
-          <p:nvPr/>
-        </p:nvSpPr>
-        <p:spPr>
-          <a:xfrm rot="2100000">
-            <a:off x="6739329" y="2353636"/>
-            <a:ext cx="34762" cy="120086"/>
-          </a:xfrm>
-          <a:prstGeom prst="rect">
-            <a:avLst/>
-          </a:prstGeom>
-          <a:solidFill>
-            <a:srgbClr val="F7F3EF"/>
-          </a:solidFill>
-          <a:ln w="12700">
-            <a:solidFill>
-              <a:srgbClr val="F7F3EF">
-                <a:alpha val="0"/>
-              </a:srgbClr>
-            </a:solidFill>
-            <a:prstDash val="solid"/>
-          </a:ln>
-        </p:spPr>
-      </p:sp>
-      <p:sp>
-        <p:nvSpPr>
-          <p:cNvPr id="24" name="Text 22"/>
+      <p:pic>
+        <p:nvPicPr>
+          <p:cNvPr id="22" name="Image 5" descr="flow icon from tabler-icons (MIT)">    </p:cNvPr>
+          <p:cNvPicPr>
+            <a:picLocks noChangeAspect="1"/>
+          </p:cNvPicPr>
+          <p:nvPr/>
+        </p:nvPicPr>
+        <p:blipFill>
+          <a:blip r:embed="rId11">
+            <a:extLst>
+              <a:ext uri="{96DAC541-7B7A-43D3-8B79-37D633B846F1}">
+                <asvg:svgBlip xmlns:asvg="http://schemas.microsoft.com/office/drawing/2016/SVG/main" r:embed="rId12"/>
+              </a:ext>
+            </a:extLst>
+          </a:blip>
+          <a:stretch>
+            <a:fillRect/>
+          </a:stretch>
+        </p:blipFill>
+        <p:spPr>
+          <a:xfrm>
+            <a:off x="6535674" y="2203704"/>
+            <a:ext cx="438912" cy="438912"/>
+          </a:xfrm>
+          <a:prstGeom prst="rect">
+            <a:avLst/>
+          </a:prstGeom>
+        </p:spPr>
+      </p:pic>
+      <p:sp>
+        <p:nvSpPr>
+          <p:cNvPr id="23" name="Text 15"/>
           <p:cNvSpPr txBox="1"/>
           <p:nvPr/>
         </p:nvSpPr>
         <p:spPr>
           <a:xfrm>
-            <a:off x="7175754" y="1874520"/>
-            <a:ext cx="3961638" cy="1097280"/>
+            <a:off x="7175754" y="1627632"/>
+            <a:ext cx="3961638" cy="1591056"/>
           </a:xfrm>
           <a:prstGeom prst="rect">
             <a:avLst/>
@@ -5130,7 +5143,7 @@
           <a:bodyPr wrap="square" lIns="0" tIns="25400" rIns="25400" bIns="0" rtlCol="0" anchor="ctr"/>
           <a:lstStyle/>
           <a:p>
-            <a:pPr algn="l" indent="0" marL="0">
+            <a:pPr algn="ctr" indent="0" marL="0">
               <a:lnSpc>
                 <a:spcPct val="120000"/>
               </a:lnSpc>
@@ -5145,7 +5158,7 @@
                 <a:ea typeface="Pretendard" pitchFamily="34" charset="-122"/>
                 <a:cs typeface="Pretendard" pitchFamily="34" charset="-120"/>
               </a:rPr>
-              <a:t>Pipeline teaser PPTX contains no embedded SVG or flattened picture.</a:t>
+              <a:t>Pipeline teaser PPTX keeps text and connectors editable; any SVG layer is limited to intentional surface geometry.</a:t>
             </a:r>
             <a:endParaRPr lang="en-US" sz="2200" dirty="0"/>
           </a:p>
@@ -5153,7 +5166,7 @@
       </p:sp>
       <p:sp>
         <p:nvSpPr>
-          <p:cNvPr id="25" name="Shape 23"/>
+          <p:cNvPr id="24" name="Shape 16"/>
           <p:cNvSpPr/>
           <p:nvPr/>
         </p:nvSpPr>
@@ -5178,97 +5191,46 @@
           </a:ln>
         </p:spPr>
       </p:sp>
-      <p:sp>
-        <p:nvSpPr>
-          <p:cNvPr id="26" name="Shape 24"/>
-          <p:cNvSpPr/>
-          <p:nvPr/>
-        </p:nvSpPr>
-        <p:spPr>
-          <a:xfrm>
-            <a:off x="1199206" y="4551152"/>
-            <a:ext cx="101125" cy="101125"/>
-          </a:xfrm>
-          <a:prstGeom prst="diamond">
-            <a:avLst/>
-          </a:prstGeom>
-          <a:solidFill>
-            <a:srgbClr val="1F2937"/>
-          </a:solidFill>
-          <a:ln w="12700">
-            <a:solidFill>
-              <a:srgbClr val="1F2937">
-                <a:alpha val="0"/>
-              </a:srgbClr>
-            </a:solidFill>
-            <a:prstDash val="solid"/>
-          </a:ln>
-        </p:spPr>
-      </p:sp>
-      <p:sp>
-        <p:nvSpPr>
-          <p:cNvPr id="27" name="Shape 25"/>
-          <p:cNvSpPr/>
-          <p:nvPr/>
-        </p:nvSpPr>
-        <p:spPr>
-          <a:xfrm>
-            <a:off x="1126523" y="4693359"/>
-            <a:ext cx="63203" cy="63203"/>
-          </a:xfrm>
-          <a:prstGeom prst="diamond">
-            <a:avLst/>
-          </a:prstGeom>
-          <a:solidFill>
-            <a:srgbClr val="1F2937"/>
-          </a:solidFill>
-          <a:ln w="12700">
-            <a:solidFill>
-              <a:srgbClr val="1F2937">
-                <a:alpha val="0"/>
-              </a:srgbClr>
-            </a:solidFill>
-            <a:prstDash val="solid"/>
-          </a:ln>
-        </p:spPr>
-      </p:sp>
-      <p:sp>
-        <p:nvSpPr>
-          <p:cNvPr id="28" name="Shape 26"/>
-          <p:cNvSpPr/>
-          <p:nvPr/>
-        </p:nvSpPr>
-        <p:spPr>
-          <a:xfrm>
-            <a:off x="1306652" y="4724961"/>
-            <a:ext cx="69524" cy="69524"/>
-          </a:xfrm>
-          <a:prstGeom prst="diamond">
-            <a:avLst/>
-          </a:prstGeom>
-          <a:solidFill>
-            <a:srgbClr val="1F2937"/>
-          </a:solidFill>
-          <a:ln w="12700">
-            <a:solidFill>
-              <a:srgbClr val="1F2937">
-                <a:alpha val="0"/>
-              </a:srgbClr>
-            </a:solidFill>
-            <a:prstDash val="solid"/>
-          </a:ln>
-        </p:spPr>
-      </p:sp>
-      <p:sp>
-        <p:nvSpPr>
-          <p:cNvPr id="29" name="Text 27"/>
+      <p:pic>
+        <p:nvPicPr>
+          <p:cNvPr id="25" name="Image 6" descr="table icon from tabler-icons (MIT)">    </p:cNvPr>
+          <p:cNvPicPr>
+            <a:picLocks noChangeAspect="1"/>
+          </p:cNvPicPr>
+          <p:nvPr/>
+        </p:nvPicPr>
+        <p:blipFill>
+          <a:blip r:embed="rId13">
+            <a:extLst>
+              <a:ext uri="{96DAC541-7B7A-43D3-8B79-37D633B846F1}">
+                <asvg:svgBlip xmlns:asvg="http://schemas.microsoft.com/office/drawing/2016/SVG/main" r:embed="rId14"/>
+              </a:ext>
+            </a:extLst>
+          </a:blip>
+          <a:stretch>
+            <a:fillRect/>
+          </a:stretch>
+        </p:blipFill>
+        <p:spPr>
+          <a:xfrm>
+            <a:off x="1049274" y="4489704"/>
+            <a:ext cx="438912" cy="438912"/>
+          </a:xfrm>
+          <a:prstGeom prst="rect">
+            <a:avLst/>
+          </a:prstGeom>
+        </p:spPr>
+      </p:pic>
+      <p:sp>
+        <p:nvSpPr>
+          <p:cNvPr id="26" name="Text 17"/>
           <p:cNvSpPr txBox="1"/>
           <p:nvPr/>
         </p:nvSpPr>
         <p:spPr>
           <a:xfrm>
             <a:off x="1689354" y="3913632"/>
-            <a:ext cx="3961638" cy="1767840"/>
+            <a:ext cx="3961638" cy="1591056"/>
           </a:xfrm>
           <a:prstGeom prst="rect">
             <a:avLst/>
@@ -5277,12 +5239,10 @@
           <a:ln/>
         </p:spPr>
         <p:txBody>
-          <a:bodyPr wrap="square" lIns="0" tIns="25400" rIns="25400" bIns="0" rtlCol="0" anchor="ctr">
-            <a:normAutofit/>
-          </a:bodyPr>
+          <a:bodyPr wrap="square" lIns="0" tIns="25400" rIns="25400" bIns="0" rtlCol="0" anchor="ctr"/>
           <a:lstStyle/>
           <a:p>
-            <a:pPr algn="l" indent="0" marL="0">
+            <a:pPr algn="ctr" indent="0" marL="0">
               <a:lnSpc>
                 <a:spcPct val="120000"/>
               </a:lnSpc>
@@ -5305,7 +5265,7 @@
       </p:sp>
       <p:sp>
         <p:nvSpPr>
-          <p:cNvPr id="30" name="Shape 28"/>
+          <p:cNvPr id="27" name="Shape 18"/>
           <p:cNvSpPr/>
           <p:nvPr/>
         </p:nvSpPr>
@@ -5330,97 +5290,46 @@
           </a:ln>
         </p:spPr>
       </p:sp>
-      <p:sp>
-        <p:nvSpPr>
-          <p:cNvPr id="31" name="Shape 29"/>
-          <p:cNvSpPr/>
-          <p:nvPr/>
-        </p:nvSpPr>
-        <p:spPr>
-          <a:xfrm>
-            <a:off x="6647684" y="4687039"/>
-            <a:ext cx="41082" cy="110606"/>
-          </a:xfrm>
-          <a:prstGeom prst="rect">
-            <a:avLst/>
-          </a:prstGeom>
-          <a:solidFill>
-            <a:srgbClr val="1F2937"/>
-          </a:solidFill>
-          <a:ln w="12700">
-            <a:solidFill>
-              <a:srgbClr val="1F2937">
-                <a:alpha val="0"/>
-              </a:srgbClr>
-            </a:solidFill>
-            <a:prstDash val="solid"/>
-          </a:ln>
-        </p:spPr>
-      </p:sp>
-      <p:sp>
-        <p:nvSpPr>
-          <p:cNvPr id="32" name="Shape 30"/>
-          <p:cNvSpPr/>
-          <p:nvPr/>
-        </p:nvSpPr>
-        <p:spPr>
-          <a:xfrm>
-            <a:off x="6726689" y="4601714"/>
-            <a:ext cx="41082" cy="195930"/>
-          </a:xfrm>
-          <a:prstGeom prst="rect">
-            <a:avLst/>
-          </a:prstGeom>
-          <a:solidFill>
-            <a:srgbClr val="1F2937"/>
-          </a:solidFill>
-          <a:ln w="12700">
-            <a:solidFill>
-              <a:srgbClr val="1F2937">
-                <a:alpha val="0"/>
-              </a:srgbClr>
-            </a:solidFill>
-            <a:prstDash val="solid"/>
-          </a:ln>
-        </p:spPr>
-      </p:sp>
-      <p:sp>
-        <p:nvSpPr>
-          <p:cNvPr id="33" name="Shape 31"/>
-          <p:cNvSpPr/>
-          <p:nvPr/>
-        </p:nvSpPr>
-        <p:spPr>
-          <a:xfrm>
-            <a:off x="6805693" y="4645957"/>
-            <a:ext cx="41082" cy="151688"/>
-          </a:xfrm>
-          <a:prstGeom prst="rect">
-            <a:avLst/>
-          </a:prstGeom>
-          <a:solidFill>
-            <a:srgbClr val="1F2937"/>
-          </a:solidFill>
-          <a:ln w="12700">
-            <a:solidFill>
-              <a:srgbClr val="1F2937">
-                <a:alpha val="0"/>
-              </a:srgbClr>
-            </a:solidFill>
-            <a:prstDash val="solid"/>
-          </a:ln>
-        </p:spPr>
-      </p:sp>
-      <p:sp>
-        <p:nvSpPr>
-          <p:cNvPr id="34" name="Text 32"/>
+      <p:pic>
+        <p:nvPicPr>
+          <p:cNvPr id="28" name="Image 7" descr="article icon from tabler-icons (MIT)">    </p:cNvPr>
+          <p:cNvPicPr>
+            <a:picLocks noChangeAspect="1"/>
+          </p:cNvPicPr>
+          <p:nvPr/>
+        </p:nvPicPr>
+        <p:blipFill>
+          <a:blip r:embed="rId15">
+            <a:extLst>
+              <a:ext uri="{96DAC541-7B7A-43D3-8B79-37D633B846F1}">
+                <asvg:svgBlip xmlns:asvg="http://schemas.microsoft.com/office/drawing/2016/SVG/main" r:embed="rId16"/>
+              </a:ext>
+            </a:extLst>
+          </a:blip>
+          <a:stretch>
+            <a:fillRect/>
+          </a:stretch>
+        </p:blipFill>
+        <p:spPr>
+          <a:xfrm>
+            <a:off x="6535674" y="4489704"/>
+            <a:ext cx="438912" cy="438912"/>
+          </a:xfrm>
+          <a:prstGeom prst="rect">
+            <a:avLst/>
+          </a:prstGeom>
+        </p:spPr>
+      </p:pic>
+      <p:sp>
+        <p:nvSpPr>
+          <p:cNvPr id="29" name="Text 19"/>
           <p:cNvSpPr txBox="1"/>
           <p:nvPr/>
         </p:nvSpPr>
         <p:spPr>
           <a:xfrm>
             <a:off x="7175754" y="3913632"/>
-            <a:ext cx="3961638" cy="2103120"/>
+            <a:ext cx="3961638" cy="1591056"/>
           </a:xfrm>
           <a:prstGeom prst="rect">
             <a:avLst/>
@@ -5429,12 +5338,10 @@
           <a:ln/>
         </p:spPr>
         <p:txBody>
-          <a:bodyPr wrap="square" lIns="0" tIns="25400" rIns="25400" bIns="0" rtlCol="0" anchor="ctr">
-            <a:normAutofit/>
-          </a:bodyPr>
+          <a:bodyPr wrap="square" lIns="0" tIns="25400" rIns="25400" bIns="0" rtlCol="0" anchor="ctr"/>
           <a:lstStyle/>
           <a:p>
-            <a:pPr algn="l" indent="0" marL="0">
+            <a:pPr algn="ctr" indent="0" marL="0">
               <a:lnSpc>
                 <a:spcPct val="120000"/>
               </a:lnSpc>
@@ -5676,125 +5583,273 @@
           </a:ln>
         </p:spPr>
       </p:sp>
-      <p:sp>
-        <p:nvSpPr>
-          <p:cNvPr id="9" name="Shape 7"/>
-          <p:cNvSpPr/>
-          <p:nvPr/>
-        </p:nvSpPr>
+      <p:pic>
+        <p:nvPicPr>
+          <p:cNvPr id="9" name="Image 0" descr="preencoded.png">    </p:cNvPr>
+          <p:cNvPicPr>
+            <a:picLocks noChangeAspect="1"/>
+          </p:cNvPicPr>
+          <p:nvPr/>
+        </p:nvPicPr>
+        <p:blipFill>
+          <a:blip r:embed="rId1">
+            <a:extLst>
+              <a:ext uri="{96DAC541-7B7A-43D3-8B79-37D633B846F1}">
+                <asvg:svgBlip xmlns:asvg="http://schemas.microsoft.com/office/drawing/2016/SVG/main" r:embed="rId2"/>
+              </a:ext>
+            </a:extLst>
+          </a:blip>
+          <a:stretch>
+            <a:fillRect/>
+          </a:stretch>
+        </p:blipFill>
         <p:spPr>
           <a:xfrm>
             <a:off x="822960" y="1463040"/>
             <a:ext cx="5029200" cy="1920240"/>
           </a:xfrm>
-          <a:prstGeom prst="roundRect">
-            <a:avLst>
-              <a:gd name="adj" fmla="val 2857"/>
-            </a:avLst>
-          </a:prstGeom>
-          <a:solidFill>
-            <a:srgbClr val="FFFBF5"/>
+          <a:prstGeom prst="rect">
+            <a:avLst/>
+          </a:prstGeom>
+        </p:spPr>
+      </p:pic>
+      <p:sp>
+        <p:nvSpPr>
+          <p:cNvPr id="10" name="Shape 7"/>
+          <p:cNvSpPr/>
+          <p:nvPr/>
+        </p:nvSpPr>
+        <p:spPr>
+          <a:xfrm>
+            <a:off x="822960" y="1463040"/>
+            <a:ext cx="5029200" cy="1920240"/>
+          </a:xfrm>
+          <a:prstGeom prst="rect">
+            <a:avLst/>
+          </a:prstGeom>
+          <a:solidFill>
+            <a:srgbClr val="FFFBF5">
+              <a:alpha val="0"/>
+            </a:srgbClr>
           </a:solidFill>
           <a:ln w="12700">
             <a:solidFill>
               <a:srgbClr val="E7D8C9">
-                <a:alpha val="90000"/>
-              </a:srgbClr>
-            </a:solidFill>
-            <a:prstDash val="solid"/>
-          </a:ln>
-        </p:spPr>
-      </p:sp>
-      <p:sp>
-        <p:nvSpPr>
-          <p:cNvPr id="10" name="Shape 8"/>
-          <p:cNvSpPr/>
-          <p:nvPr/>
-        </p:nvSpPr>
+                <a:alpha val="0"/>
+              </a:srgbClr>
+            </a:solidFill>
+            <a:prstDash val="solid"/>
+          </a:ln>
+          <a:effectLst>
+            <a:outerShdw sx="100000" sy="100000" kx="0" ky="0" algn="bl" rotWithShape="0" blurRad="12700" dist="50800" dir="2700000">
+              <a:srgbClr val="000000">
+                <a:alpha val="8000"/>
+              </a:srgbClr>
+            </a:outerShdw>
+          </a:effectLst>
+        </p:spPr>
+      </p:sp>
+      <p:pic>
+        <p:nvPicPr>
+          <p:cNvPr id="11" name="Image 1" descr="preencoded.png">    </p:cNvPr>
+          <p:cNvPicPr>
+            <a:picLocks noChangeAspect="1"/>
+          </p:cNvPicPr>
+          <p:nvPr/>
+        </p:nvPicPr>
+        <p:blipFill>
+          <a:blip r:embed="rId3">
+            <a:extLst>
+              <a:ext uri="{96DAC541-7B7A-43D3-8B79-37D633B846F1}">
+                <asvg:svgBlip xmlns:asvg="http://schemas.microsoft.com/office/drawing/2016/SVG/main" r:embed="rId4"/>
+              </a:ext>
+            </a:extLst>
+          </a:blip>
+          <a:stretch>
+            <a:fillRect/>
+          </a:stretch>
+        </p:blipFill>
         <p:spPr>
           <a:xfrm>
             <a:off x="6309360" y="1463040"/>
             <a:ext cx="5029200" cy="1920240"/>
           </a:xfrm>
-          <a:prstGeom prst="roundRect">
-            <a:avLst>
-              <a:gd name="adj" fmla="val 2857"/>
-            </a:avLst>
-          </a:prstGeom>
-          <a:solidFill>
-            <a:srgbClr val="FFFBF5"/>
+          <a:prstGeom prst="rect">
+            <a:avLst/>
+          </a:prstGeom>
+        </p:spPr>
+      </p:pic>
+      <p:sp>
+        <p:nvSpPr>
+          <p:cNvPr id="12" name="Shape 8"/>
+          <p:cNvSpPr/>
+          <p:nvPr/>
+        </p:nvSpPr>
+        <p:spPr>
+          <a:xfrm>
+            <a:off x="6309360" y="1463040"/>
+            <a:ext cx="5029200" cy="1920240"/>
+          </a:xfrm>
+          <a:prstGeom prst="rect">
+            <a:avLst/>
+          </a:prstGeom>
+          <a:solidFill>
+            <a:srgbClr val="FFFBF5">
+              <a:alpha val="0"/>
+            </a:srgbClr>
           </a:solidFill>
           <a:ln w="12700">
             <a:solidFill>
               <a:srgbClr val="E7D8C9">
-                <a:alpha val="90000"/>
-              </a:srgbClr>
-            </a:solidFill>
-            <a:prstDash val="solid"/>
-          </a:ln>
-        </p:spPr>
-      </p:sp>
-      <p:sp>
-        <p:nvSpPr>
-          <p:cNvPr id="11" name="Shape 9"/>
-          <p:cNvSpPr/>
-          <p:nvPr/>
-        </p:nvSpPr>
+                <a:alpha val="0"/>
+              </a:srgbClr>
+            </a:solidFill>
+            <a:prstDash val="solid"/>
+          </a:ln>
+          <a:effectLst>
+            <a:outerShdw sx="100000" sy="100000" kx="0" ky="0" algn="bl" rotWithShape="0" blurRad="12700" dist="50800" dir="2700000">
+              <a:srgbClr val="000000">
+                <a:alpha val="8000"/>
+              </a:srgbClr>
+            </a:outerShdw>
+          </a:effectLst>
+        </p:spPr>
+      </p:sp>
+      <p:pic>
+        <p:nvPicPr>
+          <p:cNvPr id="13" name="Image 2" descr="preencoded.png">    </p:cNvPr>
+          <p:cNvPicPr>
+            <a:picLocks noChangeAspect="1"/>
+          </p:cNvPicPr>
+          <p:nvPr/>
+        </p:nvPicPr>
+        <p:blipFill>
+          <a:blip r:embed="rId5">
+            <a:extLst>
+              <a:ext uri="{96DAC541-7B7A-43D3-8B79-37D633B846F1}">
+                <asvg:svgBlip xmlns:asvg="http://schemas.microsoft.com/office/drawing/2016/SVG/main" r:embed="rId6"/>
+              </a:ext>
+            </a:extLst>
+          </a:blip>
+          <a:stretch>
+            <a:fillRect/>
+          </a:stretch>
+        </p:blipFill>
         <p:spPr>
           <a:xfrm>
             <a:off x="822960" y="3749040"/>
             <a:ext cx="5029200" cy="1920240"/>
           </a:xfrm>
-          <a:prstGeom prst="roundRect">
-            <a:avLst>
-              <a:gd name="adj" fmla="val 2857"/>
-            </a:avLst>
-          </a:prstGeom>
-          <a:solidFill>
-            <a:srgbClr val="FFFBF5"/>
+          <a:prstGeom prst="rect">
+            <a:avLst/>
+          </a:prstGeom>
+        </p:spPr>
+      </p:pic>
+      <p:sp>
+        <p:nvSpPr>
+          <p:cNvPr id="14" name="Shape 9"/>
+          <p:cNvSpPr/>
+          <p:nvPr/>
+        </p:nvSpPr>
+        <p:spPr>
+          <a:xfrm>
+            <a:off x="822960" y="3749040"/>
+            <a:ext cx="5029200" cy="1920240"/>
+          </a:xfrm>
+          <a:prstGeom prst="rect">
+            <a:avLst/>
+          </a:prstGeom>
+          <a:solidFill>
+            <a:srgbClr val="FFFBF5">
+              <a:alpha val="0"/>
+            </a:srgbClr>
           </a:solidFill>
           <a:ln w="12700">
             <a:solidFill>
               <a:srgbClr val="E7D8C9">
-                <a:alpha val="90000"/>
-              </a:srgbClr>
-            </a:solidFill>
-            <a:prstDash val="solid"/>
-          </a:ln>
-        </p:spPr>
-      </p:sp>
-      <p:sp>
-        <p:nvSpPr>
-          <p:cNvPr id="12" name="Shape 10"/>
-          <p:cNvSpPr/>
-          <p:nvPr/>
-        </p:nvSpPr>
+                <a:alpha val="0"/>
+              </a:srgbClr>
+            </a:solidFill>
+            <a:prstDash val="solid"/>
+          </a:ln>
+          <a:effectLst>
+            <a:outerShdw sx="100000" sy="100000" kx="0" ky="0" algn="bl" rotWithShape="0" blurRad="12700" dist="50800" dir="2700000">
+              <a:srgbClr val="000000">
+                <a:alpha val="8000"/>
+              </a:srgbClr>
+            </a:outerShdw>
+          </a:effectLst>
+        </p:spPr>
+      </p:sp>
+      <p:pic>
+        <p:nvPicPr>
+          <p:cNvPr id="15" name="Image 3" descr="preencoded.png">    </p:cNvPr>
+          <p:cNvPicPr>
+            <a:picLocks noChangeAspect="1"/>
+          </p:cNvPicPr>
+          <p:nvPr/>
+        </p:nvPicPr>
+        <p:blipFill>
+          <a:blip r:embed="rId7">
+            <a:extLst>
+              <a:ext uri="{96DAC541-7B7A-43D3-8B79-37D633B846F1}">
+                <asvg:svgBlip xmlns:asvg="http://schemas.microsoft.com/office/drawing/2016/SVG/main" r:embed="rId8"/>
+              </a:ext>
+            </a:extLst>
+          </a:blip>
+          <a:stretch>
+            <a:fillRect/>
+          </a:stretch>
+        </p:blipFill>
         <p:spPr>
           <a:xfrm>
             <a:off x="6309360" y="3749040"/>
             <a:ext cx="5029200" cy="1920240"/>
           </a:xfrm>
-          <a:prstGeom prst="roundRect">
-            <a:avLst>
-              <a:gd name="adj" fmla="val 2857"/>
-            </a:avLst>
-          </a:prstGeom>
-          <a:solidFill>
-            <a:srgbClr val="FFFBF5"/>
+          <a:prstGeom prst="rect">
+            <a:avLst/>
+          </a:prstGeom>
+        </p:spPr>
+      </p:pic>
+      <p:sp>
+        <p:nvSpPr>
+          <p:cNvPr id="16" name="Shape 10"/>
+          <p:cNvSpPr/>
+          <p:nvPr/>
+        </p:nvSpPr>
+        <p:spPr>
+          <a:xfrm>
+            <a:off x="6309360" y="3749040"/>
+            <a:ext cx="5029200" cy="1920240"/>
+          </a:xfrm>
+          <a:prstGeom prst="rect">
+            <a:avLst/>
+          </a:prstGeom>
+          <a:solidFill>
+            <a:srgbClr val="FFFBF5">
+              <a:alpha val="0"/>
+            </a:srgbClr>
           </a:solidFill>
           <a:ln w="12700">
             <a:solidFill>
               <a:srgbClr val="E7D8C9">
-                <a:alpha val="90000"/>
-              </a:srgbClr>
-            </a:solidFill>
-            <a:prstDash val="solid"/>
-          </a:ln>
-        </p:spPr>
-      </p:sp>
-      <p:sp>
-        <p:nvSpPr>
-          <p:cNvPr id="13" name="Text 11"/>
+                <a:alpha val="0"/>
+              </a:srgbClr>
+            </a:solidFill>
+            <a:prstDash val="solid"/>
+          </a:ln>
+          <a:effectLst>
+            <a:outerShdw sx="100000" sy="100000" kx="0" ky="0" algn="bl" rotWithShape="0" blurRad="12700" dist="50800" dir="2700000">
+              <a:srgbClr val="000000">
+                <a:alpha val="8000"/>
+              </a:srgbClr>
+            </a:outerShdw>
+          </a:effectLst>
+        </p:spPr>
+      </p:sp>
+      <p:sp>
+        <p:nvSpPr>
+          <p:cNvPr id="17" name="Text 11"/>
           <p:cNvSpPr txBox="1"/>
           <p:nvPr/>
         </p:nvSpPr>
@@ -5810,9 +5865,7 @@
           <a:ln/>
         </p:spPr>
         <p:txBody>
-          <a:bodyPr wrap="square" lIns="0" tIns="0" rIns="0" bIns="0" rtlCol="0" anchor="ctr">
-            <a:normAutofit/>
-          </a:bodyPr>
+          <a:bodyPr wrap="square" lIns="0" tIns="0" rIns="0" bIns="0" rtlCol="0" anchor="ctr"/>
           <a:lstStyle/>
           <a:p>
             <a:pPr algn="ctr" indent="0" marL="0">
@@ -5838,7 +5891,7 @@
       </p:sp>
       <p:sp>
         <p:nvSpPr>
-          <p:cNvPr id="14" name="Shape 12"/>
+          <p:cNvPr id="18" name="Shape 12"/>
           <p:cNvSpPr/>
           <p:nvPr/>
         </p:nvSpPr>
@@ -5863,144 +5916,39 @@
           </a:ln>
         </p:spPr>
       </p:sp>
-      <p:sp>
-        <p:nvSpPr>
-          <p:cNvPr id="15" name="Shape 13"/>
-          <p:cNvSpPr/>
-          <p:nvPr/>
-        </p:nvSpPr>
-        <p:spPr>
-          <a:xfrm>
-            <a:off x="1110722" y="2378918"/>
-            <a:ext cx="63203" cy="63203"/>
-          </a:xfrm>
-          <a:prstGeom prst="ellipse">
-            <a:avLst/>
-          </a:prstGeom>
-          <a:solidFill>
-            <a:srgbClr val="1F2937"/>
-          </a:solidFill>
-          <a:ln w="12700">
-            <a:solidFill>
-              <a:srgbClr val="1F2937">
-                <a:alpha val="0"/>
-              </a:srgbClr>
-            </a:solidFill>
-            <a:prstDash val="solid"/>
-          </a:ln>
-        </p:spPr>
-      </p:sp>
-      <p:sp>
-        <p:nvSpPr>
-          <p:cNvPr id="16" name="Shape 14"/>
-          <p:cNvSpPr/>
-          <p:nvPr/>
-        </p:nvSpPr>
-        <p:spPr>
-          <a:xfrm>
-            <a:off x="1230808" y="2378918"/>
-            <a:ext cx="63203" cy="63203"/>
-          </a:xfrm>
-          <a:prstGeom prst="ellipse">
-            <a:avLst/>
-          </a:prstGeom>
-          <a:solidFill>
-            <a:srgbClr val="1F2937"/>
-          </a:solidFill>
-          <a:ln w="12700">
-            <a:solidFill>
-              <a:srgbClr val="1F2937">
-                <a:alpha val="0"/>
-              </a:srgbClr>
-            </a:solidFill>
-            <a:prstDash val="solid"/>
-          </a:ln>
-        </p:spPr>
-      </p:sp>
-      <p:sp>
-        <p:nvSpPr>
-          <p:cNvPr id="17" name="Shape 15"/>
-          <p:cNvSpPr/>
-          <p:nvPr/>
-        </p:nvSpPr>
-        <p:spPr>
-          <a:xfrm>
-            <a:off x="1350894" y="2378918"/>
-            <a:ext cx="63203" cy="63203"/>
-          </a:xfrm>
-          <a:prstGeom prst="ellipse">
-            <a:avLst/>
-          </a:prstGeom>
-          <a:solidFill>
-            <a:srgbClr val="1F2937"/>
-          </a:solidFill>
-          <a:ln w="12700">
-            <a:solidFill>
-              <a:srgbClr val="1F2937">
-                <a:alpha val="0"/>
-              </a:srgbClr>
-            </a:solidFill>
-            <a:prstDash val="solid"/>
-          </a:ln>
-        </p:spPr>
-      </p:sp>
-      <p:sp>
-        <p:nvSpPr>
-          <p:cNvPr id="18" name="Shape 16"/>
-          <p:cNvSpPr/>
-          <p:nvPr/>
-        </p:nvSpPr>
-        <p:spPr>
-          <a:xfrm>
-            <a:off x="1173925" y="2407359"/>
-            <a:ext cx="69524" cy="14221"/>
-          </a:xfrm>
-          <a:prstGeom prst="rect">
-            <a:avLst/>
-          </a:prstGeom>
-          <a:solidFill>
-            <a:srgbClr val="1F2937"/>
-          </a:solidFill>
-          <a:ln w="12700">
-            <a:solidFill>
-              <a:srgbClr val="1F2937">
-                <a:alpha val="0"/>
-              </a:srgbClr>
-            </a:solidFill>
-            <a:prstDash val="solid"/>
-          </a:ln>
-        </p:spPr>
-      </p:sp>
-      <p:sp>
-        <p:nvSpPr>
-          <p:cNvPr id="19" name="Shape 17"/>
-          <p:cNvSpPr/>
-          <p:nvPr/>
-        </p:nvSpPr>
-        <p:spPr>
-          <a:xfrm>
-            <a:off x="1294011" y="2407359"/>
-            <a:ext cx="69524" cy="14221"/>
-          </a:xfrm>
-          <a:prstGeom prst="rect">
-            <a:avLst/>
-          </a:prstGeom>
-          <a:solidFill>
-            <a:srgbClr val="1F2937"/>
-          </a:solidFill>
-          <a:ln w="12700">
-            <a:solidFill>
-              <a:srgbClr val="1F2937">
-                <a:alpha val="0"/>
-              </a:srgbClr>
-            </a:solidFill>
-            <a:prstDash val="solid"/>
-          </a:ln>
-        </p:spPr>
-      </p:sp>
-      <p:sp>
-        <p:nvSpPr>
-          <p:cNvPr id="20" name="Text 18"/>
+      <p:pic>
+        <p:nvPicPr>
+          <p:cNvPr id="19" name="Image 4" descr="article icon from tabler-icons (MIT)">    </p:cNvPr>
+          <p:cNvPicPr>
+            <a:picLocks noChangeAspect="1"/>
+          </p:cNvPicPr>
+          <p:nvPr/>
+        </p:nvPicPr>
+        <p:blipFill>
+          <a:blip r:embed="rId9">
+            <a:extLst>
+              <a:ext uri="{96DAC541-7B7A-43D3-8B79-37D633B846F1}">
+                <asvg:svgBlip xmlns:asvg="http://schemas.microsoft.com/office/drawing/2016/SVG/main" r:embed="rId10"/>
+              </a:ext>
+            </a:extLst>
+          </a:blip>
+          <a:stretch>
+            <a:fillRect/>
+          </a:stretch>
+        </p:blipFill>
+        <p:spPr>
+          <a:xfrm>
+            <a:off x="1049274" y="2203704"/>
+            <a:ext cx="438912" cy="438912"/>
+          </a:xfrm>
+          <a:prstGeom prst="rect">
+            <a:avLst/>
+          </a:prstGeom>
+        </p:spPr>
+      </p:pic>
+      <p:sp>
+        <p:nvSpPr>
+          <p:cNvPr id="20" name="Text 13"/>
           <p:cNvSpPr txBox="1"/>
           <p:nvPr/>
         </p:nvSpPr>
@@ -6019,7 +5967,7 @@
           <a:bodyPr wrap="square" lIns="0" tIns="25400" rIns="25400" bIns="0" rtlCol="0" anchor="ctr"/>
           <a:lstStyle/>
           <a:p>
-            <a:pPr algn="l" indent="0" marL="0">
+            <a:pPr algn="ctr" indent="0" marL="0">
               <a:lnSpc>
                 <a:spcPct val="120000"/>
               </a:lnSpc>
@@ -6042,7 +5990,7 @@
       </p:sp>
       <p:sp>
         <p:nvSpPr>
-          <p:cNvPr id="21" name="Shape 19"/>
+          <p:cNvPr id="21" name="Shape 14"/>
           <p:cNvSpPr/>
           <p:nvPr/>
         </p:nvSpPr>
@@ -6067,63 +6015,39 @@
           </a:ln>
         </p:spPr>
       </p:sp>
-      <p:sp>
-        <p:nvSpPr>
-          <p:cNvPr id="22" name="Shape 20"/>
-          <p:cNvSpPr/>
-          <p:nvPr/>
-        </p:nvSpPr>
-        <p:spPr>
-          <a:xfrm rot="10800000">
-            <a:off x="6635044" y="2284113"/>
-            <a:ext cx="240173" cy="265454"/>
-          </a:xfrm>
-          <a:prstGeom prst="pentagon">
-            <a:avLst/>
-          </a:prstGeom>
-          <a:solidFill>
-            <a:srgbClr val="1F2937"/>
-          </a:solidFill>
-          <a:ln w="12700">
-            <a:solidFill>
-              <a:srgbClr val="1F2937">
-                <a:alpha val="0"/>
-              </a:srgbClr>
-            </a:solidFill>
-            <a:prstDash val="solid"/>
-          </a:ln>
-        </p:spPr>
-      </p:sp>
-      <p:sp>
-        <p:nvSpPr>
-          <p:cNvPr id="23" name="Shape 21"/>
-          <p:cNvSpPr/>
-          <p:nvPr/>
-        </p:nvSpPr>
-        <p:spPr>
-          <a:xfrm rot="2100000">
-            <a:off x="6739329" y="2353636"/>
-            <a:ext cx="34762" cy="120086"/>
-          </a:xfrm>
-          <a:prstGeom prst="rect">
-            <a:avLst/>
-          </a:prstGeom>
-          <a:solidFill>
-            <a:srgbClr val="F7F3EF"/>
-          </a:solidFill>
-          <a:ln w="12700">
-            <a:solidFill>
-              <a:srgbClr val="F7F3EF">
-                <a:alpha val="0"/>
-              </a:srgbClr>
-            </a:solidFill>
-            <a:prstDash val="solid"/>
-          </a:ln>
-        </p:spPr>
-      </p:sp>
-      <p:sp>
-        <p:nvSpPr>
-          <p:cNvPr id="24" name="Text 22"/>
+      <p:pic>
+        <p:nvPicPr>
+          <p:cNvPr id="22" name="Image 5" descr="chart icon from tabler-icons (MIT)">    </p:cNvPr>
+          <p:cNvPicPr>
+            <a:picLocks noChangeAspect="1"/>
+          </p:cNvPicPr>
+          <p:nvPr/>
+        </p:nvPicPr>
+        <p:blipFill>
+          <a:blip r:embed="rId11">
+            <a:extLst>
+              <a:ext uri="{96DAC541-7B7A-43D3-8B79-37D633B846F1}">
+                <asvg:svgBlip xmlns:asvg="http://schemas.microsoft.com/office/drawing/2016/SVG/main" r:embed="rId12"/>
+              </a:ext>
+            </a:extLst>
+          </a:blip>
+          <a:stretch>
+            <a:fillRect/>
+          </a:stretch>
+        </p:blipFill>
+        <p:spPr>
+          <a:xfrm>
+            <a:off x="6535674" y="2203704"/>
+            <a:ext cx="438912" cy="438912"/>
+          </a:xfrm>
+          <a:prstGeom prst="rect">
+            <a:avLst/>
+          </a:prstGeom>
+        </p:spPr>
+      </p:pic>
+      <p:sp>
+        <p:nvSpPr>
+          <p:cNvPr id="23" name="Text 15"/>
           <p:cNvSpPr txBox="1"/>
           <p:nvPr/>
         </p:nvSpPr>
@@ -6142,7 +6066,7 @@
           <a:bodyPr wrap="square" lIns="0" tIns="25400" rIns="25400" bIns="0" rtlCol="0" anchor="ctr"/>
           <a:lstStyle/>
           <a:p>
-            <a:pPr algn="l" indent="0" marL="0">
+            <a:pPr algn="ctr" indent="0" marL="0">
               <a:lnSpc>
                 <a:spcPct val="120000"/>
               </a:lnSpc>
@@ -6165,7 +6089,7 @@
       </p:sp>
       <p:sp>
         <p:nvSpPr>
-          <p:cNvPr id="25" name="Shape 23"/>
+          <p:cNvPr id="24" name="Shape 16"/>
           <p:cNvSpPr/>
           <p:nvPr/>
         </p:nvSpPr>
@@ -6190,90 +6114,39 @@
           </a:ln>
         </p:spPr>
       </p:sp>
-      <p:sp>
-        <p:nvSpPr>
-          <p:cNvPr id="26" name="Shape 24"/>
-          <p:cNvSpPr/>
-          <p:nvPr/>
-        </p:nvSpPr>
-        <p:spPr>
-          <a:xfrm>
-            <a:off x="1199206" y="4551152"/>
-            <a:ext cx="101125" cy="101125"/>
-          </a:xfrm>
-          <a:prstGeom prst="diamond">
-            <a:avLst/>
-          </a:prstGeom>
-          <a:solidFill>
-            <a:srgbClr val="1F2937"/>
-          </a:solidFill>
-          <a:ln w="12700">
-            <a:solidFill>
-              <a:srgbClr val="1F2937">
-                <a:alpha val="0"/>
-              </a:srgbClr>
-            </a:solidFill>
-            <a:prstDash val="solid"/>
-          </a:ln>
-        </p:spPr>
-      </p:sp>
-      <p:sp>
-        <p:nvSpPr>
-          <p:cNvPr id="27" name="Shape 25"/>
-          <p:cNvSpPr/>
-          <p:nvPr/>
-        </p:nvSpPr>
-        <p:spPr>
-          <a:xfrm>
-            <a:off x="1126523" y="4693359"/>
-            <a:ext cx="63203" cy="63203"/>
-          </a:xfrm>
-          <a:prstGeom prst="diamond">
-            <a:avLst/>
-          </a:prstGeom>
-          <a:solidFill>
-            <a:srgbClr val="1F2937"/>
-          </a:solidFill>
-          <a:ln w="12700">
-            <a:solidFill>
-              <a:srgbClr val="1F2937">
-                <a:alpha val="0"/>
-              </a:srgbClr>
-            </a:solidFill>
-            <a:prstDash val="solid"/>
-          </a:ln>
-        </p:spPr>
-      </p:sp>
-      <p:sp>
-        <p:nvSpPr>
-          <p:cNvPr id="28" name="Shape 26"/>
-          <p:cNvSpPr/>
-          <p:nvPr/>
-        </p:nvSpPr>
-        <p:spPr>
-          <a:xfrm>
-            <a:off x="1306652" y="4724961"/>
-            <a:ext cx="69524" cy="69524"/>
-          </a:xfrm>
-          <a:prstGeom prst="diamond">
-            <a:avLst/>
-          </a:prstGeom>
-          <a:solidFill>
-            <a:srgbClr val="1F2937"/>
-          </a:solidFill>
-          <a:ln w="12700">
-            <a:solidFill>
-              <a:srgbClr val="1F2937">
-                <a:alpha val="0"/>
-              </a:srgbClr>
-            </a:solidFill>
-            <a:prstDash val="solid"/>
-          </a:ln>
-        </p:spPr>
-      </p:sp>
-      <p:sp>
-        <p:nvSpPr>
-          <p:cNvPr id="29" name="Text 27"/>
+      <p:pic>
+        <p:nvPicPr>
+          <p:cNvPr id="25" name="Image 6" descr="article icon from tabler-icons (MIT)">    </p:cNvPr>
+          <p:cNvPicPr>
+            <a:picLocks noChangeAspect="1"/>
+          </p:cNvPicPr>
+          <p:nvPr/>
+        </p:nvPicPr>
+        <p:blipFill>
+          <a:blip r:embed="rId13">
+            <a:extLst>
+              <a:ext uri="{96DAC541-7B7A-43D3-8B79-37D633B846F1}">
+                <asvg:svgBlip xmlns:asvg="http://schemas.microsoft.com/office/drawing/2016/SVG/main" r:embed="rId14"/>
+              </a:ext>
+            </a:extLst>
+          </a:blip>
+          <a:stretch>
+            <a:fillRect/>
+          </a:stretch>
+        </p:blipFill>
+        <p:spPr>
+          <a:xfrm>
+            <a:off x="1049274" y="4489704"/>
+            <a:ext cx="438912" cy="438912"/>
+          </a:xfrm>
+          <a:prstGeom prst="rect">
+            <a:avLst/>
+          </a:prstGeom>
+        </p:spPr>
+      </p:pic>
+      <p:sp>
+        <p:nvSpPr>
+          <p:cNvPr id="26" name="Text 17"/>
           <p:cNvSpPr txBox="1"/>
           <p:nvPr/>
         </p:nvSpPr>
@@ -6292,7 +6165,7 @@
           <a:bodyPr wrap="square" lIns="0" tIns="25400" rIns="25400" bIns="0" rtlCol="0" anchor="ctr"/>
           <a:lstStyle/>
           <a:p>
-            <a:pPr algn="l" indent="0" marL="0">
+            <a:pPr algn="ctr" indent="0" marL="0">
               <a:lnSpc>
                 <a:spcPct val="120000"/>
               </a:lnSpc>
@@ -6315,7 +6188,7 @@
       </p:sp>
       <p:sp>
         <p:nvSpPr>
-          <p:cNvPr id="30" name="Shape 28"/>
+          <p:cNvPr id="27" name="Shape 18"/>
           <p:cNvSpPr/>
           <p:nvPr/>
         </p:nvSpPr>
@@ -6340,90 +6213,39 @@
           </a:ln>
         </p:spPr>
       </p:sp>
-      <p:sp>
-        <p:nvSpPr>
-          <p:cNvPr id="31" name="Shape 29"/>
-          <p:cNvSpPr/>
-          <p:nvPr/>
-        </p:nvSpPr>
-        <p:spPr>
-          <a:xfrm>
-            <a:off x="6647684" y="4687039"/>
-            <a:ext cx="41082" cy="110606"/>
-          </a:xfrm>
-          <a:prstGeom prst="rect">
-            <a:avLst/>
-          </a:prstGeom>
-          <a:solidFill>
-            <a:srgbClr val="1F2937"/>
-          </a:solidFill>
-          <a:ln w="12700">
-            <a:solidFill>
-              <a:srgbClr val="1F2937">
-                <a:alpha val="0"/>
-              </a:srgbClr>
-            </a:solidFill>
-            <a:prstDash val="solid"/>
-          </a:ln>
-        </p:spPr>
-      </p:sp>
-      <p:sp>
-        <p:nvSpPr>
-          <p:cNvPr id="32" name="Shape 30"/>
-          <p:cNvSpPr/>
-          <p:nvPr/>
-        </p:nvSpPr>
-        <p:spPr>
-          <a:xfrm>
-            <a:off x="6726689" y="4601714"/>
-            <a:ext cx="41082" cy="195930"/>
-          </a:xfrm>
-          <a:prstGeom prst="rect">
-            <a:avLst/>
-          </a:prstGeom>
-          <a:solidFill>
-            <a:srgbClr val="1F2937"/>
-          </a:solidFill>
-          <a:ln w="12700">
-            <a:solidFill>
-              <a:srgbClr val="1F2937">
-                <a:alpha val="0"/>
-              </a:srgbClr>
-            </a:solidFill>
-            <a:prstDash val="solid"/>
-          </a:ln>
-        </p:spPr>
-      </p:sp>
-      <p:sp>
-        <p:nvSpPr>
-          <p:cNvPr id="33" name="Shape 31"/>
-          <p:cNvSpPr/>
-          <p:nvPr/>
-        </p:nvSpPr>
-        <p:spPr>
-          <a:xfrm>
-            <a:off x="6805693" y="4645957"/>
-            <a:ext cx="41082" cy="151688"/>
-          </a:xfrm>
-          <a:prstGeom prst="rect">
-            <a:avLst/>
-          </a:prstGeom>
-          <a:solidFill>
-            <a:srgbClr val="1F2937"/>
-          </a:solidFill>
-          <a:ln w="12700">
-            <a:solidFill>
-              <a:srgbClr val="1F2937">
-                <a:alpha val="0"/>
-              </a:srgbClr>
-            </a:solidFill>
-            <a:prstDash val="solid"/>
-          </a:ln>
-        </p:spPr>
-      </p:sp>
-      <p:sp>
-        <p:nvSpPr>
-          <p:cNvPr id="34" name="Text 32"/>
+      <p:pic>
+        <p:nvPicPr>
+          <p:cNvPr id="28" name="Image 7" descr="article icon from tabler-icons (MIT)">    </p:cNvPr>
+          <p:cNvPicPr>
+            <a:picLocks noChangeAspect="1"/>
+          </p:cNvPicPr>
+          <p:nvPr/>
+        </p:nvPicPr>
+        <p:blipFill>
+          <a:blip r:embed="rId15">
+            <a:extLst>
+              <a:ext uri="{96DAC541-7B7A-43D3-8B79-37D633B846F1}">
+                <asvg:svgBlip xmlns:asvg="http://schemas.microsoft.com/office/drawing/2016/SVG/main" r:embed="rId16"/>
+              </a:ext>
+            </a:extLst>
+          </a:blip>
+          <a:stretch>
+            <a:fillRect/>
+          </a:stretch>
+        </p:blipFill>
+        <p:spPr>
+          <a:xfrm>
+            <a:off x="6535674" y="4489704"/>
+            <a:ext cx="438912" cy="438912"/>
+          </a:xfrm>
+          <a:prstGeom prst="rect">
+            <a:avLst/>
+          </a:prstGeom>
+        </p:spPr>
+      </p:pic>
+      <p:sp>
+        <p:nvSpPr>
+          <p:cNvPr id="29" name="Text 19"/>
           <p:cNvSpPr txBox="1"/>
           <p:nvPr/>
         </p:nvSpPr>
@@ -6442,7 +6264,7 @@
           <a:bodyPr wrap="square" lIns="0" tIns="25400" rIns="25400" bIns="0" rtlCol="0" anchor="ctr"/>
           <a:lstStyle/>
           <a:p>
-            <a:pPr algn="l" indent="0" marL="0">
+            <a:pPr algn="ctr" indent="0" marL="0">
               <a:lnSpc>
                 <a:spcPct val="120000"/>
               </a:lnSpc>
@@ -6684,125 +6506,273 @@
           </a:ln>
         </p:spPr>
       </p:sp>
-      <p:sp>
-        <p:nvSpPr>
-          <p:cNvPr id="9" name="Shape 7"/>
-          <p:cNvSpPr/>
-          <p:nvPr/>
-        </p:nvSpPr>
+      <p:pic>
+        <p:nvPicPr>
+          <p:cNvPr id="9" name="Image 0" descr="preencoded.png">    </p:cNvPr>
+          <p:cNvPicPr>
+            <a:picLocks noChangeAspect="1"/>
+          </p:cNvPicPr>
+          <p:nvPr/>
+        </p:nvPicPr>
+        <p:blipFill>
+          <a:blip r:embed="rId1">
+            <a:extLst>
+              <a:ext uri="{96DAC541-7B7A-43D3-8B79-37D633B846F1}">
+                <asvg:svgBlip xmlns:asvg="http://schemas.microsoft.com/office/drawing/2016/SVG/main" r:embed="rId2"/>
+              </a:ext>
+            </a:extLst>
+          </a:blip>
+          <a:stretch>
+            <a:fillRect/>
+          </a:stretch>
+        </p:blipFill>
         <p:spPr>
           <a:xfrm>
             <a:off x="822960" y="1463040"/>
             <a:ext cx="5029200" cy="1920240"/>
           </a:xfrm>
-          <a:prstGeom prst="roundRect">
-            <a:avLst>
-              <a:gd name="adj" fmla="val 2857"/>
-            </a:avLst>
-          </a:prstGeom>
-          <a:solidFill>
-            <a:srgbClr val="FFFBF5"/>
+          <a:prstGeom prst="rect">
+            <a:avLst/>
+          </a:prstGeom>
+        </p:spPr>
+      </p:pic>
+      <p:sp>
+        <p:nvSpPr>
+          <p:cNvPr id="10" name="Shape 7"/>
+          <p:cNvSpPr/>
+          <p:nvPr/>
+        </p:nvSpPr>
+        <p:spPr>
+          <a:xfrm>
+            <a:off x="822960" y="1463040"/>
+            <a:ext cx="5029200" cy="1920240"/>
+          </a:xfrm>
+          <a:prstGeom prst="rect">
+            <a:avLst/>
+          </a:prstGeom>
+          <a:solidFill>
+            <a:srgbClr val="FFFBF5">
+              <a:alpha val="0"/>
+            </a:srgbClr>
           </a:solidFill>
           <a:ln w="12700">
             <a:solidFill>
               <a:srgbClr val="E7D8C9">
-                <a:alpha val="90000"/>
-              </a:srgbClr>
-            </a:solidFill>
-            <a:prstDash val="solid"/>
-          </a:ln>
-        </p:spPr>
-      </p:sp>
-      <p:sp>
-        <p:nvSpPr>
-          <p:cNvPr id="10" name="Shape 8"/>
-          <p:cNvSpPr/>
-          <p:nvPr/>
-        </p:nvSpPr>
+                <a:alpha val="0"/>
+              </a:srgbClr>
+            </a:solidFill>
+            <a:prstDash val="solid"/>
+          </a:ln>
+          <a:effectLst>
+            <a:outerShdw sx="100000" sy="100000" kx="0" ky="0" algn="bl" rotWithShape="0" blurRad="12700" dist="50800" dir="2700000">
+              <a:srgbClr val="000000">
+                <a:alpha val="8000"/>
+              </a:srgbClr>
+            </a:outerShdw>
+          </a:effectLst>
+        </p:spPr>
+      </p:sp>
+      <p:pic>
+        <p:nvPicPr>
+          <p:cNvPr id="11" name="Image 1" descr="preencoded.png">    </p:cNvPr>
+          <p:cNvPicPr>
+            <a:picLocks noChangeAspect="1"/>
+          </p:cNvPicPr>
+          <p:nvPr/>
+        </p:nvPicPr>
+        <p:blipFill>
+          <a:blip r:embed="rId3">
+            <a:extLst>
+              <a:ext uri="{96DAC541-7B7A-43D3-8B79-37D633B846F1}">
+                <asvg:svgBlip xmlns:asvg="http://schemas.microsoft.com/office/drawing/2016/SVG/main" r:embed="rId4"/>
+              </a:ext>
+            </a:extLst>
+          </a:blip>
+          <a:stretch>
+            <a:fillRect/>
+          </a:stretch>
+        </p:blipFill>
         <p:spPr>
           <a:xfrm>
             <a:off x="6309360" y="1463040"/>
             <a:ext cx="5029200" cy="1920240"/>
           </a:xfrm>
-          <a:prstGeom prst="roundRect">
-            <a:avLst>
-              <a:gd name="adj" fmla="val 2857"/>
-            </a:avLst>
-          </a:prstGeom>
-          <a:solidFill>
-            <a:srgbClr val="FFFBF5"/>
+          <a:prstGeom prst="rect">
+            <a:avLst/>
+          </a:prstGeom>
+        </p:spPr>
+      </p:pic>
+      <p:sp>
+        <p:nvSpPr>
+          <p:cNvPr id="12" name="Shape 8"/>
+          <p:cNvSpPr/>
+          <p:nvPr/>
+        </p:nvSpPr>
+        <p:spPr>
+          <a:xfrm>
+            <a:off x="6309360" y="1463040"/>
+            <a:ext cx="5029200" cy="1920240"/>
+          </a:xfrm>
+          <a:prstGeom prst="rect">
+            <a:avLst/>
+          </a:prstGeom>
+          <a:solidFill>
+            <a:srgbClr val="FFFBF5">
+              <a:alpha val="0"/>
+            </a:srgbClr>
           </a:solidFill>
           <a:ln w="12700">
             <a:solidFill>
               <a:srgbClr val="E7D8C9">
-                <a:alpha val="90000"/>
-              </a:srgbClr>
-            </a:solidFill>
-            <a:prstDash val="solid"/>
-          </a:ln>
-        </p:spPr>
-      </p:sp>
-      <p:sp>
-        <p:nvSpPr>
-          <p:cNvPr id="11" name="Shape 9"/>
-          <p:cNvSpPr/>
-          <p:nvPr/>
-        </p:nvSpPr>
+                <a:alpha val="0"/>
+              </a:srgbClr>
+            </a:solidFill>
+            <a:prstDash val="solid"/>
+          </a:ln>
+          <a:effectLst>
+            <a:outerShdw sx="100000" sy="100000" kx="0" ky="0" algn="bl" rotWithShape="0" blurRad="12700" dist="50800" dir="2700000">
+              <a:srgbClr val="000000">
+                <a:alpha val="8000"/>
+              </a:srgbClr>
+            </a:outerShdw>
+          </a:effectLst>
+        </p:spPr>
+      </p:sp>
+      <p:pic>
+        <p:nvPicPr>
+          <p:cNvPr id="13" name="Image 2" descr="preencoded.png">    </p:cNvPr>
+          <p:cNvPicPr>
+            <a:picLocks noChangeAspect="1"/>
+          </p:cNvPicPr>
+          <p:nvPr/>
+        </p:nvPicPr>
+        <p:blipFill>
+          <a:blip r:embed="rId5">
+            <a:extLst>
+              <a:ext uri="{96DAC541-7B7A-43D3-8B79-37D633B846F1}">
+                <asvg:svgBlip xmlns:asvg="http://schemas.microsoft.com/office/drawing/2016/SVG/main" r:embed="rId6"/>
+              </a:ext>
+            </a:extLst>
+          </a:blip>
+          <a:stretch>
+            <a:fillRect/>
+          </a:stretch>
+        </p:blipFill>
         <p:spPr>
           <a:xfrm>
             <a:off x="822960" y="3749040"/>
             <a:ext cx="5029200" cy="1920240"/>
           </a:xfrm>
-          <a:prstGeom prst="roundRect">
-            <a:avLst>
-              <a:gd name="adj" fmla="val 2857"/>
-            </a:avLst>
-          </a:prstGeom>
-          <a:solidFill>
-            <a:srgbClr val="FFFBF5"/>
+          <a:prstGeom prst="rect">
+            <a:avLst/>
+          </a:prstGeom>
+        </p:spPr>
+      </p:pic>
+      <p:sp>
+        <p:nvSpPr>
+          <p:cNvPr id="14" name="Shape 9"/>
+          <p:cNvSpPr/>
+          <p:nvPr/>
+        </p:nvSpPr>
+        <p:spPr>
+          <a:xfrm>
+            <a:off x="822960" y="3749040"/>
+            <a:ext cx="5029200" cy="1920240"/>
+          </a:xfrm>
+          <a:prstGeom prst="rect">
+            <a:avLst/>
+          </a:prstGeom>
+          <a:solidFill>
+            <a:srgbClr val="FFFBF5">
+              <a:alpha val="0"/>
+            </a:srgbClr>
           </a:solidFill>
           <a:ln w="12700">
             <a:solidFill>
               <a:srgbClr val="E7D8C9">
-                <a:alpha val="90000"/>
-              </a:srgbClr>
-            </a:solidFill>
-            <a:prstDash val="solid"/>
-          </a:ln>
-        </p:spPr>
-      </p:sp>
-      <p:sp>
-        <p:nvSpPr>
-          <p:cNvPr id="12" name="Shape 10"/>
-          <p:cNvSpPr/>
-          <p:nvPr/>
-        </p:nvSpPr>
+                <a:alpha val="0"/>
+              </a:srgbClr>
+            </a:solidFill>
+            <a:prstDash val="solid"/>
+          </a:ln>
+          <a:effectLst>
+            <a:outerShdw sx="100000" sy="100000" kx="0" ky="0" algn="bl" rotWithShape="0" blurRad="12700" dist="50800" dir="2700000">
+              <a:srgbClr val="000000">
+                <a:alpha val="8000"/>
+              </a:srgbClr>
+            </a:outerShdw>
+          </a:effectLst>
+        </p:spPr>
+      </p:sp>
+      <p:pic>
+        <p:nvPicPr>
+          <p:cNvPr id="15" name="Image 3" descr="preencoded.png">    </p:cNvPr>
+          <p:cNvPicPr>
+            <a:picLocks noChangeAspect="1"/>
+          </p:cNvPicPr>
+          <p:nvPr/>
+        </p:nvPicPr>
+        <p:blipFill>
+          <a:blip r:embed="rId7">
+            <a:extLst>
+              <a:ext uri="{96DAC541-7B7A-43D3-8B79-37D633B846F1}">
+                <asvg:svgBlip xmlns:asvg="http://schemas.microsoft.com/office/drawing/2016/SVG/main" r:embed="rId8"/>
+              </a:ext>
+            </a:extLst>
+          </a:blip>
+          <a:stretch>
+            <a:fillRect/>
+          </a:stretch>
+        </p:blipFill>
         <p:spPr>
           <a:xfrm>
             <a:off x="6309360" y="3749040"/>
             <a:ext cx="5029200" cy="1920240"/>
           </a:xfrm>
-          <a:prstGeom prst="roundRect">
-            <a:avLst>
-              <a:gd name="adj" fmla="val 2857"/>
-            </a:avLst>
-          </a:prstGeom>
-          <a:solidFill>
-            <a:srgbClr val="FFFBF5"/>
+          <a:prstGeom prst="rect">
+            <a:avLst/>
+          </a:prstGeom>
+        </p:spPr>
+      </p:pic>
+      <p:sp>
+        <p:nvSpPr>
+          <p:cNvPr id="16" name="Shape 10"/>
+          <p:cNvSpPr/>
+          <p:nvPr/>
+        </p:nvSpPr>
+        <p:spPr>
+          <a:xfrm>
+            <a:off x="6309360" y="3749040"/>
+            <a:ext cx="5029200" cy="1920240"/>
+          </a:xfrm>
+          <a:prstGeom prst="rect">
+            <a:avLst/>
+          </a:prstGeom>
+          <a:solidFill>
+            <a:srgbClr val="FFFBF5">
+              <a:alpha val="0"/>
+            </a:srgbClr>
           </a:solidFill>
           <a:ln w="12700">
             <a:solidFill>
               <a:srgbClr val="E7D8C9">
-                <a:alpha val="90000"/>
-              </a:srgbClr>
-            </a:solidFill>
-            <a:prstDash val="solid"/>
-          </a:ln>
-        </p:spPr>
-      </p:sp>
-      <p:sp>
-        <p:nvSpPr>
-          <p:cNvPr id="13" name="Text 11"/>
+                <a:alpha val="0"/>
+              </a:srgbClr>
+            </a:solidFill>
+            <a:prstDash val="solid"/>
+          </a:ln>
+          <a:effectLst>
+            <a:outerShdw sx="100000" sy="100000" kx="0" ky="0" algn="bl" rotWithShape="0" blurRad="12700" dist="50800" dir="2700000">
+              <a:srgbClr val="000000">
+                <a:alpha val="8000"/>
+              </a:srgbClr>
+            </a:outerShdw>
+          </a:effectLst>
+        </p:spPr>
+      </p:sp>
+      <p:sp>
+        <p:nvSpPr>
+          <p:cNvPr id="17" name="Text 11"/>
           <p:cNvSpPr txBox="1"/>
           <p:nvPr/>
         </p:nvSpPr>
@@ -6818,9 +6788,7 @@
           <a:ln/>
         </p:spPr>
         <p:txBody>
-          <a:bodyPr wrap="square" lIns="0" tIns="0" rIns="0" bIns="0" rtlCol="0" anchor="ctr">
-            <a:normAutofit/>
-          </a:bodyPr>
+          <a:bodyPr wrap="square" lIns="0" tIns="0" rIns="0" bIns="0" rtlCol="0" anchor="ctr"/>
           <a:lstStyle/>
           <a:p>
             <a:pPr algn="ctr" indent="0" marL="0">
@@ -6846,7 +6814,7 @@
       </p:sp>
       <p:sp>
         <p:nvSpPr>
-          <p:cNvPr id="14" name="Shape 12"/>
+          <p:cNvPr id="18" name="Shape 12"/>
           <p:cNvSpPr/>
           <p:nvPr/>
         </p:nvSpPr>
@@ -6871,144 +6839,39 @@
           </a:ln>
         </p:spPr>
       </p:sp>
-      <p:sp>
-        <p:nvSpPr>
-          <p:cNvPr id="15" name="Shape 13"/>
-          <p:cNvSpPr/>
-          <p:nvPr/>
-        </p:nvSpPr>
-        <p:spPr>
-          <a:xfrm>
-            <a:off x="1110722" y="2378918"/>
-            <a:ext cx="63203" cy="63203"/>
-          </a:xfrm>
-          <a:prstGeom prst="ellipse">
-            <a:avLst/>
-          </a:prstGeom>
-          <a:solidFill>
-            <a:srgbClr val="1F2937"/>
-          </a:solidFill>
-          <a:ln w="12700">
-            <a:solidFill>
-              <a:srgbClr val="1F2937">
-                <a:alpha val="0"/>
-              </a:srgbClr>
-            </a:solidFill>
-            <a:prstDash val="solid"/>
-          </a:ln>
-        </p:spPr>
-      </p:sp>
-      <p:sp>
-        <p:nvSpPr>
-          <p:cNvPr id="16" name="Shape 14"/>
-          <p:cNvSpPr/>
-          <p:nvPr/>
-        </p:nvSpPr>
-        <p:spPr>
-          <a:xfrm>
-            <a:off x="1230808" y="2378918"/>
-            <a:ext cx="63203" cy="63203"/>
-          </a:xfrm>
-          <a:prstGeom prst="ellipse">
-            <a:avLst/>
-          </a:prstGeom>
-          <a:solidFill>
-            <a:srgbClr val="1F2937"/>
-          </a:solidFill>
-          <a:ln w="12700">
-            <a:solidFill>
-              <a:srgbClr val="1F2937">
-                <a:alpha val="0"/>
-              </a:srgbClr>
-            </a:solidFill>
-            <a:prstDash val="solid"/>
-          </a:ln>
-        </p:spPr>
-      </p:sp>
-      <p:sp>
-        <p:nvSpPr>
-          <p:cNvPr id="17" name="Shape 15"/>
-          <p:cNvSpPr/>
-          <p:nvPr/>
-        </p:nvSpPr>
-        <p:spPr>
-          <a:xfrm>
-            <a:off x="1350894" y="2378918"/>
-            <a:ext cx="63203" cy="63203"/>
-          </a:xfrm>
-          <a:prstGeom prst="ellipse">
-            <a:avLst/>
-          </a:prstGeom>
-          <a:solidFill>
-            <a:srgbClr val="1F2937"/>
-          </a:solidFill>
-          <a:ln w="12700">
-            <a:solidFill>
-              <a:srgbClr val="1F2937">
-                <a:alpha val="0"/>
-              </a:srgbClr>
-            </a:solidFill>
-            <a:prstDash val="solid"/>
-          </a:ln>
-        </p:spPr>
-      </p:sp>
-      <p:sp>
-        <p:nvSpPr>
-          <p:cNvPr id="18" name="Shape 16"/>
-          <p:cNvSpPr/>
-          <p:nvPr/>
-        </p:nvSpPr>
-        <p:spPr>
-          <a:xfrm>
-            <a:off x="1173925" y="2407359"/>
-            <a:ext cx="69524" cy="14221"/>
-          </a:xfrm>
-          <a:prstGeom prst="rect">
-            <a:avLst/>
-          </a:prstGeom>
-          <a:solidFill>
-            <a:srgbClr val="1F2937"/>
-          </a:solidFill>
-          <a:ln w="12700">
-            <a:solidFill>
-              <a:srgbClr val="1F2937">
-                <a:alpha val="0"/>
-              </a:srgbClr>
-            </a:solidFill>
-            <a:prstDash val="solid"/>
-          </a:ln>
-        </p:spPr>
-      </p:sp>
-      <p:sp>
-        <p:nvSpPr>
-          <p:cNvPr id="19" name="Shape 17"/>
-          <p:cNvSpPr/>
-          <p:nvPr/>
-        </p:nvSpPr>
-        <p:spPr>
-          <a:xfrm>
-            <a:off x="1294011" y="2407359"/>
-            <a:ext cx="69524" cy="14221"/>
-          </a:xfrm>
-          <a:prstGeom prst="rect">
-            <a:avLst/>
-          </a:prstGeom>
-          <a:solidFill>
-            <a:srgbClr val="1F2937"/>
-          </a:solidFill>
-          <a:ln w="12700">
-            <a:solidFill>
-              <a:srgbClr val="1F2937">
-                <a:alpha val="0"/>
-              </a:srgbClr>
-            </a:solidFill>
-            <a:prstDash val="solid"/>
-          </a:ln>
-        </p:spPr>
-      </p:sp>
-      <p:sp>
-        <p:nvSpPr>
-          <p:cNvPr id="20" name="Text 18"/>
+      <p:pic>
+        <p:nvPicPr>
+          <p:cNvPr id="19" name="Image 4" descr="palette icon from tabler-icons (MIT)">    </p:cNvPr>
+          <p:cNvPicPr>
+            <a:picLocks noChangeAspect="1"/>
+          </p:cNvPicPr>
+          <p:nvPr/>
+        </p:nvPicPr>
+        <p:blipFill>
+          <a:blip r:embed="rId9">
+            <a:extLst>
+              <a:ext uri="{96DAC541-7B7A-43D3-8B79-37D633B846F1}">
+                <asvg:svgBlip xmlns:asvg="http://schemas.microsoft.com/office/drawing/2016/SVG/main" r:embed="rId10"/>
+              </a:ext>
+            </a:extLst>
+          </a:blip>
+          <a:stretch>
+            <a:fillRect/>
+          </a:stretch>
+        </p:blipFill>
+        <p:spPr>
+          <a:xfrm>
+            <a:off x="1049274" y="2203704"/>
+            <a:ext cx="438912" cy="438912"/>
+          </a:xfrm>
+          <a:prstGeom prst="rect">
+            <a:avLst/>
+          </a:prstGeom>
+        </p:spPr>
+      </p:pic>
+      <p:sp>
+        <p:nvSpPr>
+          <p:cNvPr id="20" name="Text 13"/>
           <p:cNvSpPr txBox="1"/>
           <p:nvPr/>
         </p:nvSpPr>
@@ -7027,7 +6890,7 @@
           <a:bodyPr wrap="square" lIns="0" tIns="25400" rIns="25400" bIns="0" rtlCol="0" anchor="ctr"/>
           <a:lstStyle/>
           <a:p>
-            <a:pPr algn="l" indent="0" marL="0">
+            <a:pPr algn="ctr" indent="0" marL="0">
               <a:lnSpc>
                 <a:spcPct val="120000"/>
               </a:lnSpc>
@@ -7050,7 +6913,7 @@
       </p:sp>
       <p:sp>
         <p:nvSpPr>
-          <p:cNvPr id="21" name="Shape 19"/>
+          <p:cNvPr id="21" name="Shape 14"/>
           <p:cNvSpPr/>
           <p:nvPr/>
         </p:nvSpPr>
@@ -7075,63 +6938,39 @@
           </a:ln>
         </p:spPr>
       </p:sp>
-      <p:sp>
-        <p:nvSpPr>
-          <p:cNvPr id="22" name="Shape 20"/>
-          <p:cNvSpPr/>
-          <p:nvPr/>
-        </p:nvSpPr>
-        <p:spPr>
-          <a:xfrm rot="10800000">
-            <a:off x="6635044" y="2284113"/>
-            <a:ext cx="240173" cy="265454"/>
-          </a:xfrm>
-          <a:prstGeom prst="pentagon">
-            <a:avLst/>
-          </a:prstGeom>
-          <a:solidFill>
-            <a:srgbClr val="1F2937"/>
-          </a:solidFill>
-          <a:ln w="12700">
-            <a:solidFill>
-              <a:srgbClr val="1F2937">
-                <a:alpha val="0"/>
-              </a:srgbClr>
-            </a:solidFill>
-            <a:prstDash val="solid"/>
-          </a:ln>
-        </p:spPr>
-      </p:sp>
-      <p:sp>
-        <p:nvSpPr>
-          <p:cNvPr id="23" name="Shape 21"/>
-          <p:cNvSpPr/>
-          <p:nvPr/>
-        </p:nvSpPr>
-        <p:spPr>
-          <a:xfrm rot="2100000">
-            <a:off x="6739329" y="2353636"/>
-            <a:ext cx="34762" cy="120086"/>
-          </a:xfrm>
-          <a:prstGeom prst="rect">
-            <a:avLst/>
-          </a:prstGeom>
-          <a:solidFill>
-            <a:srgbClr val="F7F3EF"/>
-          </a:solidFill>
-          <a:ln w="12700">
-            <a:solidFill>
-              <a:srgbClr val="F7F3EF">
-                <a:alpha val="0"/>
-              </a:srgbClr>
-            </a:solidFill>
-            <a:prstDash val="solid"/>
-          </a:ln>
-        </p:spPr>
-      </p:sp>
-      <p:sp>
-        <p:nvSpPr>
-          <p:cNvPr id="24" name="Text 22"/>
+      <p:pic>
+        <p:nvPicPr>
+          <p:cNvPr id="22" name="Image 5" descr="palette icon from tabler-icons (MIT)">    </p:cNvPr>
+          <p:cNvPicPr>
+            <a:picLocks noChangeAspect="1"/>
+          </p:cNvPicPr>
+          <p:nvPr/>
+        </p:nvPicPr>
+        <p:blipFill>
+          <a:blip r:embed="rId11">
+            <a:extLst>
+              <a:ext uri="{96DAC541-7B7A-43D3-8B79-37D633B846F1}">
+                <asvg:svgBlip xmlns:asvg="http://schemas.microsoft.com/office/drawing/2016/SVG/main" r:embed="rId12"/>
+              </a:ext>
+            </a:extLst>
+          </a:blip>
+          <a:stretch>
+            <a:fillRect/>
+          </a:stretch>
+        </p:blipFill>
+        <p:spPr>
+          <a:xfrm>
+            <a:off x="6535674" y="2203704"/>
+            <a:ext cx="438912" cy="438912"/>
+          </a:xfrm>
+          <a:prstGeom prst="rect">
+            <a:avLst/>
+          </a:prstGeom>
+        </p:spPr>
+      </p:pic>
+      <p:sp>
+        <p:nvSpPr>
+          <p:cNvPr id="23" name="Text 15"/>
           <p:cNvSpPr txBox="1"/>
           <p:nvPr/>
         </p:nvSpPr>
@@ -7150,7 +6989,7 @@
           <a:bodyPr wrap="square" lIns="0" tIns="25400" rIns="25400" bIns="0" rtlCol="0" anchor="ctr"/>
           <a:lstStyle/>
           <a:p>
-            <a:pPr algn="l" indent="0" marL="0">
+            <a:pPr algn="ctr" indent="0" marL="0">
               <a:lnSpc>
                 <a:spcPct val="120000"/>
               </a:lnSpc>
@@ -7173,7 +7012,7 @@
       </p:sp>
       <p:sp>
         <p:nvSpPr>
-          <p:cNvPr id="25" name="Shape 23"/>
+          <p:cNvPr id="24" name="Shape 16"/>
           <p:cNvSpPr/>
           <p:nvPr/>
         </p:nvSpPr>
@@ -7198,90 +7037,39 @@
           </a:ln>
         </p:spPr>
       </p:sp>
-      <p:sp>
-        <p:nvSpPr>
-          <p:cNvPr id="26" name="Shape 24"/>
-          <p:cNvSpPr/>
-          <p:nvPr/>
-        </p:nvSpPr>
-        <p:spPr>
-          <a:xfrm>
-            <a:off x="1199206" y="4551152"/>
-            <a:ext cx="101125" cy="101125"/>
-          </a:xfrm>
-          <a:prstGeom prst="diamond">
-            <a:avLst/>
-          </a:prstGeom>
-          <a:solidFill>
-            <a:srgbClr val="1F2937"/>
-          </a:solidFill>
-          <a:ln w="12700">
-            <a:solidFill>
-              <a:srgbClr val="1F2937">
-                <a:alpha val="0"/>
-              </a:srgbClr>
-            </a:solidFill>
-            <a:prstDash val="solid"/>
-          </a:ln>
-        </p:spPr>
-      </p:sp>
-      <p:sp>
-        <p:nvSpPr>
-          <p:cNvPr id="27" name="Shape 25"/>
-          <p:cNvSpPr/>
-          <p:nvPr/>
-        </p:nvSpPr>
-        <p:spPr>
-          <a:xfrm>
-            <a:off x="1126523" y="4693359"/>
-            <a:ext cx="63203" cy="63203"/>
-          </a:xfrm>
-          <a:prstGeom prst="diamond">
-            <a:avLst/>
-          </a:prstGeom>
-          <a:solidFill>
-            <a:srgbClr val="1F2937"/>
-          </a:solidFill>
-          <a:ln w="12700">
-            <a:solidFill>
-              <a:srgbClr val="1F2937">
-                <a:alpha val="0"/>
-              </a:srgbClr>
-            </a:solidFill>
-            <a:prstDash val="solid"/>
-          </a:ln>
-        </p:spPr>
-      </p:sp>
-      <p:sp>
-        <p:nvSpPr>
-          <p:cNvPr id="28" name="Shape 26"/>
-          <p:cNvSpPr/>
-          <p:nvPr/>
-        </p:nvSpPr>
-        <p:spPr>
-          <a:xfrm>
-            <a:off x="1306652" y="4724961"/>
-            <a:ext cx="69524" cy="69524"/>
-          </a:xfrm>
-          <a:prstGeom prst="diamond">
-            <a:avLst/>
-          </a:prstGeom>
-          <a:solidFill>
-            <a:srgbClr val="1F2937"/>
-          </a:solidFill>
-          <a:ln w="12700">
-            <a:solidFill>
-              <a:srgbClr val="1F2937">
-                <a:alpha val="0"/>
-              </a:srgbClr>
-            </a:solidFill>
-            <a:prstDash val="solid"/>
-          </a:ln>
-        </p:spPr>
-      </p:sp>
-      <p:sp>
-        <p:nvSpPr>
-          <p:cNvPr id="29" name="Text 27"/>
+      <p:pic>
+        <p:nvPicPr>
+          <p:cNvPr id="25" name="Image 6" descr="palette icon from tabler-icons (MIT)">    </p:cNvPr>
+          <p:cNvPicPr>
+            <a:picLocks noChangeAspect="1"/>
+          </p:cNvPicPr>
+          <p:nvPr/>
+        </p:nvPicPr>
+        <p:blipFill>
+          <a:blip r:embed="rId13">
+            <a:extLst>
+              <a:ext uri="{96DAC541-7B7A-43D3-8B79-37D633B846F1}">
+                <asvg:svgBlip xmlns:asvg="http://schemas.microsoft.com/office/drawing/2016/SVG/main" r:embed="rId14"/>
+              </a:ext>
+            </a:extLst>
+          </a:blip>
+          <a:stretch>
+            <a:fillRect/>
+          </a:stretch>
+        </p:blipFill>
+        <p:spPr>
+          <a:xfrm>
+            <a:off x="1049274" y="4489704"/>
+            <a:ext cx="438912" cy="438912"/>
+          </a:xfrm>
+          <a:prstGeom prst="rect">
+            <a:avLst/>
+          </a:prstGeom>
+        </p:spPr>
+      </p:pic>
+      <p:sp>
+        <p:nvSpPr>
+          <p:cNvPr id="26" name="Text 17"/>
           <p:cNvSpPr txBox="1"/>
           <p:nvPr/>
         </p:nvSpPr>
@@ -7300,7 +7088,7 @@
           <a:bodyPr wrap="square" lIns="0" tIns="25400" rIns="25400" bIns="0" rtlCol="0" anchor="ctr"/>
           <a:lstStyle/>
           <a:p>
-            <a:pPr algn="l" indent="0" marL="0">
+            <a:pPr algn="ctr" indent="0" marL="0">
               <a:lnSpc>
                 <a:spcPct val="120000"/>
               </a:lnSpc>
@@ -7323,7 +7111,7 @@
       </p:sp>
       <p:sp>
         <p:nvSpPr>
-          <p:cNvPr id="30" name="Shape 28"/>
+          <p:cNvPr id="27" name="Shape 18"/>
           <p:cNvSpPr/>
           <p:nvPr/>
         </p:nvSpPr>
@@ -7348,90 +7136,39 @@
           </a:ln>
         </p:spPr>
       </p:sp>
-      <p:sp>
-        <p:nvSpPr>
-          <p:cNvPr id="31" name="Shape 29"/>
-          <p:cNvSpPr/>
-          <p:nvPr/>
-        </p:nvSpPr>
-        <p:spPr>
-          <a:xfrm>
-            <a:off x="6647684" y="4687039"/>
-            <a:ext cx="41082" cy="110606"/>
-          </a:xfrm>
-          <a:prstGeom prst="rect">
-            <a:avLst/>
-          </a:prstGeom>
-          <a:solidFill>
-            <a:srgbClr val="1F2937"/>
-          </a:solidFill>
-          <a:ln w="12700">
-            <a:solidFill>
-              <a:srgbClr val="1F2937">
-                <a:alpha val="0"/>
-              </a:srgbClr>
-            </a:solidFill>
-            <a:prstDash val="solid"/>
-          </a:ln>
-        </p:spPr>
-      </p:sp>
-      <p:sp>
-        <p:nvSpPr>
-          <p:cNvPr id="32" name="Shape 30"/>
-          <p:cNvSpPr/>
-          <p:nvPr/>
-        </p:nvSpPr>
-        <p:spPr>
-          <a:xfrm>
-            <a:off x="6726689" y="4601714"/>
-            <a:ext cx="41082" cy="195930"/>
-          </a:xfrm>
-          <a:prstGeom prst="rect">
-            <a:avLst/>
-          </a:prstGeom>
-          <a:solidFill>
-            <a:srgbClr val="1F2937"/>
-          </a:solidFill>
-          <a:ln w="12700">
-            <a:solidFill>
-              <a:srgbClr val="1F2937">
-                <a:alpha val="0"/>
-              </a:srgbClr>
-            </a:solidFill>
-            <a:prstDash val="solid"/>
-          </a:ln>
-        </p:spPr>
-      </p:sp>
-      <p:sp>
-        <p:nvSpPr>
-          <p:cNvPr id="33" name="Shape 31"/>
-          <p:cNvSpPr/>
-          <p:nvPr/>
-        </p:nvSpPr>
-        <p:spPr>
-          <a:xfrm>
-            <a:off x="6805693" y="4645957"/>
-            <a:ext cx="41082" cy="151688"/>
-          </a:xfrm>
-          <a:prstGeom prst="rect">
-            <a:avLst/>
-          </a:prstGeom>
-          <a:solidFill>
-            <a:srgbClr val="1F2937"/>
-          </a:solidFill>
-          <a:ln w="12700">
-            <a:solidFill>
-              <a:srgbClr val="1F2937">
-                <a:alpha val="0"/>
-              </a:srgbClr>
-            </a:solidFill>
-            <a:prstDash val="solid"/>
-          </a:ln>
-        </p:spPr>
-      </p:sp>
-      <p:sp>
-        <p:nvSpPr>
-          <p:cNvPr id="34" name="Text 32"/>
+      <p:pic>
+        <p:nvPicPr>
+          <p:cNvPr id="28" name="Image 7" descr="table icon from tabler-icons (MIT)">    </p:cNvPr>
+          <p:cNvPicPr>
+            <a:picLocks noChangeAspect="1"/>
+          </p:cNvPicPr>
+          <p:nvPr/>
+        </p:nvPicPr>
+        <p:blipFill>
+          <a:blip r:embed="rId15">
+            <a:extLst>
+              <a:ext uri="{96DAC541-7B7A-43D3-8B79-37D633B846F1}">
+                <asvg:svgBlip xmlns:asvg="http://schemas.microsoft.com/office/drawing/2016/SVG/main" r:embed="rId16"/>
+              </a:ext>
+            </a:extLst>
+          </a:blip>
+          <a:stretch>
+            <a:fillRect/>
+          </a:stretch>
+        </p:blipFill>
+        <p:spPr>
+          <a:xfrm>
+            <a:off x="6535674" y="4489704"/>
+            <a:ext cx="438912" cy="438912"/>
+          </a:xfrm>
+          <a:prstGeom prst="rect">
+            <a:avLst/>
+          </a:prstGeom>
+        </p:spPr>
+      </p:pic>
+      <p:sp>
+        <p:nvSpPr>
+          <p:cNvPr id="29" name="Text 19"/>
           <p:cNvSpPr txBox="1"/>
           <p:nvPr/>
         </p:nvSpPr>
@@ -7450,7 +7187,7 @@
           <a:bodyPr wrap="square" lIns="0" tIns="25400" rIns="25400" bIns="0" rtlCol="0" anchor="ctr"/>
           <a:lstStyle/>
           <a:p>
-            <a:pPr algn="l" indent="0" marL="0">
+            <a:pPr algn="ctr" indent="0" marL="0">
               <a:lnSpc>
                 <a:spcPct val="120000"/>
               </a:lnSpc>
@@ -7692,125 +7429,273 @@
           </a:ln>
         </p:spPr>
       </p:sp>
-      <p:sp>
-        <p:nvSpPr>
-          <p:cNvPr id="9" name="Shape 7"/>
-          <p:cNvSpPr/>
-          <p:nvPr/>
-        </p:nvSpPr>
+      <p:pic>
+        <p:nvPicPr>
+          <p:cNvPr id="9" name="Image 0" descr="preencoded.png">    </p:cNvPr>
+          <p:cNvPicPr>
+            <a:picLocks noChangeAspect="1"/>
+          </p:cNvPicPr>
+          <p:nvPr/>
+        </p:nvPicPr>
+        <p:blipFill>
+          <a:blip r:embed="rId1">
+            <a:extLst>
+              <a:ext uri="{96DAC541-7B7A-43D3-8B79-37D633B846F1}">
+                <asvg:svgBlip xmlns:asvg="http://schemas.microsoft.com/office/drawing/2016/SVG/main" r:embed="rId2"/>
+              </a:ext>
+            </a:extLst>
+          </a:blip>
+          <a:stretch>
+            <a:fillRect/>
+          </a:stretch>
+        </p:blipFill>
         <p:spPr>
           <a:xfrm>
             <a:off x="822960" y="1463040"/>
             <a:ext cx="5029200" cy="1920240"/>
           </a:xfrm>
-          <a:prstGeom prst="roundRect">
-            <a:avLst>
-              <a:gd name="adj" fmla="val 2857"/>
-            </a:avLst>
-          </a:prstGeom>
-          <a:solidFill>
-            <a:srgbClr val="FFFBF5"/>
+          <a:prstGeom prst="rect">
+            <a:avLst/>
+          </a:prstGeom>
+        </p:spPr>
+      </p:pic>
+      <p:sp>
+        <p:nvSpPr>
+          <p:cNvPr id="10" name="Shape 7"/>
+          <p:cNvSpPr/>
+          <p:nvPr/>
+        </p:nvSpPr>
+        <p:spPr>
+          <a:xfrm>
+            <a:off x="822960" y="1463040"/>
+            <a:ext cx="5029200" cy="1920240"/>
+          </a:xfrm>
+          <a:prstGeom prst="rect">
+            <a:avLst/>
+          </a:prstGeom>
+          <a:solidFill>
+            <a:srgbClr val="FFFBF5">
+              <a:alpha val="0"/>
+            </a:srgbClr>
           </a:solidFill>
           <a:ln w="12700">
             <a:solidFill>
               <a:srgbClr val="E7D8C9">
-                <a:alpha val="90000"/>
-              </a:srgbClr>
-            </a:solidFill>
-            <a:prstDash val="solid"/>
-          </a:ln>
-        </p:spPr>
-      </p:sp>
-      <p:sp>
-        <p:nvSpPr>
-          <p:cNvPr id="10" name="Shape 8"/>
-          <p:cNvSpPr/>
-          <p:nvPr/>
-        </p:nvSpPr>
+                <a:alpha val="0"/>
+              </a:srgbClr>
+            </a:solidFill>
+            <a:prstDash val="solid"/>
+          </a:ln>
+          <a:effectLst>
+            <a:outerShdw sx="100000" sy="100000" kx="0" ky="0" algn="bl" rotWithShape="0" blurRad="12700" dist="50800" dir="2700000">
+              <a:srgbClr val="000000">
+                <a:alpha val="8000"/>
+              </a:srgbClr>
+            </a:outerShdw>
+          </a:effectLst>
+        </p:spPr>
+      </p:sp>
+      <p:pic>
+        <p:nvPicPr>
+          <p:cNvPr id="11" name="Image 1" descr="preencoded.png">    </p:cNvPr>
+          <p:cNvPicPr>
+            <a:picLocks noChangeAspect="1"/>
+          </p:cNvPicPr>
+          <p:nvPr/>
+        </p:nvPicPr>
+        <p:blipFill>
+          <a:blip r:embed="rId3">
+            <a:extLst>
+              <a:ext uri="{96DAC541-7B7A-43D3-8B79-37D633B846F1}">
+                <asvg:svgBlip xmlns:asvg="http://schemas.microsoft.com/office/drawing/2016/SVG/main" r:embed="rId4"/>
+              </a:ext>
+            </a:extLst>
+          </a:blip>
+          <a:stretch>
+            <a:fillRect/>
+          </a:stretch>
+        </p:blipFill>
         <p:spPr>
           <a:xfrm>
             <a:off x="6309360" y="1463040"/>
             <a:ext cx="5029200" cy="1920240"/>
           </a:xfrm>
-          <a:prstGeom prst="roundRect">
-            <a:avLst>
-              <a:gd name="adj" fmla="val 2857"/>
-            </a:avLst>
-          </a:prstGeom>
-          <a:solidFill>
-            <a:srgbClr val="FFFBF5"/>
+          <a:prstGeom prst="rect">
+            <a:avLst/>
+          </a:prstGeom>
+        </p:spPr>
+      </p:pic>
+      <p:sp>
+        <p:nvSpPr>
+          <p:cNvPr id="12" name="Shape 8"/>
+          <p:cNvSpPr/>
+          <p:nvPr/>
+        </p:nvSpPr>
+        <p:spPr>
+          <a:xfrm>
+            <a:off x="6309360" y="1463040"/>
+            <a:ext cx="5029200" cy="1920240"/>
+          </a:xfrm>
+          <a:prstGeom prst="rect">
+            <a:avLst/>
+          </a:prstGeom>
+          <a:solidFill>
+            <a:srgbClr val="FFFBF5">
+              <a:alpha val="0"/>
+            </a:srgbClr>
           </a:solidFill>
           <a:ln w="12700">
             <a:solidFill>
               <a:srgbClr val="E7D8C9">
-                <a:alpha val="90000"/>
-              </a:srgbClr>
-            </a:solidFill>
-            <a:prstDash val="solid"/>
-          </a:ln>
-        </p:spPr>
-      </p:sp>
-      <p:sp>
-        <p:nvSpPr>
-          <p:cNvPr id="11" name="Shape 9"/>
-          <p:cNvSpPr/>
-          <p:nvPr/>
-        </p:nvSpPr>
+                <a:alpha val="0"/>
+              </a:srgbClr>
+            </a:solidFill>
+            <a:prstDash val="solid"/>
+          </a:ln>
+          <a:effectLst>
+            <a:outerShdw sx="100000" sy="100000" kx="0" ky="0" algn="bl" rotWithShape="0" blurRad="12700" dist="50800" dir="2700000">
+              <a:srgbClr val="000000">
+                <a:alpha val="8000"/>
+              </a:srgbClr>
+            </a:outerShdw>
+          </a:effectLst>
+        </p:spPr>
+      </p:sp>
+      <p:pic>
+        <p:nvPicPr>
+          <p:cNvPr id="13" name="Image 2" descr="preencoded.png">    </p:cNvPr>
+          <p:cNvPicPr>
+            <a:picLocks noChangeAspect="1"/>
+          </p:cNvPicPr>
+          <p:nvPr/>
+        </p:nvPicPr>
+        <p:blipFill>
+          <a:blip r:embed="rId5">
+            <a:extLst>
+              <a:ext uri="{96DAC541-7B7A-43D3-8B79-37D633B846F1}">
+                <asvg:svgBlip xmlns:asvg="http://schemas.microsoft.com/office/drawing/2016/SVG/main" r:embed="rId6"/>
+              </a:ext>
+            </a:extLst>
+          </a:blip>
+          <a:stretch>
+            <a:fillRect/>
+          </a:stretch>
+        </p:blipFill>
         <p:spPr>
           <a:xfrm>
             <a:off x="822960" y="3749040"/>
             <a:ext cx="5029200" cy="1920240"/>
           </a:xfrm>
-          <a:prstGeom prst="roundRect">
-            <a:avLst>
-              <a:gd name="adj" fmla="val 2857"/>
-            </a:avLst>
-          </a:prstGeom>
-          <a:solidFill>
-            <a:srgbClr val="FFFBF5"/>
+          <a:prstGeom prst="rect">
+            <a:avLst/>
+          </a:prstGeom>
+        </p:spPr>
+      </p:pic>
+      <p:sp>
+        <p:nvSpPr>
+          <p:cNvPr id="14" name="Shape 9"/>
+          <p:cNvSpPr/>
+          <p:nvPr/>
+        </p:nvSpPr>
+        <p:spPr>
+          <a:xfrm>
+            <a:off x="822960" y="3749040"/>
+            <a:ext cx="5029200" cy="1920240"/>
+          </a:xfrm>
+          <a:prstGeom prst="rect">
+            <a:avLst/>
+          </a:prstGeom>
+          <a:solidFill>
+            <a:srgbClr val="FFFBF5">
+              <a:alpha val="0"/>
+            </a:srgbClr>
           </a:solidFill>
           <a:ln w="12700">
             <a:solidFill>
               <a:srgbClr val="E7D8C9">
-                <a:alpha val="90000"/>
-              </a:srgbClr>
-            </a:solidFill>
-            <a:prstDash val="solid"/>
-          </a:ln>
-        </p:spPr>
-      </p:sp>
-      <p:sp>
-        <p:nvSpPr>
-          <p:cNvPr id="12" name="Shape 10"/>
-          <p:cNvSpPr/>
-          <p:nvPr/>
-        </p:nvSpPr>
+                <a:alpha val="0"/>
+              </a:srgbClr>
+            </a:solidFill>
+            <a:prstDash val="solid"/>
+          </a:ln>
+          <a:effectLst>
+            <a:outerShdw sx="100000" sy="100000" kx="0" ky="0" algn="bl" rotWithShape="0" blurRad="12700" dist="50800" dir="2700000">
+              <a:srgbClr val="000000">
+                <a:alpha val="8000"/>
+              </a:srgbClr>
+            </a:outerShdw>
+          </a:effectLst>
+        </p:spPr>
+      </p:sp>
+      <p:pic>
+        <p:nvPicPr>
+          <p:cNvPr id="15" name="Image 3" descr="preencoded.png">    </p:cNvPr>
+          <p:cNvPicPr>
+            <a:picLocks noChangeAspect="1"/>
+          </p:cNvPicPr>
+          <p:nvPr/>
+        </p:nvPicPr>
+        <p:blipFill>
+          <a:blip r:embed="rId7">
+            <a:extLst>
+              <a:ext uri="{96DAC541-7B7A-43D3-8B79-37D633B846F1}">
+                <asvg:svgBlip xmlns:asvg="http://schemas.microsoft.com/office/drawing/2016/SVG/main" r:embed="rId8"/>
+              </a:ext>
+            </a:extLst>
+          </a:blip>
+          <a:stretch>
+            <a:fillRect/>
+          </a:stretch>
+        </p:blipFill>
         <p:spPr>
           <a:xfrm>
             <a:off x="6309360" y="3749040"/>
             <a:ext cx="5029200" cy="1920240"/>
           </a:xfrm>
-          <a:prstGeom prst="roundRect">
-            <a:avLst>
-              <a:gd name="adj" fmla="val 2857"/>
-            </a:avLst>
-          </a:prstGeom>
-          <a:solidFill>
-            <a:srgbClr val="FFFBF5"/>
+          <a:prstGeom prst="rect">
+            <a:avLst/>
+          </a:prstGeom>
+        </p:spPr>
+      </p:pic>
+      <p:sp>
+        <p:nvSpPr>
+          <p:cNvPr id="16" name="Shape 10"/>
+          <p:cNvSpPr/>
+          <p:nvPr/>
+        </p:nvSpPr>
+        <p:spPr>
+          <a:xfrm>
+            <a:off x="6309360" y="3749040"/>
+            <a:ext cx="5029200" cy="1920240"/>
+          </a:xfrm>
+          <a:prstGeom prst="rect">
+            <a:avLst/>
+          </a:prstGeom>
+          <a:solidFill>
+            <a:srgbClr val="FFFBF5">
+              <a:alpha val="0"/>
+            </a:srgbClr>
           </a:solidFill>
           <a:ln w="12700">
             <a:solidFill>
               <a:srgbClr val="E7D8C9">
-                <a:alpha val="90000"/>
-              </a:srgbClr>
-            </a:solidFill>
-            <a:prstDash val="solid"/>
-          </a:ln>
-        </p:spPr>
-      </p:sp>
-      <p:sp>
-        <p:nvSpPr>
-          <p:cNvPr id="13" name="Text 11"/>
+                <a:alpha val="0"/>
+              </a:srgbClr>
+            </a:solidFill>
+            <a:prstDash val="solid"/>
+          </a:ln>
+          <a:effectLst>
+            <a:outerShdw sx="100000" sy="100000" kx="0" ky="0" algn="bl" rotWithShape="0" blurRad="12700" dist="50800" dir="2700000">
+              <a:srgbClr val="000000">
+                <a:alpha val="8000"/>
+              </a:srgbClr>
+            </a:outerShdw>
+          </a:effectLst>
+        </p:spPr>
+      </p:sp>
+      <p:sp>
+        <p:nvSpPr>
+          <p:cNvPr id="17" name="Text 11"/>
           <p:cNvSpPr txBox="1"/>
           <p:nvPr/>
         </p:nvSpPr>
@@ -7826,9 +7711,7 @@
           <a:ln/>
         </p:spPr>
         <p:txBody>
-          <a:bodyPr wrap="square" lIns="0" tIns="0" rIns="0" bIns="0" rtlCol="0" anchor="ctr">
-            <a:normAutofit/>
-          </a:bodyPr>
+          <a:bodyPr wrap="square" lIns="0" tIns="0" rIns="0" bIns="0" rtlCol="0" anchor="ctr"/>
           <a:lstStyle/>
           <a:p>
             <a:pPr algn="ctr" indent="0" marL="0">
@@ -7854,7 +7737,7 @@
       </p:sp>
       <p:sp>
         <p:nvSpPr>
-          <p:cNvPr id="14" name="Shape 12"/>
+          <p:cNvPr id="18" name="Shape 12"/>
           <p:cNvSpPr/>
           <p:nvPr/>
         </p:nvSpPr>
@@ -7879,144 +7762,39 @@
           </a:ln>
         </p:spPr>
       </p:sp>
-      <p:sp>
-        <p:nvSpPr>
-          <p:cNvPr id="15" name="Shape 13"/>
-          <p:cNvSpPr/>
-          <p:nvPr/>
-        </p:nvSpPr>
-        <p:spPr>
-          <a:xfrm>
-            <a:off x="1110722" y="2378918"/>
-            <a:ext cx="63203" cy="63203"/>
-          </a:xfrm>
-          <a:prstGeom prst="ellipse">
-            <a:avLst/>
-          </a:prstGeom>
-          <a:solidFill>
-            <a:srgbClr val="1F2937"/>
-          </a:solidFill>
-          <a:ln w="12700">
-            <a:solidFill>
-              <a:srgbClr val="1F2937">
-                <a:alpha val="0"/>
-              </a:srgbClr>
-            </a:solidFill>
-            <a:prstDash val="solid"/>
-          </a:ln>
-        </p:spPr>
-      </p:sp>
-      <p:sp>
-        <p:nvSpPr>
-          <p:cNvPr id="16" name="Shape 14"/>
-          <p:cNvSpPr/>
-          <p:nvPr/>
-        </p:nvSpPr>
-        <p:spPr>
-          <a:xfrm>
-            <a:off x="1230808" y="2378918"/>
-            <a:ext cx="63203" cy="63203"/>
-          </a:xfrm>
-          <a:prstGeom prst="ellipse">
-            <a:avLst/>
-          </a:prstGeom>
-          <a:solidFill>
-            <a:srgbClr val="1F2937"/>
-          </a:solidFill>
-          <a:ln w="12700">
-            <a:solidFill>
-              <a:srgbClr val="1F2937">
-                <a:alpha val="0"/>
-              </a:srgbClr>
-            </a:solidFill>
-            <a:prstDash val="solid"/>
-          </a:ln>
-        </p:spPr>
-      </p:sp>
-      <p:sp>
-        <p:nvSpPr>
-          <p:cNvPr id="17" name="Shape 15"/>
-          <p:cNvSpPr/>
-          <p:nvPr/>
-        </p:nvSpPr>
-        <p:spPr>
-          <a:xfrm>
-            <a:off x="1350894" y="2378918"/>
-            <a:ext cx="63203" cy="63203"/>
-          </a:xfrm>
-          <a:prstGeom prst="ellipse">
-            <a:avLst/>
-          </a:prstGeom>
-          <a:solidFill>
-            <a:srgbClr val="1F2937"/>
-          </a:solidFill>
-          <a:ln w="12700">
-            <a:solidFill>
-              <a:srgbClr val="1F2937">
-                <a:alpha val="0"/>
-              </a:srgbClr>
-            </a:solidFill>
-            <a:prstDash val="solid"/>
-          </a:ln>
-        </p:spPr>
-      </p:sp>
-      <p:sp>
-        <p:nvSpPr>
-          <p:cNvPr id="18" name="Shape 16"/>
-          <p:cNvSpPr/>
-          <p:nvPr/>
-        </p:nvSpPr>
-        <p:spPr>
-          <a:xfrm>
-            <a:off x="1173925" y="2407359"/>
-            <a:ext cx="69524" cy="14221"/>
-          </a:xfrm>
-          <a:prstGeom prst="rect">
-            <a:avLst/>
-          </a:prstGeom>
-          <a:solidFill>
-            <a:srgbClr val="1F2937"/>
-          </a:solidFill>
-          <a:ln w="12700">
-            <a:solidFill>
-              <a:srgbClr val="1F2937">
-                <a:alpha val="0"/>
-              </a:srgbClr>
-            </a:solidFill>
-            <a:prstDash val="solid"/>
-          </a:ln>
-        </p:spPr>
-      </p:sp>
-      <p:sp>
-        <p:nvSpPr>
-          <p:cNvPr id="19" name="Shape 17"/>
-          <p:cNvSpPr/>
-          <p:nvPr/>
-        </p:nvSpPr>
-        <p:spPr>
-          <a:xfrm>
-            <a:off x="1294011" y="2407359"/>
-            <a:ext cx="69524" cy="14221"/>
-          </a:xfrm>
-          <a:prstGeom prst="rect">
-            <a:avLst/>
-          </a:prstGeom>
-          <a:solidFill>
-            <a:srgbClr val="1F2937"/>
-          </a:solidFill>
-          <a:ln w="12700">
-            <a:solidFill>
-              <a:srgbClr val="1F2937">
-                <a:alpha val="0"/>
-              </a:srgbClr>
-            </a:solidFill>
-            <a:prstDash val="solid"/>
-          </a:ln>
-        </p:spPr>
-      </p:sp>
-      <p:sp>
-        <p:nvSpPr>
-          <p:cNvPr id="20" name="Text 18"/>
+      <p:pic>
+        <p:nvPicPr>
+          <p:cNvPr id="19" name="Image 4" descr="article icon from tabler-icons (MIT)">    </p:cNvPr>
+          <p:cNvPicPr>
+            <a:picLocks noChangeAspect="1"/>
+          </p:cNvPicPr>
+          <p:nvPr/>
+        </p:nvPicPr>
+        <p:blipFill>
+          <a:blip r:embed="rId9">
+            <a:extLst>
+              <a:ext uri="{96DAC541-7B7A-43D3-8B79-37D633B846F1}">
+                <asvg:svgBlip xmlns:asvg="http://schemas.microsoft.com/office/drawing/2016/SVG/main" r:embed="rId10"/>
+              </a:ext>
+            </a:extLst>
+          </a:blip>
+          <a:stretch>
+            <a:fillRect/>
+          </a:stretch>
+        </p:blipFill>
+        <p:spPr>
+          <a:xfrm>
+            <a:off x="1049274" y="2203704"/>
+            <a:ext cx="438912" cy="438912"/>
+          </a:xfrm>
+          <a:prstGeom prst="rect">
+            <a:avLst/>
+          </a:prstGeom>
+        </p:spPr>
+      </p:pic>
+      <p:sp>
+        <p:nvSpPr>
+          <p:cNvPr id="20" name="Text 13"/>
           <p:cNvSpPr txBox="1"/>
           <p:nvPr/>
         </p:nvSpPr>
@@ -8035,7 +7813,7 @@
           <a:bodyPr wrap="square" lIns="0" tIns="25400" rIns="25400" bIns="0" rtlCol="0" anchor="ctr"/>
           <a:lstStyle/>
           <a:p>
-            <a:pPr algn="l" indent="0" marL="0">
+            <a:pPr algn="ctr" indent="0" marL="0">
               <a:lnSpc>
                 <a:spcPct val="120000"/>
               </a:lnSpc>
@@ -8058,7 +7836,7 @@
       </p:sp>
       <p:sp>
         <p:nvSpPr>
-          <p:cNvPr id="21" name="Shape 19"/>
+          <p:cNvPr id="21" name="Shape 14"/>
           <p:cNvSpPr/>
           <p:nvPr/>
         </p:nvSpPr>
@@ -8083,63 +7861,39 @@
           </a:ln>
         </p:spPr>
       </p:sp>
-      <p:sp>
-        <p:nvSpPr>
-          <p:cNvPr id="22" name="Shape 20"/>
-          <p:cNvSpPr/>
-          <p:nvPr/>
-        </p:nvSpPr>
-        <p:spPr>
-          <a:xfrm rot="10800000">
-            <a:off x="6635044" y="2284113"/>
-            <a:ext cx="240173" cy="265454"/>
-          </a:xfrm>
-          <a:prstGeom prst="pentagon">
-            <a:avLst/>
-          </a:prstGeom>
-          <a:solidFill>
-            <a:srgbClr val="1F2937"/>
-          </a:solidFill>
-          <a:ln w="12700">
-            <a:solidFill>
-              <a:srgbClr val="1F2937">
-                <a:alpha val="0"/>
-              </a:srgbClr>
-            </a:solidFill>
-            <a:prstDash val="solid"/>
-          </a:ln>
-        </p:spPr>
-      </p:sp>
-      <p:sp>
-        <p:nvSpPr>
-          <p:cNvPr id="23" name="Shape 21"/>
-          <p:cNvSpPr/>
-          <p:nvPr/>
-        </p:nvSpPr>
-        <p:spPr>
-          <a:xfrm rot="2100000">
-            <a:off x="6739329" y="2353636"/>
-            <a:ext cx="34762" cy="120086"/>
-          </a:xfrm>
-          <a:prstGeom prst="rect">
-            <a:avLst/>
-          </a:prstGeom>
-          <a:solidFill>
-            <a:srgbClr val="F7F3EF"/>
-          </a:solidFill>
-          <a:ln w="12700">
-            <a:solidFill>
-              <a:srgbClr val="F7F3EF">
-                <a:alpha val="0"/>
-              </a:srgbClr>
-            </a:solidFill>
-            <a:prstDash val="solid"/>
-          </a:ln>
-        </p:spPr>
-      </p:sp>
-      <p:sp>
-        <p:nvSpPr>
-          <p:cNvPr id="24" name="Text 22"/>
+      <p:pic>
+        <p:nvPicPr>
+          <p:cNvPr id="22" name="Image 5" descr="article icon from tabler-icons (MIT)">    </p:cNvPr>
+          <p:cNvPicPr>
+            <a:picLocks noChangeAspect="1"/>
+          </p:cNvPicPr>
+          <p:nvPr/>
+        </p:nvPicPr>
+        <p:blipFill>
+          <a:blip r:embed="rId11">
+            <a:extLst>
+              <a:ext uri="{96DAC541-7B7A-43D3-8B79-37D633B846F1}">
+                <asvg:svgBlip xmlns:asvg="http://schemas.microsoft.com/office/drawing/2016/SVG/main" r:embed="rId12"/>
+              </a:ext>
+            </a:extLst>
+          </a:blip>
+          <a:stretch>
+            <a:fillRect/>
+          </a:stretch>
+        </p:blipFill>
+        <p:spPr>
+          <a:xfrm>
+            <a:off x="6535674" y="2203704"/>
+            <a:ext cx="438912" cy="438912"/>
+          </a:xfrm>
+          <a:prstGeom prst="rect">
+            <a:avLst/>
+          </a:prstGeom>
+        </p:spPr>
+      </p:pic>
+      <p:sp>
+        <p:nvSpPr>
+          <p:cNvPr id="23" name="Text 15"/>
           <p:cNvSpPr txBox="1"/>
           <p:nvPr/>
         </p:nvSpPr>
@@ -8158,7 +7912,7 @@
           <a:bodyPr wrap="square" lIns="0" tIns="25400" rIns="25400" bIns="0" rtlCol="0" anchor="ctr"/>
           <a:lstStyle/>
           <a:p>
-            <a:pPr algn="l" indent="0" marL="0">
+            <a:pPr algn="ctr" indent="0" marL="0">
               <a:lnSpc>
                 <a:spcPct val="120000"/>
               </a:lnSpc>
@@ -8181,7 +7935,7 @@
       </p:sp>
       <p:sp>
         <p:nvSpPr>
-          <p:cNvPr id="25" name="Shape 23"/>
+          <p:cNvPr id="24" name="Shape 16"/>
           <p:cNvSpPr/>
           <p:nvPr/>
         </p:nvSpPr>
@@ -8206,90 +7960,39 @@
           </a:ln>
         </p:spPr>
       </p:sp>
-      <p:sp>
-        <p:nvSpPr>
-          <p:cNvPr id="26" name="Shape 24"/>
-          <p:cNvSpPr/>
-          <p:nvPr/>
-        </p:nvSpPr>
-        <p:spPr>
-          <a:xfrm>
-            <a:off x="1199206" y="4551152"/>
-            <a:ext cx="101125" cy="101125"/>
-          </a:xfrm>
-          <a:prstGeom prst="diamond">
-            <a:avLst/>
-          </a:prstGeom>
-          <a:solidFill>
-            <a:srgbClr val="1F2937"/>
-          </a:solidFill>
-          <a:ln w="12700">
-            <a:solidFill>
-              <a:srgbClr val="1F2937">
-                <a:alpha val="0"/>
-              </a:srgbClr>
-            </a:solidFill>
-            <a:prstDash val="solid"/>
-          </a:ln>
-        </p:spPr>
-      </p:sp>
-      <p:sp>
-        <p:nvSpPr>
-          <p:cNvPr id="27" name="Shape 25"/>
-          <p:cNvSpPr/>
-          <p:nvPr/>
-        </p:nvSpPr>
-        <p:spPr>
-          <a:xfrm>
-            <a:off x="1126523" y="4693359"/>
-            <a:ext cx="63203" cy="63203"/>
-          </a:xfrm>
-          <a:prstGeom prst="diamond">
-            <a:avLst/>
-          </a:prstGeom>
-          <a:solidFill>
-            <a:srgbClr val="1F2937"/>
-          </a:solidFill>
-          <a:ln w="12700">
-            <a:solidFill>
-              <a:srgbClr val="1F2937">
-                <a:alpha val="0"/>
-              </a:srgbClr>
-            </a:solidFill>
-            <a:prstDash val="solid"/>
-          </a:ln>
-        </p:spPr>
-      </p:sp>
-      <p:sp>
-        <p:nvSpPr>
-          <p:cNvPr id="28" name="Shape 26"/>
-          <p:cNvSpPr/>
-          <p:nvPr/>
-        </p:nvSpPr>
-        <p:spPr>
-          <a:xfrm>
-            <a:off x="1306652" y="4724961"/>
-            <a:ext cx="69524" cy="69524"/>
-          </a:xfrm>
-          <a:prstGeom prst="diamond">
-            <a:avLst/>
-          </a:prstGeom>
-          <a:solidFill>
-            <a:srgbClr val="1F2937"/>
-          </a:solidFill>
-          <a:ln w="12700">
-            <a:solidFill>
-              <a:srgbClr val="1F2937">
-                <a:alpha val="0"/>
-              </a:srgbClr>
-            </a:solidFill>
-            <a:prstDash val="solid"/>
-          </a:ln>
-        </p:spPr>
-      </p:sp>
-      <p:sp>
-        <p:nvSpPr>
-          <p:cNvPr id="29" name="Text 27"/>
+      <p:pic>
+        <p:nvPicPr>
+          <p:cNvPr id="25" name="Image 6" descr="article icon from tabler-icons (MIT)">    </p:cNvPr>
+          <p:cNvPicPr>
+            <a:picLocks noChangeAspect="1"/>
+          </p:cNvPicPr>
+          <p:nvPr/>
+        </p:nvPicPr>
+        <p:blipFill>
+          <a:blip r:embed="rId13">
+            <a:extLst>
+              <a:ext uri="{96DAC541-7B7A-43D3-8B79-37D633B846F1}">
+                <asvg:svgBlip xmlns:asvg="http://schemas.microsoft.com/office/drawing/2016/SVG/main" r:embed="rId14"/>
+              </a:ext>
+            </a:extLst>
+          </a:blip>
+          <a:stretch>
+            <a:fillRect/>
+          </a:stretch>
+        </p:blipFill>
+        <p:spPr>
+          <a:xfrm>
+            <a:off x="1049274" y="4489704"/>
+            <a:ext cx="438912" cy="438912"/>
+          </a:xfrm>
+          <a:prstGeom prst="rect">
+            <a:avLst/>
+          </a:prstGeom>
+        </p:spPr>
+      </p:pic>
+      <p:sp>
+        <p:nvSpPr>
+          <p:cNvPr id="26" name="Text 17"/>
           <p:cNvSpPr txBox="1"/>
           <p:nvPr/>
         </p:nvSpPr>
@@ -8308,7 +8011,7 @@
           <a:bodyPr wrap="square" lIns="0" tIns="25400" rIns="25400" bIns="0" rtlCol="0" anchor="ctr"/>
           <a:lstStyle/>
           <a:p>
-            <a:pPr algn="l" indent="0" marL="0">
+            <a:pPr algn="ctr" indent="0" marL="0">
               <a:lnSpc>
                 <a:spcPct val="120000"/>
               </a:lnSpc>
@@ -8331,7 +8034,7 @@
       </p:sp>
       <p:sp>
         <p:nvSpPr>
-          <p:cNvPr id="30" name="Shape 28"/>
+          <p:cNvPr id="27" name="Shape 18"/>
           <p:cNvSpPr/>
           <p:nvPr/>
         </p:nvSpPr>
@@ -8356,90 +8059,39 @@
           </a:ln>
         </p:spPr>
       </p:sp>
-      <p:sp>
-        <p:nvSpPr>
-          <p:cNvPr id="31" name="Shape 29"/>
-          <p:cNvSpPr/>
-          <p:nvPr/>
-        </p:nvSpPr>
-        <p:spPr>
-          <a:xfrm>
-            <a:off x="6647684" y="4687039"/>
-            <a:ext cx="41082" cy="110606"/>
-          </a:xfrm>
-          <a:prstGeom prst="rect">
-            <a:avLst/>
-          </a:prstGeom>
-          <a:solidFill>
-            <a:srgbClr val="1F2937"/>
-          </a:solidFill>
-          <a:ln w="12700">
-            <a:solidFill>
-              <a:srgbClr val="1F2937">
-                <a:alpha val="0"/>
-              </a:srgbClr>
-            </a:solidFill>
-            <a:prstDash val="solid"/>
-          </a:ln>
-        </p:spPr>
-      </p:sp>
-      <p:sp>
-        <p:nvSpPr>
-          <p:cNvPr id="32" name="Shape 30"/>
-          <p:cNvSpPr/>
-          <p:nvPr/>
-        </p:nvSpPr>
-        <p:spPr>
-          <a:xfrm>
-            <a:off x="6726689" y="4601714"/>
-            <a:ext cx="41082" cy="195930"/>
-          </a:xfrm>
-          <a:prstGeom prst="rect">
-            <a:avLst/>
-          </a:prstGeom>
-          <a:solidFill>
-            <a:srgbClr val="1F2937"/>
-          </a:solidFill>
-          <a:ln w="12700">
-            <a:solidFill>
-              <a:srgbClr val="1F2937">
-                <a:alpha val="0"/>
-              </a:srgbClr>
-            </a:solidFill>
-            <a:prstDash val="solid"/>
-          </a:ln>
-        </p:spPr>
-      </p:sp>
-      <p:sp>
-        <p:nvSpPr>
-          <p:cNvPr id="33" name="Shape 31"/>
-          <p:cNvSpPr/>
-          <p:nvPr/>
-        </p:nvSpPr>
-        <p:spPr>
-          <a:xfrm>
-            <a:off x="6805693" y="4645957"/>
-            <a:ext cx="41082" cy="151688"/>
-          </a:xfrm>
-          <a:prstGeom prst="rect">
-            <a:avLst/>
-          </a:prstGeom>
-          <a:solidFill>
-            <a:srgbClr val="1F2937"/>
-          </a:solidFill>
-          <a:ln w="12700">
-            <a:solidFill>
-              <a:srgbClr val="1F2937">
-                <a:alpha val="0"/>
-              </a:srgbClr>
-            </a:solidFill>
-            <a:prstDash val="solid"/>
-          </a:ln>
-        </p:spPr>
-      </p:sp>
-      <p:sp>
-        <p:nvSpPr>
-          <p:cNvPr id="34" name="Text 32"/>
+      <p:pic>
+        <p:nvPicPr>
+          <p:cNvPr id="28" name="Image 7" descr="article icon from tabler-icons (MIT)">    </p:cNvPr>
+          <p:cNvPicPr>
+            <a:picLocks noChangeAspect="1"/>
+          </p:cNvPicPr>
+          <p:nvPr/>
+        </p:nvPicPr>
+        <p:blipFill>
+          <a:blip r:embed="rId15">
+            <a:extLst>
+              <a:ext uri="{96DAC541-7B7A-43D3-8B79-37D633B846F1}">
+                <asvg:svgBlip xmlns:asvg="http://schemas.microsoft.com/office/drawing/2016/SVG/main" r:embed="rId16"/>
+              </a:ext>
+            </a:extLst>
+          </a:blip>
+          <a:stretch>
+            <a:fillRect/>
+          </a:stretch>
+        </p:blipFill>
+        <p:spPr>
+          <a:xfrm>
+            <a:off x="6535674" y="4489704"/>
+            <a:ext cx="438912" cy="438912"/>
+          </a:xfrm>
+          <a:prstGeom prst="rect">
+            <a:avLst/>
+          </a:prstGeom>
+        </p:spPr>
+      </p:pic>
+      <p:sp>
+        <p:nvSpPr>
+          <p:cNvPr id="29" name="Text 19"/>
           <p:cNvSpPr txBox="1"/>
           <p:nvPr/>
         </p:nvSpPr>
@@ -8458,7 +8110,7 @@
           <a:bodyPr wrap="square" lIns="0" tIns="25400" rIns="25400" bIns="0" rtlCol="0" anchor="ctr"/>
           <a:lstStyle/>
           <a:p>
-            <a:pPr algn="l" indent="0" marL="0">
+            <a:pPr algn="ctr" indent="0" marL="0">
               <a:lnSpc>
                 <a:spcPct val="120000"/>
               </a:lnSpc>
@@ -8664,9 +8316,7 @@
           <a:ln/>
         </p:spPr>
         <p:txBody>
-          <a:bodyPr wrap="square" lIns="0" tIns="0" rIns="0" bIns="0" rtlCol="0" anchor="ctr">
-            <a:normAutofit/>
-          </a:bodyPr>
+          <a:bodyPr wrap="square" lIns="0" tIns="0" rIns="0" bIns="0" rtlCol="0" anchor="ctr"/>
           <a:lstStyle/>
           <a:p>
             <a:pPr algn="ctr" indent="0" marL="0">
@@ -8726,7 +8376,7 @@
                 <a:ea typeface="Pretendard" pitchFamily="34" charset="-122"/>
                 <a:cs typeface="Pretendard" pitchFamily="34" charset="-120"/>
               </a:rPr>
-              <a:t>- PPT BIZCAM-derived object rules are structural references only.</a:t>
+              <a:t>- Derived object rules are structural references only.</a:t>
             </a:r>
             <a:endParaRPr lang="en-US" sz="2200" dirty="0"/>
           </a:p>
@@ -8768,7 +8418,7 @@
                 <a:ea typeface="Pretendard" pitchFamily="34" charset="-122"/>
                 <a:cs typeface="Pretendard" pitchFamily="34" charset="-120"/>
               </a:rPr>
-              <a:t>- Original downloaded PPT files remain in .cache, not in the repository.</a:t>
+              <a:t>- Original reference presentation files remain in a local cache, not in the repository.</a:t>
             </a:r>
             <a:endParaRPr lang="en-US" sz="2200" dirty="0"/>
           </a:p>
@@ -8995,125 +8645,273 @@
           </a:ln>
         </p:spPr>
       </p:sp>
-      <p:sp>
-        <p:nvSpPr>
-          <p:cNvPr id="9" name="Shape 7"/>
-          <p:cNvSpPr/>
-          <p:nvPr/>
-        </p:nvSpPr>
+      <p:pic>
+        <p:nvPicPr>
+          <p:cNvPr id="9" name="Image 0" descr="preencoded.png">    </p:cNvPr>
+          <p:cNvPicPr>
+            <a:picLocks noChangeAspect="1"/>
+          </p:cNvPicPr>
+          <p:nvPr/>
+        </p:nvPicPr>
+        <p:blipFill>
+          <a:blip r:embed="rId1">
+            <a:extLst>
+              <a:ext uri="{96DAC541-7B7A-43D3-8B79-37D633B846F1}">
+                <asvg:svgBlip xmlns:asvg="http://schemas.microsoft.com/office/drawing/2016/SVG/main" r:embed="rId2"/>
+              </a:ext>
+            </a:extLst>
+          </a:blip>
+          <a:stretch>
+            <a:fillRect/>
+          </a:stretch>
+        </p:blipFill>
         <p:spPr>
           <a:xfrm>
             <a:off x="822960" y="1463040"/>
             <a:ext cx="5029200" cy="1920240"/>
           </a:xfrm>
-          <a:prstGeom prst="roundRect">
-            <a:avLst>
-              <a:gd name="adj" fmla="val 2857"/>
-            </a:avLst>
-          </a:prstGeom>
-          <a:solidFill>
-            <a:srgbClr val="FFFBF5"/>
+          <a:prstGeom prst="rect">
+            <a:avLst/>
+          </a:prstGeom>
+        </p:spPr>
+      </p:pic>
+      <p:sp>
+        <p:nvSpPr>
+          <p:cNvPr id="10" name="Shape 7"/>
+          <p:cNvSpPr/>
+          <p:nvPr/>
+        </p:nvSpPr>
+        <p:spPr>
+          <a:xfrm>
+            <a:off x="822960" y="1463040"/>
+            <a:ext cx="5029200" cy="1920240"/>
+          </a:xfrm>
+          <a:prstGeom prst="rect">
+            <a:avLst/>
+          </a:prstGeom>
+          <a:solidFill>
+            <a:srgbClr val="FFFBF5">
+              <a:alpha val="0"/>
+            </a:srgbClr>
           </a:solidFill>
           <a:ln w="12700">
             <a:solidFill>
               <a:srgbClr val="E7D8C9">
-                <a:alpha val="90000"/>
-              </a:srgbClr>
-            </a:solidFill>
-            <a:prstDash val="solid"/>
-          </a:ln>
-        </p:spPr>
-      </p:sp>
-      <p:sp>
-        <p:nvSpPr>
-          <p:cNvPr id="10" name="Shape 8"/>
-          <p:cNvSpPr/>
-          <p:nvPr/>
-        </p:nvSpPr>
+                <a:alpha val="0"/>
+              </a:srgbClr>
+            </a:solidFill>
+            <a:prstDash val="solid"/>
+          </a:ln>
+          <a:effectLst>
+            <a:outerShdw sx="100000" sy="100000" kx="0" ky="0" algn="bl" rotWithShape="0" blurRad="12700" dist="50800" dir="2700000">
+              <a:srgbClr val="000000">
+                <a:alpha val="8000"/>
+              </a:srgbClr>
+            </a:outerShdw>
+          </a:effectLst>
+        </p:spPr>
+      </p:sp>
+      <p:pic>
+        <p:nvPicPr>
+          <p:cNvPr id="11" name="Image 1" descr="preencoded.png">    </p:cNvPr>
+          <p:cNvPicPr>
+            <a:picLocks noChangeAspect="1"/>
+          </p:cNvPicPr>
+          <p:nvPr/>
+        </p:nvPicPr>
+        <p:blipFill>
+          <a:blip r:embed="rId3">
+            <a:extLst>
+              <a:ext uri="{96DAC541-7B7A-43D3-8B79-37D633B846F1}">
+                <asvg:svgBlip xmlns:asvg="http://schemas.microsoft.com/office/drawing/2016/SVG/main" r:embed="rId4"/>
+              </a:ext>
+            </a:extLst>
+          </a:blip>
+          <a:stretch>
+            <a:fillRect/>
+          </a:stretch>
+        </p:blipFill>
         <p:spPr>
           <a:xfrm>
             <a:off x="6309360" y="1463040"/>
             <a:ext cx="5029200" cy="1920240"/>
           </a:xfrm>
-          <a:prstGeom prst="roundRect">
-            <a:avLst>
-              <a:gd name="adj" fmla="val 2857"/>
-            </a:avLst>
-          </a:prstGeom>
-          <a:solidFill>
-            <a:srgbClr val="FFFBF5"/>
+          <a:prstGeom prst="rect">
+            <a:avLst/>
+          </a:prstGeom>
+        </p:spPr>
+      </p:pic>
+      <p:sp>
+        <p:nvSpPr>
+          <p:cNvPr id="12" name="Shape 8"/>
+          <p:cNvSpPr/>
+          <p:nvPr/>
+        </p:nvSpPr>
+        <p:spPr>
+          <a:xfrm>
+            <a:off x="6309360" y="1463040"/>
+            <a:ext cx="5029200" cy="1920240"/>
+          </a:xfrm>
+          <a:prstGeom prst="rect">
+            <a:avLst/>
+          </a:prstGeom>
+          <a:solidFill>
+            <a:srgbClr val="FFFBF5">
+              <a:alpha val="0"/>
+            </a:srgbClr>
           </a:solidFill>
           <a:ln w="12700">
             <a:solidFill>
               <a:srgbClr val="E7D8C9">
-                <a:alpha val="90000"/>
-              </a:srgbClr>
-            </a:solidFill>
-            <a:prstDash val="solid"/>
-          </a:ln>
-        </p:spPr>
-      </p:sp>
-      <p:sp>
-        <p:nvSpPr>
-          <p:cNvPr id="11" name="Shape 9"/>
-          <p:cNvSpPr/>
-          <p:nvPr/>
-        </p:nvSpPr>
+                <a:alpha val="0"/>
+              </a:srgbClr>
+            </a:solidFill>
+            <a:prstDash val="solid"/>
+          </a:ln>
+          <a:effectLst>
+            <a:outerShdw sx="100000" sy="100000" kx="0" ky="0" algn="bl" rotWithShape="0" blurRad="12700" dist="50800" dir="2700000">
+              <a:srgbClr val="000000">
+                <a:alpha val="8000"/>
+              </a:srgbClr>
+            </a:outerShdw>
+          </a:effectLst>
+        </p:spPr>
+      </p:sp>
+      <p:pic>
+        <p:nvPicPr>
+          <p:cNvPr id="13" name="Image 2" descr="preencoded.png">    </p:cNvPr>
+          <p:cNvPicPr>
+            <a:picLocks noChangeAspect="1"/>
+          </p:cNvPicPr>
+          <p:nvPr/>
+        </p:nvPicPr>
+        <p:blipFill>
+          <a:blip r:embed="rId5">
+            <a:extLst>
+              <a:ext uri="{96DAC541-7B7A-43D3-8B79-37D633B846F1}">
+                <asvg:svgBlip xmlns:asvg="http://schemas.microsoft.com/office/drawing/2016/SVG/main" r:embed="rId6"/>
+              </a:ext>
+            </a:extLst>
+          </a:blip>
+          <a:stretch>
+            <a:fillRect/>
+          </a:stretch>
+        </p:blipFill>
         <p:spPr>
           <a:xfrm>
             <a:off x="822960" y="3749040"/>
             <a:ext cx="5029200" cy="1920240"/>
           </a:xfrm>
-          <a:prstGeom prst="roundRect">
-            <a:avLst>
-              <a:gd name="adj" fmla="val 2857"/>
-            </a:avLst>
-          </a:prstGeom>
-          <a:solidFill>
-            <a:srgbClr val="FFFBF5"/>
+          <a:prstGeom prst="rect">
+            <a:avLst/>
+          </a:prstGeom>
+        </p:spPr>
+      </p:pic>
+      <p:sp>
+        <p:nvSpPr>
+          <p:cNvPr id="14" name="Shape 9"/>
+          <p:cNvSpPr/>
+          <p:nvPr/>
+        </p:nvSpPr>
+        <p:spPr>
+          <a:xfrm>
+            <a:off x="822960" y="3749040"/>
+            <a:ext cx="5029200" cy="1920240"/>
+          </a:xfrm>
+          <a:prstGeom prst="rect">
+            <a:avLst/>
+          </a:prstGeom>
+          <a:solidFill>
+            <a:srgbClr val="FFFBF5">
+              <a:alpha val="0"/>
+            </a:srgbClr>
           </a:solidFill>
           <a:ln w="12700">
             <a:solidFill>
               <a:srgbClr val="E7D8C9">
-                <a:alpha val="90000"/>
-              </a:srgbClr>
-            </a:solidFill>
-            <a:prstDash val="solid"/>
-          </a:ln>
-        </p:spPr>
-      </p:sp>
-      <p:sp>
-        <p:nvSpPr>
-          <p:cNvPr id="12" name="Shape 10"/>
-          <p:cNvSpPr/>
-          <p:nvPr/>
-        </p:nvSpPr>
+                <a:alpha val="0"/>
+              </a:srgbClr>
+            </a:solidFill>
+            <a:prstDash val="solid"/>
+          </a:ln>
+          <a:effectLst>
+            <a:outerShdw sx="100000" sy="100000" kx="0" ky="0" algn="bl" rotWithShape="0" blurRad="12700" dist="50800" dir="2700000">
+              <a:srgbClr val="000000">
+                <a:alpha val="8000"/>
+              </a:srgbClr>
+            </a:outerShdw>
+          </a:effectLst>
+        </p:spPr>
+      </p:sp>
+      <p:pic>
+        <p:nvPicPr>
+          <p:cNvPr id="15" name="Image 3" descr="preencoded.png">    </p:cNvPr>
+          <p:cNvPicPr>
+            <a:picLocks noChangeAspect="1"/>
+          </p:cNvPicPr>
+          <p:nvPr/>
+        </p:nvPicPr>
+        <p:blipFill>
+          <a:blip r:embed="rId7">
+            <a:extLst>
+              <a:ext uri="{96DAC541-7B7A-43D3-8B79-37D633B846F1}">
+                <asvg:svgBlip xmlns:asvg="http://schemas.microsoft.com/office/drawing/2016/SVG/main" r:embed="rId8"/>
+              </a:ext>
+            </a:extLst>
+          </a:blip>
+          <a:stretch>
+            <a:fillRect/>
+          </a:stretch>
+        </p:blipFill>
         <p:spPr>
           <a:xfrm>
             <a:off x="6309360" y="3749040"/>
             <a:ext cx="5029200" cy="1920240"/>
           </a:xfrm>
-          <a:prstGeom prst="roundRect">
-            <a:avLst>
-              <a:gd name="adj" fmla="val 2857"/>
-            </a:avLst>
-          </a:prstGeom>
-          <a:solidFill>
-            <a:srgbClr val="FFFBF5"/>
+          <a:prstGeom prst="rect">
+            <a:avLst/>
+          </a:prstGeom>
+        </p:spPr>
+      </p:pic>
+      <p:sp>
+        <p:nvSpPr>
+          <p:cNvPr id="16" name="Shape 10"/>
+          <p:cNvSpPr/>
+          <p:nvPr/>
+        </p:nvSpPr>
+        <p:spPr>
+          <a:xfrm>
+            <a:off x="6309360" y="3749040"/>
+            <a:ext cx="5029200" cy="1920240"/>
+          </a:xfrm>
+          <a:prstGeom prst="rect">
+            <a:avLst/>
+          </a:prstGeom>
+          <a:solidFill>
+            <a:srgbClr val="FFFBF5">
+              <a:alpha val="0"/>
+            </a:srgbClr>
           </a:solidFill>
           <a:ln w="12700">
             <a:solidFill>
               <a:srgbClr val="E7D8C9">
-                <a:alpha val="90000"/>
-              </a:srgbClr>
-            </a:solidFill>
-            <a:prstDash val="solid"/>
-          </a:ln>
-        </p:spPr>
-      </p:sp>
-      <p:sp>
-        <p:nvSpPr>
-          <p:cNvPr id="13" name="Text 11"/>
+                <a:alpha val="0"/>
+              </a:srgbClr>
+            </a:solidFill>
+            <a:prstDash val="solid"/>
+          </a:ln>
+          <a:effectLst>
+            <a:outerShdw sx="100000" sy="100000" kx="0" ky="0" algn="bl" rotWithShape="0" blurRad="12700" dist="50800" dir="2700000">
+              <a:srgbClr val="000000">
+                <a:alpha val="8000"/>
+              </a:srgbClr>
+            </a:outerShdw>
+          </a:effectLst>
+        </p:spPr>
+      </p:sp>
+      <p:sp>
+        <p:nvSpPr>
+          <p:cNvPr id="17" name="Text 11"/>
           <p:cNvSpPr txBox="1"/>
           <p:nvPr/>
         </p:nvSpPr>
@@ -9129,9 +8927,7 @@
           <a:ln/>
         </p:spPr>
         <p:txBody>
-          <a:bodyPr wrap="square" lIns="0" tIns="0" rIns="0" bIns="0" rtlCol="0" anchor="ctr">
-            <a:normAutofit/>
-          </a:bodyPr>
+          <a:bodyPr wrap="square" lIns="0" tIns="0" rIns="0" bIns="0" rtlCol="0" anchor="ctr"/>
           <a:lstStyle/>
           <a:p>
             <a:pPr algn="ctr" indent="0" marL="0">
@@ -9157,7 +8953,7 @@
       </p:sp>
       <p:sp>
         <p:nvSpPr>
-          <p:cNvPr id="14" name="Shape 12"/>
+          <p:cNvPr id="18" name="Shape 12"/>
           <p:cNvSpPr/>
           <p:nvPr/>
         </p:nvSpPr>
@@ -9182,151 +8978,46 @@
           </a:ln>
         </p:spPr>
       </p:sp>
-      <p:sp>
-        <p:nvSpPr>
-          <p:cNvPr id="15" name="Shape 13"/>
-          <p:cNvSpPr/>
-          <p:nvPr/>
-        </p:nvSpPr>
-        <p:spPr>
-          <a:xfrm>
-            <a:off x="1110722" y="2378918"/>
-            <a:ext cx="63203" cy="63203"/>
-          </a:xfrm>
-          <a:prstGeom prst="ellipse">
-            <a:avLst/>
-          </a:prstGeom>
-          <a:solidFill>
-            <a:srgbClr val="1F2937"/>
-          </a:solidFill>
-          <a:ln w="12700">
-            <a:solidFill>
-              <a:srgbClr val="1F2937">
-                <a:alpha val="0"/>
-              </a:srgbClr>
-            </a:solidFill>
-            <a:prstDash val="solid"/>
-          </a:ln>
-        </p:spPr>
-      </p:sp>
-      <p:sp>
-        <p:nvSpPr>
-          <p:cNvPr id="16" name="Shape 14"/>
-          <p:cNvSpPr/>
-          <p:nvPr/>
-        </p:nvSpPr>
-        <p:spPr>
-          <a:xfrm>
-            <a:off x="1230808" y="2378918"/>
-            <a:ext cx="63203" cy="63203"/>
-          </a:xfrm>
-          <a:prstGeom prst="ellipse">
-            <a:avLst/>
-          </a:prstGeom>
-          <a:solidFill>
-            <a:srgbClr val="1F2937"/>
-          </a:solidFill>
-          <a:ln w="12700">
-            <a:solidFill>
-              <a:srgbClr val="1F2937">
-                <a:alpha val="0"/>
-              </a:srgbClr>
-            </a:solidFill>
-            <a:prstDash val="solid"/>
-          </a:ln>
-        </p:spPr>
-      </p:sp>
-      <p:sp>
-        <p:nvSpPr>
-          <p:cNvPr id="17" name="Shape 15"/>
-          <p:cNvSpPr/>
-          <p:nvPr/>
-        </p:nvSpPr>
-        <p:spPr>
-          <a:xfrm>
-            <a:off x="1350894" y="2378918"/>
-            <a:ext cx="63203" cy="63203"/>
-          </a:xfrm>
-          <a:prstGeom prst="ellipse">
-            <a:avLst/>
-          </a:prstGeom>
-          <a:solidFill>
-            <a:srgbClr val="1F2937"/>
-          </a:solidFill>
-          <a:ln w="12700">
-            <a:solidFill>
-              <a:srgbClr val="1F2937">
-                <a:alpha val="0"/>
-              </a:srgbClr>
-            </a:solidFill>
-            <a:prstDash val="solid"/>
-          </a:ln>
-        </p:spPr>
-      </p:sp>
-      <p:sp>
-        <p:nvSpPr>
-          <p:cNvPr id="18" name="Shape 16"/>
-          <p:cNvSpPr/>
-          <p:nvPr/>
-        </p:nvSpPr>
-        <p:spPr>
-          <a:xfrm>
-            <a:off x="1173925" y="2407359"/>
-            <a:ext cx="69524" cy="14221"/>
-          </a:xfrm>
-          <a:prstGeom prst="rect">
-            <a:avLst/>
-          </a:prstGeom>
-          <a:solidFill>
-            <a:srgbClr val="1F2937"/>
-          </a:solidFill>
-          <a:ln w="12700">
-            <a:solidFill>
-              <a:srgbClr val="1F2937">
-                <a:alpha val="0"/>
-              </a:srgbClr>
-            </a:solidFill>
-            <a:prstDash val="solid"/>
-          </a:ln>
-        </p:spPr>
-      </p:sp>
-      <p:sp>
-        <p:nvSpPr>
-          <p:cNvPr id="19" name="Shape 17"/>
-          <p:cNvSpPr/>
-          <p:nvPr/>
-        </p:nvSpPr>
-        <p:spPr>
-          <a:xfrm>
-            <a:off x="1294011" y="2407359"/>
-            <a:ext cx="69524" cy="14221"/>
-          </a:xfrm>
-          <a:prstGeom prst="rect">
-            <a:avLst/>
-          </a:prstGeom>
-          <a:solidFill>
-            <a:srgbClr val="1F2937"/>
-          </a:solidFill>
-          <a:ln w="12700">
-            <a:solidFill>
-              <a:srgbClr val="1F2937">
-                <a:alpha val="0"/>
-              </a:srgbClr>
-            </a:solidFill>
-            <a:prstDash val="solid"/>
-          </a:ln>
-        </p:spPr>
-      </p:sp>
-      <p:sp>
-        <p:nvSpPr>
-          <p:cNvPr id="20" name="Text 18"/>
+      <p:pic>
+        <p:nvPicPr>
+          <p:cNvPr id="19" name="Image 4" descr="flow icon from tabler-icons (MIT)">    </p:cNvPr>
+          <p:cNvPicPr>
+            <a:picLocks noChangeAspect="1"/>
+          </p:cNvPicPr>
+          <p:nvPr/>
+        </p:nvPicPr>
+        <p:blipFill>
+          <a:blip r:embed="rId9">
+            <a:extLst>
+              <a:ext uri="{96DAC541-7B7A-43D3-8B79-37D633B846F1}">
+                <asvg:svgBlip xmlns:asvg="http://schemas.microsoft.com/office/drawing/2016/SVG/main" r:embed="rId10"/>
+              </a:ext>
+            </a:extLst>
+          </a:blip>
+          <a:stretch>
+            <a:fillRect/>
+          </a:stretch>
+        </p:blipFill>
+        <p:spPr>
+          <a:xfrm>
+            <a:off x="1049274" y="2203704"/>
+            <a:ext cx="438912" cy="438912"/>
+          </a:xfrm>
+          <a:prstGeom prst="rect">
+            <a:avLst/>
+          </a:prstGeom>
+        </p:spPr>
+      </p:pic>
+      <p:sp>
+        <p:nvSpPr>
+          <p:cNvPr id="20" name="Text 13"/>
           <p:cNvSpPr txBox="1"/>
           <p:nvPr/>
         </p:nvSpPr>
         <p:spPr>
           <a:xfrm>
-            <a:off x="1689354" y="1627632"/>
-            <a:ext cx="3961638" cy="1591056"/>
+            <a:off x="1689354" y="1865376"/>
+            <a:ext cx="3961638" cy="1115568"/>
           </a:xfrm>
           <a:prstGeom prst="rect">
             <a:avLst/>
@@ -9335,9 +9026,7 @@
           <a:ln/>
         </p:spPr>
         <p:txBody>
-          <a:bodyPr wrap="square" lIns="0" tIns="25400" rIns="25400" bIns="0" rtlCol="0" anchor="ctr">
-            <a:normAutofit/>
-          </a:bodyPr>
+          <a:bodyPr wrap="square" lIns="0" tIns="25400" rIns="25400" bIns="0" rtlCol="0" anchor="ctr"/>
           <a:lstStyle/>
           <a:p>
             <a:pPr algn="l" indent="0" marL="0">
@@ -9380,7 +9069,7 @@
       </p:sp>
       <p:sp>
         <p:nvSpPr>
-          <p:cNvPr id="21" name="Shape 19"/>
+          <p:cNvPr id="21" name="Shape 14"/>
           <p:cNvSpPr/>
           <p:nvPr/>
         </p:nvSpPr>
@@ -9405,70 +9094,46 @@
           </a:ln>
         </p:spPr>
       </p:sp>
-      <p:sp>
-        <p:nvSpPr>
-          <p:cNvPr id="22" name="Shape 20"/>
-          <p:cNvSpPr/>
-          <p:nvPr/>
-        </p:nvSpPr>
-        <p:spPr>
-          <a:xfrm rot="10800000">
-            <a:off x="6635044" y="2284113"/>
-            <a:ext cx="240173" cy="265454"/>
-          </a:xfrm>
-          <a:prstGeom prst="pentagon">
-            <a:avLst/>
-          </a:prstGeom>
-          <a:solidFill>
-            <a:srgbClr val="1F2937"/>
-          </a:solidFill>
-          <a:ln w="12700">
-            <a:solidFill>
-              <a:srgbClr val="1F2937">
-                <a:alpha val="0"/>
-              </a:srgbClr>
-            </a:solidFill>
-            <a:prstDash val="solid"/>
-          </a:ln>
-        </p:spPr>
-      </p:sp>
-      <p:sp>
-        <p:nvSpPr>
-          <p:cNvPr id="23" name="Shape 21"/>
-          <p:cNvSpPr/>
-          <p:nvPr/>
-        </p:nvSpPr>
-        <p:spPr>
-          <a:xfrm rot="2100000">
-            <a:off x="6739329" y="2353636"/>
-            <a:ext cx="34762" cy="120086"/>
-          </a:xfrm>
-          <a:prstGeom prst="rect">
-            <a:avLst/>
-          </a:prstGeom>
-          <a:solidFill>
-            <a:srgbClr val="F7F3EF"/>
-          </a:solidFill>
-          <a:ln w="12700">
-            <a:solidFill>
-              <a:srgbClr val="F7F3EF">
-                <a:alpha val="0"/>
-              </a:srgbClr>
-            </a:solidFill>
-            <a:prstDash val="solid"/>
-          </a:ln>
-        </p:spPr>
-      </p:sp>
-      <p:sp>
-        <p:nvSpPr>
-          <p:cNvPr id="24" name="Text 22"/>
+      <p:pic>
+        <p:nvPicPr>
+          <p:cNvPr id="22" name="Image 5" descr="github icon from simple-icons (CC0-1.0 with brand guidelines)">    </p:cNvPr>
+          <p:cNvPicPr>
+            <a:picLocks noChangeAspect="1"/>
+          </p:cNvPicPr>
+          <p:nvPr/>
+        </p:nvPicPr>
+        <p:blipFill>
+          <a:blip r:embed="rId11">
+            <a:extLst>
+              <a:ext uri="{96DAC541-7B7A-43D3-8B79-37D633B846F1}">
+                <asvg:svgBlip xmlns:asvg="http://schemas.microsoft.com/office/drawing/2016/SVG/main" r:embed="rId12"/>
+              </a:ext>
+            </a:extLst>
+          </a:blip>
+          <a:stretch>
+            <a:fillRect/>
+          </a:stretch>
+        </p:blipFill>
+        <p:spPr>
+          <a:xfrm>
+            <a:off x="6535674" y="2203704"/>
+            <a:ext cx="438912" cy="438912"/>
+          </a:xfrm>
+          <a:prstGeom prst="rect">
+            <a:avLst/>
+          </a:prstGeom>
+        </p:spPr>
+      </p:pic>
+      <p:sp>
+        <p:nvSpPr>
+          <p:cNvPr id="23" name="Text 15"/>
           <p:cNvSpPr txBox="1"/>
           <p:nvPr/>
         </p:nvSpPr>
         <p:spPr>
           <a:xfrm>
-            <a:off x="7175754" y="1627632"/>
-            <a:ext cx="3961638" cy="1591056"/>
+            <a:off x="7175754" y="1865376"/>
+            <a:ext cx="3961638" cy="1115568"/>
           </a:xfrm>
           <a:prstGeom prst="rect">
             <a:avLst/>
@@ -9477,9 +9142,7 @@
           <a:ln/>
         </p:spPr>
         <p:txBody>
-          <a:bodyPr wrap="square" lIns="0" tIns="25400" rIns="25400" bIns="0" rtlCol="0" anchor="ctr">
-            <a:normAutofit/>
-          </a:bodyPr>
+          <a:bodyPr wrap="square" lIns="0" tIns="25400" rIns="25400" bIns="0" rtlCol="0" anchor="ctr"/>
           <a:lstStyle/>
           <a:p>
             <a:pPr algn="l" indent="0" marL="0">
@@ -9522,7 +9185,7 @@
       </p:sp>
       <p:sp>
         <p:nvSpPr>
-          <p:cNvPr id="25" name="Shape 23"/>
+          <p:cNvPr id="24" name="Shape 16"/>
           <p:cNvSpPr/>
           <p:nvPr/>
         </p:nvSpPr>
@@ -9547,97 +9210,46 @@
           </a:ln>
         </p:spPr>
       </p:sp>
-      <p:sp>
-        <p:nvSpPr>
-          <p:cNvPr id="26" name="Shape 24"/>
-          <p:cNvSpPr/>
-          <p:nvPr/>
-        </p:nvSpPr>
-        <p:spPr>
-          <a:xfrm>
-            <a:off x="1199206" y="4551152"/>
-            <a:ext cx="101125" cy="101125"/>
-          </a:xfrm>
-          <a:prstGeom prst="diamond">
-            <a:avLst/>
-          </a:prstGeom>
-          <a:solidFill>
-            <a:srgbClr val="1F2937"/>
-          </a:solidFill>
-          <a:ln w="12700">
-            <a:solidFill>
-              <a:srgbClr val="1F2937">
-                <a:alpha val="0"/>
-              </a:srgbClr>
-            </a:solidFill>
-            <a:prstDash val="solid"/>
-          </a:ln>
-        </p:spPr>
-      </p:sp>
-      <p:sp>
-        <p:nvSpPr>
-          <p:cNvPr id="27" name="Shape 25"/>
-          <p:cNvSpPr/>
-          <p:nvPr/>
-        </p:nvSpPr>
-        <p:spPr>
-          <a:xfrm>
-            <a:off x="1126523" y="4693359"/>
-            <a:ext cx="63203" cy="63203"/>
-          </a:xfrm>
-          <a:prstGeom prst="diamond">
-            <a:avLst/>
-          </a:prstGeom>
-          <a:solidFill>
-            <a:srgbClr val="1F2937"/>
-          </a:solidFill>
-          <a:ln w="12700">
-            <a:solidFill>
-              <a:srgbClr val="1F2937">
-                <a:alpha val="0"/>
-              </a:srgbClr>
-            </a:solidFill>
-            <a:prstDash val="solid"/>
-          </a:ln>
-        </p:spPr>
-      </p:sp>
-      <p:sp>
-        <p:nvSpPr>
-          <p:cNvPr id="28" name="Shape 26"/>
-          <p:cNvSpPr/>
-          <p:nvPr/>
-        </p:nvSpPr>
-        <p:spPr>
-          <a:xfrm>
-            <a:off x="1306652" y="4724961"/>
-            <a:ext cx="69524" cy="69524"/>
-          </a:xfrm>
-          <a:prstGeom prst="diamond">
-            <a:avLst/>
-          </a:prstGeom>
-          <a:solidFill>
-            <a:srgbClr val="1F2937"/>
-          </a:solidFill>
-          <a:ln w="12700">
-            <a:solidFill>
-              <a:srgbClr val="1F2937">
-                <a:alpha val="0"/>
-              </a:srgbClr>
-            </a:solidFill>
-            <a:prstDash val="solid"/>
-          </a:ln>
-        </p:spPr>
-      </p:sp>
-      <p:sp>
-        <p:nvSpPr>
-          <p:cNvPr id="29" name="Text 27"/>
+      <p:pic>
+        <p:nvPicPr>
+          <p:cNvPr id="25" name="Image 6" descr="flow icon from tabler-icons (MIT)">    </p:cNvPr>
+          <p:cNvPicPr>
+            <a:picLocks noChangeAspect="1"/>
+          </p:cNvPicPr>
+          <p:nvPr/>
+        </p:nvPicPr>
+        <p:blipFill>
+          <a:blip r:embed="rId13">
+            <a:extLst>
+              <a:ext uri="{96DAC541-7B7A-43D3-8B79-37D633B846F1}">
+                <asvg:svgBlip xmlns:asvg="http://schemas.microsoft.com/office/drawing/2016/SVG/main" r:embed="rId14"/>
+              </a:ext>
+            </a:extLst>
+          </a:blip>
+          <a:stretch>
+            <a:fillRect/>
+          </a:stretch>
+        </p:blipFill>
+        <p:spPr>
+          <a:xfrm>
+            <a:off x="1049274" y="4489704"/>
+            <a:ext cx="438912" cy="438912"/>
+          </a:xfrm>
+          <a:prstGeom prst="rect">
+            <a:avLst/>
+          </a:prstGeom>
+        </p:spPr>
+      </p:pic>
+      <p:sp>
+        <p:nvSpPr>
+          <p:cNvPr id="26" name="Text 17"/>
           <p:cNvSpPr txBox="1"/>
           <p:nvPr/>
         </p:nvSpPr>
         <p:spPr>
           <a:xfrm>
-            <a:off x="1689354" y="3913632"/>
-            <a:ext cx="3961638" cy="1591056"/>
+            <a:off x="1689354" y="3983736"/>
+            <a:ext cx="3961638" cy="1450848"/>
           </a:xfrm>
           <a:prstGeom prst="rect">
             <a:avLst/>
@@ -9646,9 +9258,7 @@
           <a:ln/>
         </p:spPr>
         <p:txBody>
-          <a:bodyPr wrap="square" lIns="0" tIns="25400" rIns="25400" bIns="0" rtlCol="0" anchor="ctr">
-            <a:normAutofit/>
-          </a:bodyPr>
+          <a:bodyPr wrap="square" lIns="0" tIns="25400" rIns="25400" bIns="0" rtlCol="0" anchor="ctr"/>
           <a:lstStyle/>
           <a:p>
             <a:pPr algn="l" indent="0" marL="0">
@@ -9691,7 +9301,7 @@
       </p:sp>
       <p:sp>
         <p:nvSpPr>
-          <p:cNvPr id="30" name="Shape 28"/>
+          <p:cNvPr id="27" name="Shape 18"/>
           <p:cNvSpPr/>
           <p:nvPr/>
         </p:nvSpPr>
@@ -9716,97 +9326,46 @@
           </a:ln>
         </p:spPr>
       </p:sp>
-      <p:sp>
-        <p:nvSpPr>
-          <p:cNvPr id="31" name="Shape 29"/>
-          <p:cNvSpPr/>
-          <p:nvPr/>
-        </p:nvSpPr>
-        <p:spPr>
-          <a:xfrm>
-            <a:off x="6647684" y="4687039"/>
-            <a:ext cx="41082" cy="110606"/>
-          </a:xfrm>
-          <a:prstGeom prst="rect">
-            <a:avLst/>
-          </a:prstGeom>
-          <a:solidFill>
-            <a:srgbClr val="1F2937"/>
-          </a:solidFill>
-          <a:ln w="12700">
-            <a:solidFill>
-              <a:srgbClr val="1F2937">
-                <a:alpha val="0"/>
-              </a:srgbClr>
-            </a:solidFill>
-            <a:prstDash val="solid"/>
-          </a:ln>
-        </p:spPr>
-      </p:sp>
-      <p:sp>
-        <p:nvSpPr>
-          <p:cNvPr id="32" name="Shape 30"/>
-          <p:cNvSpPr/>
-          <p:nvPr/>
-        </p:nvSpPr>
-        <p:spPr>
-          <a:xfrm>
-            <a:off x="6726689" y="4601714"/>
-            <a:ext cx="41082" cy="195930"/>
-          </a:xfrm>
-          <a:prstGeom prst="rect">
-            <a:avLst/>
-          </a:prstGeom>
-          <a:solidFill>
-            <a:srgbClr val="1F2937"/>
-          </a:solidFill>
-          <a:ln w="12700">
-            <a:solidFill>
-              <a:srgbClr val="1F2937">
-                <a:alpha val="0"/>
-              </a:srgbClr>
-            </a:solidFill>
-            <a:prstDash val="solid"/>
-          </a:ln>
-        </p:spPr>
-      </p:sp>
-      <p:sp>
-        <p:nvSpPr>
-          <p:cNvPr id="33" name="Shape 31"/>
-          <p:cNvSpPr/>
-          <p:nvPr/>
-        </p:nvSpPr>
-        <p:spPr>
-          <a:xfrm>
-            <a:off x="6805693" y="4645957"/>
-            <a:ext cx="41082" cy="151688"/>
-          </a:xfrm>
-          <a:prstGeom prst="rect">
-            <a:avLst/>
-          </a:prstGeom>
-          <a:solidFill>
-            <a:srgbClr val="1F2937"/>
-          </a:solidFill>
-          <a:ln w="12700">
-            <a:solidFill>
-              <a:srgbClr val="1F2937">
-                <a:alpha val="0"/>
-              </a:srgbClr>
-            </a:solidFill>
-            <a:prstDash val="solid"/>
-          </a:ln>
-        </p:spPr>
-      </p:sp>
-      <p:sp>
-        <p:nvSpPr>
-          <p:cNvPr id="34" name="Text 32"/>
+      <p:pic>
+        <p:nvPicPr>
+          <p:cNvPr id="28" name="Image 7" descr="github icon from simple-icons (CC0-1.0 with brand guidelines)">    </p:cNvPr>
+          <p:cNvPicPr>
+            <a:picLocks noChangeAspect="1"/>
+          </p:cNvPicPr>
+          <p:nvPr/>
+        </p:nvPicPr>
+        <p:blipFill>
+          <a:blip r:embed="rId15">
+            <a:extLst>
+              <a:ext uri="{96DAC541-7B7A-43D3-8B79-37D633B846F1}">
+                <asvg:svgBlip xmlns:asvg="http://schemas.microsoft.com/office/drawing/2016/SVG/main" r:embed="rId16"/>
+              </a:ext>
+            </a:extLst>
+          </a:blip>
+          <a:stretch>
+            <a:fillRect/>
+          </a:stretch>
+        </p:blipFill>
+        <p:spPr>
+          <a:xfrm>
+            <a:off x="6535674" y="4489704"/>
+            <a:ext cx="438912" cy="438912"/>
+          </a:xfrm>
+          <a:prstGeom prst="rect">
+            <a:avLst/>
+          </a:prstGeom>
+        </p:spPr>
+      </p:pic>
+      <p:sp>
+        <p:nvSpPr>
+          <p:cNvPr id="29" name="Text 19"/>
           <p:cNvSpPr txBox="1"/>
           <p:nvPr/>
         </p:nvSpPr>
         <p:spPr>
           <a:xfrm>
-            <a:off x="7175754" y="3913632"/>
-            <a:ext cx="3961638" cy="1591056"/>
+            <a:off x="7175754" y="4151376"/>
+            <a:ext cx="3961638" cy="1115568"/>
           </a:xfrm>
           <a:prstGeom prst="rect">
             <a:avLst/>
@@ -9815,9 +9374,7 @@
           <a:ln/>
         </p:spPr>
         <p:txBody>
-          <a:bodyPr wrap="square" lIns="0" tIns="25400" rIns="25400" bIns="0" rtlCol="0" anchor="ctr">
-            <a:normAutofit/>
-          </a:bodyPr>
+          <a:bodyPr wrap="square" lIns="0" tIns="25400" rIns="25400" bIns="0" rtlCol="0" anchor="ctr"/>
           <a:lstStyle/>
           <a:p>
             <a:pPr algn="l" indent="0" marL="0">
